--- a/bitcoin_scam_detection.pptx
+++ b/bitcoin_scam_detection.pptx
@@ -4,21 +4,21 @@
   <p:sldMasterIdLst>
     <p:sldMasterId id="2147483648" r:id="rId1"/>
   </p:sldMasterIdLst>
+  <p:notesMasterIdLst>
+    <p:notesMasterId r:id="rId12"/>
+  </p:notesMasterIdLst>
   <p:sldIdLst>
     <p:sldId id="256" r:id="rId2"/>
     <p:sldId id="257" r:id="rId3"/>
     <p:sldId id="258" r:id="rId4"/>
     <p:sldId id="259" r:id="rId5"/>
-    <p:sldId id="260" r:id="rId6"/>
-    <p:sldId id="261" r:id="rId7"/>
-    <p:sldId id="262" r:id="rId8"/>
-    <p:sldId id="263" r:id="rId9"/>
+    <p:sldId id="261" r:id="rId6"/>
+    <p:sldId id="263" r:id="rId7"/>
+    <p:sldId id="266" r:id="rId8"/>
+    <p:sldId id="267" r:id="rId9"/>
     <p:sldId id="264" r:id="rId10"/>
     <p:sldId id="265" r:id="rId11"/>
   </p:sldIdLst>
-  <p:notesMasterIdLst>
-    <p:notesMasterId r:id="rId12"/>
-  </p:notesMasterIdLst>
   <p:sldSz cx="12192000" cy="6858000"/>
   <p:notesSz cx="6858000" cy="12192000"/>
   <p:defaultTextStyle>
@@ -113,6 +113,11 @@
       </a:defRPr>
     </a:lvl9pPr>
   </p:defaultTextStyle>
+  <p:extLst>
+    <p:ext uri="{EFAFB233-063F-42B5-8137-9DF3F51BA10A}">
+      <p15:sldGuideLst xmlns:p15="http://schemas.microsoft.com/office/powerpoint/2012/main"/>
+    </p:ext>
+  </p:extLst>
 </p:presentation>
 </file>
 
@@ -138,234 +143,10 @@
           <a:chExt cx="0" cy="0"/>
         </a:xfrm>
       </p:grpSpPr>
-      <p:sp>
-        <p:nvSpPr>
-          <p:cNvPr id="2" name="Header Placeholder 1"/>
-          <p:cNvSpPr>
-            <a:spLocks noGrp="1"/>
-          </p:cNvSpPr>
-          <p:nvPr>
-            <p:ph type="hdr" sz="quarter"/>
-          </p:nvPr>
-        </p:nvSpPr>
-        <p:spPr>
-          <a:xfrm>
-            <a:off x="0" y="0"/>
-            <a:ext cx="2971800" cy="458788"/>
-          </a:xfrm>
-          <a:prstGeom prst="rect">
-            <a:avLst/>
-          </a:prstGeom>
-        </p:spPr>
-        <p:txBody>
-          <a:bodyPr vert="horz" lIns="91440" tIns="45720" rIns="91440" bIns="45720" rtlCol="0"/>
-          <a:lstStyle>
-            <a:lvl1pPr algn="l">
-              <a:defRPr sz="1200"/>
-            </a:lvl1pPr>
-          </a:lstStyle>
-          <a:p>
-            <a:endParaRPr lang="en-US"/>
-          </a:p>
-        </p:txBody>
-      </p:sp>
-      <p:sp>
-        <p:nvSpPr>
-          <p:cNvPr id="3" name="Date Placeholder 2"/>
-          <p:cNvSpPr>
-            <a:spLocks noGrp="1"/>
-          </p:cNvSpPr>
-          <p:nvPr>
-            <p:ph type="dt" idx="1"/>
-          </p:nvPr>
-        </p:nvSpPr>
-        <p:spPr>
-          <a:xfrm>
-            <a:off x="3884613" y="0"/>
-            <a:ext cx="2971800" cy="458788"/>
-          </a:xfrm>
-          <a:prstGeom prst="rect">
-            <a:avLst/>
-          </a:prstGeom>
-        </p:spPr>
-        <p:txBody>
-          <a:bodyPr vert="horz" lIns="91440" tIns="45720" rIns="91440" bIns="45720" rtlCol="0"/>
-          <a:lstStyle>
-            <a:lvl1pPr algn="r">
-              <a:defRPr sz="1200"/>
-            </a:lvl1pPr>
-          </a:lstStyle>
-          <a:p>
-            <a:fld id="{5282F153-3F37-0F45-9E97-73ACFA13230C}" type="datetimeFigureOut">
-              <a:rPr lang="en-US"/>
-              <a:t>7/23/19</a:t>
-            </a:fld>
-            <a:endParaRPr lang="en-US"/>
-          </a:p>
-        </p:txBody>
-      </p:sp>
-      <p:sp>
-        <p:nvSpPr>
-          <p:cNvPr id="4" name="Slide Image Placeholder 3"/>
-          <p:cNvSpPr>
-            <a:spLocks noGrp="1" noRot="1" noChangeAspect="1"/>
-          </p:cNvSpPr>
-          <p:nvPr>
-            <p:ph type="sldImg" idx="2"/>
-          </p:nvPr>
-        </p:nvSpPr>
-        <p:spPr>
-          <a:xfrm>
-            <a:off x="685800" y="1143000"/>
-            <a:ext cx="5486400" cy="3086100"/>
-          </a:xfrm>
-          <a:prstGeom prst="rect">
-            <a:avLst/>
-          </a:prstGeom>
-          <a:noFill/>
-          <a:ln w="12700">
-            <a:solidFill>
-              <a:prstClr val="black"/>
-            </a:solidFill>
-          </a:ln>
-        </p:spPr>
-        <p:txBody>
-          <a:bodyPr vert="horz" lIns="91440" tIns="45720" rIns="91440" bIns="45720" rtlCol="0" anchor="ctr"/>
-          <a:lstStyle/>
-          <a:p>
-            <a:endParaRPr lang="en-US"/>
-          </a:p>
-        </p:txBody>
-      </p:sp>
-      <p:sp>
-        <p:nvSpPr>
-          <p:cNvPr id="5" name="Notes Placeholder 4"/>
-          <p:cNvSpPr>
-            <a:spLocks noGrp="1"/>
-          </p:cNvSpPr>
-          <p:nvPr>
-            <p:ph type="body" sz="quarter" idx="3"/>
-          </p:nvPr>
-        </p:nvSpPr>
-        <p:spPr>
-          <a:xfrm>
-            <a:off x="685800" y="4400550"/>
-            <a:ext cx="5486400" cy="3600450"/>
-          </a:xfrm>
-          <a:prstGeom prst="rect">
-            <a:avLst/>
-          </a:prstGeom>
-        </p:spPr>
-        <p:txBody>
-          <a:bodyPr vert="horz" lIns="91440" tIns="45720" rIns="91440" bIns="45720" rtlCol="0"/>
-          <a:lstStyle/>
-          <a:p>
-            <a:pPr lvl="0"/>
-            <a:r>
-              <a:rPr lang="en-US"/>
-              <a:t>Click to edit Master text styles</a:t>
-            </a:r>
-          </a:p>
-          <a:p>
-            <a:pPr lvl="1"/>
-            <a:r>
-              <a:rPr lang="en-US"/>
-              <a:t>Second level</a:t>
-            </a:r>
-          </a:p>
-          <a:p>
-            <a:pPr lvl="2"/>
-            <a:r>
-              <a:rPr lang="en-US"/>
-              <a:t>Third level</a:t>
-            </a:r>
-          </a:p>
-          <a:p>
-            <a:pPr lvl="3"/>
-            <a:r>
-              <a:rPr lang="en-US"/>
-              <a:t>Fourth level</a:t>
-            </a:r>
-          </a:p>
-          <a:p>
-            <a:pPr lvl="4"/>
-            <a:r>
-              <a:rPr lang="en-US"/>
-              <a:t>Fifth level</a:t>
-            </a:r>
-          </a:p>
-        </p:txBody>
-      </p:sp>
-      <p:sp>
-        <p:nvSpPr>
-          <p:cNvPr id="6" name="Footer Placeholder 5"/>
-          <p:cNvSpPr>
-            <a:spLocks noGrp="1"/>
-          </p:cNvSpPr>
-          <p:nvPr>
-            <p:ph type="ftr" sz="quarter" idx="4"/>
-          </p:nvPr>
-        </p:nvSpPr>
-        <p:spPr>
-          <a:xfrm>
-            <a:off x="0" y="8685213"/>
-            <a:ext cx="2971800" cy="458787"/>
-          </a:xfrm>
-          <a:prstGeom prst="rect">
-            <a:avLst/>
-          </a:prstGeom>
-        </p:spPr>
-        <p:txBody>
-          <a:bodyPr vert="horz" lIns="91440" tIns="45720" rIns="91440" bIns="45720" rtlCol="0" anchor="b"/>
-          <a:lstStyle>
-            <a:lvl1pPr algn="l">
-              <a:defRPr sz="1200"/>
-            </a:lvl1pPr>
-          </a:lstStyle>
-          <a:p>
-            <a:endParaRPr lang="en-US"/>
-          </a:p>
-        </p:txBody>
-      </p:sp>
-      <p:sp>
-        <p:nvSpPr>
-          <p:cNvPr id="7" name="Slide Number Placeholder 6"/>
-          <p:cNvSpPr>
-            <a:spLocks noGrp="1"/>
-          </p:cNvSpPr>
-          <p:nvPr>
-            <p:ph type="sldNum" sz="quarter" idx="5"/>
-          </p:nvPr>
-        </p:nvSpPr>
-        <p:spPr>
-          <a:xfrm>
-            <a:off x="3884613" y="8685213"/>
-            <a:ext cx="2971800" cy="458787"/>
-          </a:xfrm>
-          <a:prstGeom prst="rect">
-            <a:avLst/>
-          </a:prstGeom>
-        </p:spPr>
-        <p:txBody>
-          <a:bodyPr vert="horz" lIns="91440" tIns="45720" rIns="91440" bIns="45720" rtlCol="0" anchor="b"/>
-          <a:lstStyle>
-            <a:lvl1pPr algn="r">
-              <a:defRPr sz="1200"/>
-            </a:lvl1pPr>
-          </a:lstStyle>
-          <a:p>
-            <a:fld id="{CE5E9CC1-C706-0F49-92D6-E571CC5EEA8F}" type="slidenum">
-              <a:rPr lang="en-US"/>
-              <a:t>‹#›</a:t>
-            </a:fld>
-            <a:endParaRPr lang="en-US"/>
-          </a:p>
-        </p:txBody>
-      </p:sp>
     </p:spTree>
     <p:extLst>
       <p:ext uri="{BB962C8B-B14F-4D97-AF65-F5344CB8AC3E}">
-        <p14:creationId xmlns:p14="http://schemas.microsoft.com/office/powerpoint/2010/main" val="1024086991"/>
+        <p14:creationId xmlns:p14="http://schemas.microsoft.com/office/powerpoint/2010/main" val="3273793731"/>
       </p:ext>
     </p:extLst>
   </p:cSld>
@@ -493,6 +274,13 @@
           </p:nvPr>
         </p:nvSpPr>
         <p:spPr/>
+        <p:txBody>
+          <a:bodyPr/>
+          <a:lstStyle/>
+          <a:p>
+            <a:endParaRPr lang="en-IL"/>
+          </a:p>
+        </p:txBody>
       </p:sp>
       <p:sp>
         <p:nvSpPr>
@@ -509,10 +297,6 @@
           <a:bodyPr/>
           <a:lstStyle/>
           <a:p>
-            <a:r>
-              <a:rPr lang="en-US" dirty="0"/>
-              <a:t/>
-            </a:r>
             <a:endParaRPr lang="en-US" dirty="0"/>
           </a:p>
         </p:txBody>
@@ -535,94 +319,6 @@
             <a:fld id="{F7021451-1387-4CA6-816F-3879F97B5CBC}" type="slidenum">
               <a:rPr lang="en-US"/>
               <a:t>1</a:t>
-            </a:fld>
-            <a:endParaRPr lang="en-US"/>
-          </a:p>
-        </p:txBody>
-      </p:sp>
-    </p:spTree>
-    <p:extLst>
-      <p:ext uri="{BB962C8B-B14F-4D97-AF65-F5344CB8AC3E}">
-        <p14:creationId xmlns:p14="http://schemas.microsoft.com/office/powerpoint/2010/main" val="1024086991"/>
-      </p:ext>
-    </p:extLst>
-  </p:cSld>
-  <p:clrMapOvr>
-    <a:masterClrMapping/>
-  </p:clrMapOvr>
-</p:notes>
-</file>
-
-<file path=ppt/notesSlides/notesSlide10.xml><?xml version="1.0" encoding="utf-8"?>
-<p:notes xmlns:a="http://schemas.openxmlformats.org/drawingml/2006/main" xmlns:r="http://schemas.openxmlformats.org/officeDocument/2006/relationships" xmlns:p="http://schemas.openxmlformats.org/presentationml/2006/main">
-  <p:cSld>
-    <p:spTree>
-      <p:nvGrpSpPr>
-        <p:cNvPr id="1" name=""/>
-        <p:cNvGrpSpPr/>
-        <p:nvPr/>
-      </p:nvGrpSpPr>
-      <p:grpSpPr>
-        <a:xfrm>
-          <a:off x="0" y="0"/>
-          <a:ext cx="0" cy="0"/>
-          <a:chOff x="0" y="0"/>
-          <a:chExt cx="0" cy="0"/>
-        </a:xfrm>
-      </p:grpSpPr>
-      <p:sp>
-        <p:nvSpPr>
-          <p:cNvPr id="2" name="Slide Image Placeholder 1"/>
-          <p:cNvSpPr>
-            <a:spLocks noGrp="1" noRot="1" noChangeAspect="1"/>
-          </p:cNvSpPr>
-          <p:nvPr>
-            <p:ph type="sldImg"/>
-          </p:nvPr>
-        </p:nvSpPr>
-        <p:spPr/>
-      </p:sp>
-      <p:sp>
-        <p:nvSpPr>
-          <p:cNvPr id="3" name="Notes Placeholder 2"/>
-          <p:cNvSpPr>
-            <a:spLocks noGrp="1"/>
-          </p:cNvSpPr>
-          <p:nvPr>
-            <p:ph type="body" idx="1"/>
-          </p:nvPr>
-        </p:nvSpPr>
-        <p:spPr/>
-        <p:txBody>
-          <a:bodyPr/>
-          <a:lstStyle/>
-          <a:p>
-            <a:r>
-              <a:rPr lang="en-US" dirty="0"/>
-              <a:t/>
-            </a:r>
-            <a:endParaRPr lang="en-US" dirty="0"/>
-          </a:p>
-        </p:txBody>
-      </p:sp>
-      <p:sp>
-        <p:nvSpPr>
-          <p:cNvPr id="4" name="Slide Number Placeholder 3"/>
-          <p:cNvSpPr>
-            <a:spLocks noGrp="1"/>
-          </p:cNvSpPr>
-          <p:nvPr>
-            <p:ph type="sldNum" sz="quarter" idx="10"/>
-          </p:nvPr>
-        </p:nvSpPr>
-        <p:spPr/>
-        <p:txBody>
-          <a:bodyPr/>
-          <a:lstStyle/>
-          <a:p>
-            <a:fld id="{F7021451-1387-4CA6-816F-3879F97B5CBC}" type="slidenum">
-              <a:rPr lang="en-US"/>
-              <a:t>10</a:t>
             </a:fld>
             <a:endParaRPr lang="en-US"/>
           </a:p>
@@ -669,6 +365,13 @@
           </p:nvPr>
         </p:nvSpPr>
         <p:spPr/>
+        <p:txBody>
+          <a:bodyPr/>
+          <a:lstStyle/>
+          <a:p>
+            <a:endParaRPr lang="en-IL"/>
+          </a:p>
+        </p:txBody>
       </p:sp>
       <p:sp>
         <p:nvSpPr>
@@ -685,10 +388,6 @@
           <a:bodyPr/>
           <a:lstStyle/>
           <a:p>
-            <a:r>
-              <a:rPr lang="en-US" dirty="0"/>
-              <a:t/>
-            </a:r>
             <a:endParaRPr lang="en-US" dirty="0"/>
           </a:p>
         </p:txBody>
@@ -757,6 +456,13 @@
           </p:nvPr>
         </p:nvSpPr>
         <p:spPr/>
+        <p:txBody>
+          <a:bodyPr/>
+          <a:lstStyle/>
+          <a:p>
+            <a:endParaRPr lang="en-IL"/>
+          </a:p>
+        </p:txBody>
       </p:sp>
       <p:sp>
         <p:nvSpPr>
@@ -773,10 +479,6 @@
           <a:bodyPr/>
           <a:lstStyle/>
           <a:p>
-            <a:r>
-              <a:rPr lang="en-US" dirty="0"/>
-              <a:t/>
-            </a:r>
             <a:endParaRPr lang="en-US" dirty="0"/>
           </a:p>
         </p:txBody>
@@ -845,6 +547,13 @@
           </p:nvPr>
         </p:nvSpPr>
         <p:spPr/>
+        <p:txBody>
+          <a:bodyPr/>
+          <a:lstStyle/>
+          <a:p>
+            <a:endParaRPr lang="en-IL"/>
+          </a:p>
+        </p:txBody>
       </p:sp>
       <p:sp>
         <p:nvSpPr>
@@ -861,10 +570,6 @@
           <a:bodyPr/>
           <a:lstStyle/>
           <a:p>
-            <a:r>
-              <a:rPr lang="en-US" dirty="0"/>
-              <a:t/>
-            </a:r>
             <a:endParaRPr lang="en-US" dirty="0"/>
           </a:p>
         </p:txBody>
@@ -933,6 +638,13 @@
           </p:nvPr>
         </p:nvSpPr>
         <p:spPr/>
+        <p:txBody>
+          <a:bodyPr/>
+          <a:lstStyle/>
+          <a:p>
+            <a:endParaRPr lang="en-IL"/>
+          </a:p>
+        </p:txBody>
       </p:sp>
       <p:sp>
         <p:nvSpPr>
@@ -949,10 +661,6 @@
           <a:bodyPr/>
           <a:lstStyle/>
           <a:p>
-            <a:r>
-              <a:rPr lang="en-US" dirty="0"/>
-              <a:t/>
-            </a:r>
             <a:endParaRPr lang="en-US" dirty="0"/>
           </a:p>
         </p:txBody>
@@ -1021,6 +729,13 @@
           </p:nvPr>
         </p:nvSpPr>
         <p:spPr/>
+        <p:txBody>
+          <a:bodyPr/>
+          <a:lstStyle/>
+          <a:p>
+            <a:endParaRPr lang="en-IL"/>
+          </a:p>
+        </p:txBody>
       </p:sp>
       <p:sp>
         <p:nvSpPr>
@@ -1037,10 +752,6 @@
           <a:bodyPr/>
           <a:lstStyle/>
           <a:p>
-            <a:r>
-              <a:rPr lang="en-US" dirty="0"/>
-              <a:t/>
-            </a:r>
             <a:endParaRPr lang="en-US" dirty="0"/>
           </a:p>
         </p:txBody>
@@ -1109,6 +820,13 @@
           </p:nvPr>
         </p:nvSpPr>
         <p:spPr/>
+        <p:txBody>
+          <a:bodyPr/>
+          <a:lstStyle/>
+          <a:p>
+            <a:endParaRPr lang="en-IL"/>
+          </a:p>
+        </p:txBody>
       </p:sp>
       <p:sp>
         <p:nvSpPr>
@@ -1125,10 +843,6 @@
           <a:bodyPr/>
           <a:lstStyle/>
           <a:p>
-            <a:r>
-              <a:rPr lang="en-US" dirty="0"/>
-              <a:t/>
-            </a:r>
             <a:endParaRPr lang="en-US" dirty="0"/>
           </a:p>
         </p:txBody>
@@ -1150,7 +864,7 @@
           <a:p>
             <a:fld id="{F7021451-1387-4CA6-816F-3879F97B5CBC}" type="slidenum">
               <a:rPr lang="en-US"/>
-              <a:t>7</a:t>
+              <a:t>9</a:t>
             </a:fld>
             <a:endParaRPr lang="en-US"/>
           </a:p>
@@ -1197,6 +911,13 @@
           </p:nvPr>
         </p:nvSpPr>
         <p:spPr/>
+        <p:txBody>
+          <a:bodyPr/>
+          <a:lstStyle/>
+          <a:p>
+            <a:endParaRPr lang="en-IL"/>
+          </a:p>
+        </p:txBody>
       </p:sp>
       <p:sp>
         <p:nvSpPr>
@@ -1213,10 +934,6 @@
           <a:bodyPr/>
           <a:lstStyle/>
           <a:p>
-            <a:r>
-              <a:rPr lang="en-US" dirty="0"/>
-              <a:t/>
-            </a:r>
             <a:endParaRPr lang="en-US" dirty="0"/>
           </a:p>
         </p:txBody>
@@ -1238,95 +955,7 @@
           <a:p>
             <a:fld id="{F7021451-1387-4CA6-816F-3879F97B5CBC}" type="slidenum">
               <a:rPr lang="en-US"/>
-              <a:t>8</a:t>
-            </a:fld>
-            <a:endParaRPr lang="en-US"/>
-          </a:p>
-        </p:txBody>
-      </p:sp>
-    </p:spTree>
-    <p:extLst>
-      <p:ext uri="{BB962C8B-B14F-4D97-AF65-F5344CB8AC3E}">
-        <p14:creationId xmlns:p14="http://schemas.microsoft.com/office/powerpoint/2010/main" val="1024086991"/>
-      </p:ext>
-    </p:extLst>
-  </p:cSld>
-  <p:clrMapOvr>
-    <a:masterClrMapping/>
-  </p:clrMapOvr>
-</p:notes>
-</file>
-
-<file path=ppt/notesSlides/notesSlide9.xml><?xml version="1.0" encoding="utf-8"?>
-<p:notes xmlns:a="http://schemas.openxmlformats.org/drawingml/2006/main" xmlns:r="http://schemas.openxmlformats.org/officeDocument/2006/relationships" xmlns:p="http://schemas.openxmlformats.org/presentationml/2006/main">
-  <p:cSld>
-    <p:spTree>
-      <p:nvGrpSpPr>
-        <p:cNvPr id="1" name=""/>
-        <p:cNvGrpSpPr/>
-        <p:nvPr/>
-      </p:nvGrpSpPr>
-      <p:grpSpPr>
-        <a:xfrm>
-          <a:off x="0" y="0"/>
-          <a:ext cx="0" cy="0"/>
-          <a:chOff x="0" y="0"/>
-          <a:chExt cx="0" cy="0"/>
-        </a:xfrm>
-      </p:grpSpPr>
-      <p:sp>
-        <p:nvSpPr>
-          <p:cNvPr id="2" name="Slide Image Placeholder 1"/>
-          <p:cNvSpPr>
-            <a:spLocks noGrp="1" noRot="1" noChangeAspect="1"/>
-          </p:cNvSpPr>
-          <p:nvPr>
-            <p:ph type="sldImg"/>
-          </p:nvPr>
-        </p:nvSpPr>
-        <p:spPr/>
-      </p:sp>
-      <p:sp>
-        <p:nvSpPr>
-          <p:cNvPr id="3" name="Notes Placeholder 2"/>
-          <p:cNvSpPr>
-            <a:spLocks noGrp="1"/>
-          </p:cNvSpPr>
-          <p:nvPr>
-            <p:ph type="body" idx="1"/>
-          </p:nvPr>
-        </p:nvSpPr>
-        <p:spPr/>
-        <p:txBody>
-          <a:bodyPr/>
-          <a:lstStyle/>
-          <a:p>
-            <a:r>
-              <a:rPr lang="en-US" dirty="0"/>
-              <a:t/>
-            </a:r>
-            <a:endParaRPr lang="en-US" dirty="0"/>
-          </a:p>
-        </p:txBody>
-      </p:sp>
-      <p:sp>
-        <p:nvSpPr>
-          <p:cNvPr id="4" name="Slide Number Placeholder 3"/>
-          <p:cNvSpPr>
-            <a:spLocks noGrp="1"/>
-          </p:cNvSpPr>
-          <p:nvPr>
-            <p:ph type="sldNum" sz="quarter" idx="10"/>
-          </p:nvPr>
-        </p:nvSpPr>
-        <p:spPr/>
-        <p:txBody>
-          <a:bodyPr/>
-          <a:lstStyle/>
-          <a:p>
-            <a:fld id="{F7021451-1387-4CA6-816F-3879F97B5CBC}" type="slidenum">
-              <a:rPr lang="en-US"/>
-              <a:t>9</a:t>
+              <a:t>10</a:t>
             </a:fld>
             <a:endParaRPr lang="en-US"/>
           </a:p>
@@ -1378,6 +1007,11 @@
 <file path=ppt/slideMasters/slideMaster1.xml><?xml version="1.0" encoding="utf-8"?>
 <p:sldMaster xmlns:a="http://schemas.openxmlformats.org/drawingml/2006/main" xmlns:r="http://schemas.openxmlformats.org/officeDocument/2006/relationships" xmlns:p="http://schemas.openxmlformats.org/presentationml/2006/main">
   <p:cSld>
+    <p:bg>
+      <p:bgRef idx="1001">
+        <a:schemeClr val="bg1"/>
+      </p:bgRef>
+    </p:bg>
     <p:spTree>
       <p:nvGrpSpPr>
         <p:cNvPr id="1" name=""/>
@@ -1658,7 +1292,7 @@
     <p:bg>
       <p:bgPr>
         <a:blipFill dpi="0" rotWithShape="1">
-          <a:blip r:embed="rId1">
+          <a:blip r:embed="rId3">
             <a:lum/>
           </a:blip>
           <a:srcRect/>
@@ -1704,13 +1338,20 @@
           </a:solidFill>
           <a:ln/>
           <a:effectLst>
-            <a:outerShdw sx="100000" sy="100000" kx="0" ky="0" algn="bl" rotWithShape="0" blurRad="1270000" dist="50800" dir="16200000">
+            <a:outerShdw blurRad="1270000" dist="50800" dir="16200000" algn="bl" rotWithShape="0">
               <a:srgbClr val="A855F7">
                 <a:alpha val="65000"/>
               </a:srgbClr>
             </a:outerShdw>
           </a:effectLst>
         </p:spPr>
+        <p:txBody>
+          <a:bodyPr/>
+          <a:lstStyle/>
+          <a:p>
+            <a:endParaRPr lang="en-IL"/>
+          </a:p>
+        </p:txBody>
       </p:sp>
       <p:sp>
         <p:nvSpPr>
@@ -1733,13 +1374,20 @@
           </a:solidFill>
           <a:ln/>
           <a:effectLst>
-            <a:outerShdw sx="100000" sy="100000" kx="0" ky="0" algn="bl" rotWithShape="0" blurRad="1270000" dist="50800" dir="16200000">
+            <a:outerShdw blurRad="1270000" dist="50800" dir="16200000" algn="bl" rotWithShape="0">
               <a:srgbClr val="EC4899">
                 <a:alpha val="55000"/>
               </a:srgbClr>
             </a:outerShdw>
           </a:effectLst>
         </p:spPr>
+        <p:txBody>
+          <a:bodyPr/>
+          <a:lstStyle/>
+          <a:p>
+            <a:endParaRPr lang="en-IL"/>
+          </a:p>
+        </p:txBody>
       </p:sp>
       <p:sp>
         <p:nvSpPr>
@@ -1762,11 +1410,11 @@
           <a:bodyPr wrap="square" lIns="0" tIns="0" rIns="0" bIns="0" rtlCol="0" anchor="ctr"/>
           <a:lstStyle/>
           <a:p>
-            <a:pPr rtl="1" algn="r" indent="0" marL="0">
-              <a:buNone/>
-            </a:pPr>
-            <a:r>
-              <a:rPr lang="en-US" sz="1100" b="1" spc="600" kern="0" dirty="0">
+            <a:pPr marL="0" indent="0" algn="r" rtl="1">
+              <a:buNone/>
+            </a:pPr>
+            <a:r>
+              <a:rPr lang="en-US" sz="1100" b="1" kern="0" spc="600" dirty="0">
                 <a:solidFill>
                   <a:srgbClr val="C084FC"/>
                 </a:solidFill>
@@ -1808,13 +1456,20 @@
             <a:prstDash val="solid"/>
           </a:ln>
           <a:effectLst>
-            <a:outerShdw sx="100000" sy="100000" kx="0" ky="0" algn="bl" rotWithShape="0" blurRad="508000" dist="50800" dir="16200000">
+            <a:outerShdw blurRad="508000" dist="50800" dir="16200000" algn="bl" rotWithShape="0">
               <a:srgbClr val="A855F7">
                 <a:alpha val="85000"/>
               </a:srgbClr>
             </a:outerShdw>
           </a:effectLst>
         </p:spPr>
+        <p:txBody>
+          <a:bodyPr/>
+          <a:lstStyle/>
+          <a:p>
+            <a:endParaRPr lang="en-IL"/>
+          </a:p>
+        </p:txBody>
       </p:sp>
       <p:sp>
         <p:nvSpPr>
@@ -1837,7 +1492,7 @@
           <a:bodyPr wrap="square" lIns="0" tIns="0" rIns="0" bIns="0" rtlCol="0" anchor="ctr"/>
           <a:lstStyle/>
           <a:p>
-            <a:pPr algn="ctr" indent="0" marL="0">
+            <a:pPr marL="0" indent="0" algn="ctr">
               <a:buNone/>
             </a:pPr>
             <a:r>
@@ -1876,7 +1531,7 @@
           <a:bodyPr wrap="square" lIns="0" tIns="0" rIns="0" bIns="0" rtlCol="0" anchor="b"/>
           <a:lstStyle/>
           <a:p>
-            <a:pPr rtl="1" algn="r" indent="0" marL="0">
+            <a:pPr marL="0" indent="0" algn="r" rtl="1">
               <a:buNone/>
             </a:pPr>
             <a:r>
@@ -1915,7 +1570,7 @@
           <a:bodyPr wrap="square" lIns="0" tIns="0" rIns="0" bIns="0" rtlCol="0" anchor="t"/>
           <a:lstStyle/>
           <a:p>
-            <a:pPr rtl="1" algn="r" indent="0" marL="0">
+            <a:pPr marL="0" indent="0" algn="r" rtl="1">
               <a:buNone/>
             </a:pPr>
             <a:r>
@@ -1954,7 +1609,7 @@
           <a:bodyPr wrap="square" lIns="0" tIns="0" rIns="0" bIns="0" rtlCol="0" anchor="ctr"/>
           <a:lstStyle/>
           <a:p>
-            <a:pPr rtl="1" algn="r" indent="0" marL="0">
+            <a:pPr marL="0" indent="0" algn="r" rtl="1">
               <a:buNone/>
             </a:pPr>
             <a:r>
@@ -1966,7 +1621,40 @@
                 <a:ea typeface="Arial" pitchFamily="34" charset="-122"/>
                 <a:cs typeface="Arial" pitchFamily="34" charset="-120"/>
               </a:rPr>
-              <a:t>ניתוח רשתות אמון ב־Bitcoin OTC לאיתור קהילות זדוניות</a:t>
+              <a:t>ניתוח רשתות אמון ב־Bitcoin OTC </a:t>
+            </a:r>
+            <a:r>
+              <a:rPr lang="he-IL" sz="1600" dirty="0">
+                <a:solidFill>
+                  <a:srgbClr val="CBD5E1"/>
+                </a:solidFill>
+                <a:latin typeface="Arial" pitchFamily="34" charset="0"/>
+                <a:ea typeface="Arial" pitchFamily="34" charset="-122"/>
+                <a:cs typeface="Arial" pitchFamily="34" charset="-120"/>
+              </a:rPr>
+              <a:t> </a:t>
+            </a:r>
+            <a:r>
+              <a:rPr lang="en-US" sz="1600" dirty="0" err="1">
+                <a:solidFill>
+                  <a:srgbClr val="CBD5E1"/>
+                </a:solidFill>
+                <a:latin typeface="Arial" pitchFamily="34" charset="0"/>
+                <a:ea typeface="Arial" pitchFamily="34" charset="-122"/>
+                <a:cs typeface="Arial" pitchFamily="34" charset="-120"/>
+              </a:rPr>
+              <a:t>לאיתור</a:t>
+            </a:r>
+            <a:r>
+              <a:rPr lang="en-US" sz="1600" dirty="0">
+                <a:solidFill>
+                  <a:srgbClr val="CBD5E1"/>
+                </a:solidFill>
+                <a:latin typeface="Arial" pitchFamily="34" charset="0"/>
+                <a:ea typeface="Arial" pitchFamily="34" charset="-122"/>
+                <a:cs typeface="Arial" pitchFamily="34" charset="-120"/>
+              </a:rPr>
+              <a:t> קהילות זדוניות</a:t>
             </a:r>
             <a:endParaRPr lang="en-US" sz="1600" dirty="0"/>
           </a:p>
@@ -2002,13 +1690,20 @@
             <a:prstDash val="solid"/>
           </a:ln>
           <a:effectLst>
-            <a:outerShdw sx="100000" sy="100000" kx="0" ky="0" algn="bl" rotWithShape="0" blurRad="279400" dist="76200" dir="5400000">
+            <a:outerShdw blurRad="279400" dist="76200" dir="5400000" algn="bl" rotWithShape="0">
               <a:srgbClr val="000000">
                 <a:alpha val="40000"/>
               </a:srgbClr>
             </a:outerShdw>
           </a:effectLst>
         </p:spPr>
+        <p:txBody>
+          <a:bodyPr/>
+          <a:lstStyle/>
+          <a:p>
+            <a:endParaRPr lang="en-IL"/>
+          </a:p>
+        </p:txBody>
       </p:sp>
       <p:sp>
         <p:nvSpPr>
@@ -2031,6 +1726,13 @@
           </a:solidFill>
           <a:ln/>
         </p:spPr>
+        <p:txBody>
+          <a:bodyPr/>
+          <a:lstStyle/>
+          <a:p>
+            <a:endParaRPr lang="en-IL"/>
+          </a:p>
+        </p:txBody>
       </p:sp>
       <p:sp>
         <p:nvSpPr>
@@ -2053,11 +1755,11 @@
           <a:bodyPr wrap="square" lIns="0" tIns="0" rIns="0" bIns="0" rtlCol="0" anchor="ctr"/>
           <a:lstStyle/>
           <a:p>
-            <a:pPr rtl="1" algn="r" indent="0" marL="0">
-              <a:buNone/>
-            </a:pPr>
-            <a:r>
-              <a:rPr lang="en-US" sz="1000" b="1" spc="400" kern="0" dirty="0">
+            <a:pPr marL="0" indent="0" algn="r" rtl="1">
+              <a:buNone/>
+            </a:pPr>
+            <a:r>
+              <a:rPr lang="en-US" sz="1000" b="1" kern="0" spc="400" dirty="0">
                 <a:solidFill>
                   <a:srgbClr val="C084FC"/>
                 </a:solidFill>
@@ -2092,9 +1794,20 @@
           <a:bodyPr wrap="square" lIns="0" tIns="0" rIns="0" bIns="0" rtlCol="0" anchor="ctr"/>
           <a:lstStyle/>
           <a:p>
-            <a:pPr rtl="1" algn="r" indent="0" marL="0">
-              <a:buNone/>
-            </a:pPr>
+            <a:pPr marL="0" indent="0" algn="r" rtl="1">
+              <a:buNone/>
+            </a:pPr>
+            <a:r>
+              <a:rPr lang="he-IL" sz="2200" b="1" dirty="0">
+                <a:solidFill>
+                  <a:srgbClr val="F8FAFC"/>
+                </a:solidFill>
+                <a:latin typeface="Arial" pitchFamily="34" charset="0"/>
+                <a:ea typeface="Arial" pitchFamily="34" charset="-122"/>
+                <a:cs typeface="Arial" pitchFamily="34" charset="-120"/>
+              </a:rPr>
+              <a:t>נבו יפלח</a:t>
+            </a:r>
             <a:r>
               <a:rPr lang="en-US" sz="2200" b="1" dirty="0">
                 <a:solidFill>
@@ -2104,7 +1817,51 @@
                 <a:ea typeface="Arial" pitchFamily="34" charset="-122"/>
                 <a:cs typeface="Arial" pitchFamily="34" charset="-120"/>
               </a:rPr>
-              <a:t>[שם 1]   ·   [שם 2]   ·   [שם 3]</a:t>
+              <a:t>   ·   </a:t>
+            </a:r>
+            <a:r>
+              <a:rPr lang="he-IL" sz="2200" b="1" dirty="0">
+                <a:solidFill>
+                  <a:srgbClr val="F8FAFC"/>
+                </a:solidFill>
+                <a:latin typeface="Arial" pitchFamily="34" charset="0"/>
+                <a:ea typeface="Arial" pitchFamily="34" charset="-122"/>
+                <a:cs typeface="Arial" pitchFamily="34" charset="-120"/>
+              </a:rPr>
+              <a:t>ליאל ירדני </a:t>
+            </a:r>
+            <a:r>
+              <a:rPr lang="en-US" sz="2200" b="1" dirty="0">
+                <a:solidFill>
+                  <a:srgbClr val="F8FAFC"/>
+                </a:solidFill>
+                <a:latin typeface="Arial" pitchFamily="34" charset="0"/>
+                <a:ea typeface="Arial" pitchFamily="34" charset="-122"/>
+                <a:cs typeface="Arial" pitchFamily="34" charset="-120"/>
+              </a:rPr>
+              <a:t>   ·  </a:t>
+            </a:r>
+            <a:r>
+              <a:rPr lang="he-IL" sz="2200" b="1" dirty="0">
+                <a:solidFill>
+                  <a:srgbClr val="F8FAFC"/>
+                </a:solidFill>
+                <a:latin typeface="Arial" pitchFamily="34" charset="0"/>
+                <a:ea typeface="Arial" pitchFamily="34" charset="-122"/>
+                <a:cs typeface="Arial" pitchFamily="34" charset="-120"/>
+              </a:rPr>
+              <a:t>אילן </a:t>
+            </a:r>
+            <a:r>
+              <a:rPr lang="he-IL" sz="2200" b="1" dirty="0" err="1">
+                <a:solidFill>
+                  <a:srgbClr val="F8FAFC"/>
+                </a:solidFill>
+                <a:latin typeface="Arial" pitchFamily="34" charset="0"/>
+                <a:ea typeface="Arial" pitchFamily="34" charset="-122"/>
+                <a:cs typeface="Arial" pitchFamily="34" charset="-120"/>
+              </a:rPr>
+              <a:t>קוזוקרו</a:t>
             </a:r>
             <a:endParaRPr lang="en-US" sz="2200" dirty="0"/>
           </a:p>
@@ -2131,7 +1888,7 @@
           <a:bodyPr wrap="square" lIns="0" tIns="0" rIns="0" bIns="0" rtlCol="0" anchor="ctr"/>
           <a:lstStyle/>
           <a:p>
-            <a:pPr rtl="1" algn="r" indent="0" marL="0">
+            <a:pPr marL="0" indent="0" algn="r" rtl="1">
               <a:buNone/>
             </a:pPr>
             <a:r>
@@ -2170,11 +1927,11 @@
           <a:bodyPr wrap="square" lIns="0" tIns="0" rIns="0" bIns="0" rtlCol="0" anchor="ctr"/>
           <a:lstStyle/>
           <a:p>
-            <a:pPr algn="l" indent="0" marL="0">
-              <a:buNone/>
-            </a:pPr>
-            <a:r>
-              <a:rPr lang="en-US" sz="1000" spc="300" kern="0" dirty="0">
+            <a:pPr marL="0" indent="0" algn="l">
+              <a:buNone/>
+            </a:pPr>
+            <a:r>
+              <a:rPr lang="en-US" sz="1000" kern="0" spc="300" dirty="0">
                 <a:solidFill>
                   <a:srgbClr val="94A3B8"/>
                 </a:solidFill>
@@ -2205,7 +1962,7 @@
     <p:bg>
       <p:bgPr>
         <a:blipFill dpi="0" rotWithShape="1">
-          <a:blip r:embed="rId1">
+          <a:blip r:embed="rId3">
             <a:lum/>
           </a:blip>
           <a:srcRect/>
@@ -2251,13 +2008,20 @@
           </a:solidFill>
           <a:ln/>
           <a:effectLst>
-            <a:outerShdw sx="100000" sy="100000" kx="0" ky="0" algn="bl" rotWithShape="0" blurRad="1270000" dist="50800" dir="16200000">
+            <a:outerShdw blurRad="1270000" dist="50800" dir="16200000" algn="bl" rotWithShape="0">
               <a:srgbClr val="A855F7">
                 <a:alpha val="65000"/>
               </a:srgbClr>
             </a:outerShdw>
           </a:effectLst>
         </p:spPr>
+        <p:txBody>
+          <a:bodyPr/>
+          <a:lstStyle/>
+          <a:p>
+            <a:endParaRPr lang="en-IL"/>
+          </a:p>
+        </p:txBody>
       </p:sp>
       <p:sp>
         <p:nvSpPr>
@@ -2280,13 +2044,20 @@
           </a:solidFill>
           <a:ln/>
           <a:effectLst>
-            <a:outerShdw sx="100000" sy="100000" kx="0" ky="0" algn="bl" rotWithShape="0" blurRad="1270000" dist="50800" dir="16200000">
+            <a:outerShdw blurRad="1270000" dist="50800" dir="16200000" algn="bl" rotWithShape="0">
               <a:srgbClr val="EC4899">
                 <a:alpha val="55000"/>
               </a:srgbClr>
             </a:outerShdw>
           </a:effectLst>
         </p:spPr>
+        <p:txBody>
+          <a:bodyPr/>
+          <a:lstStyle/>
+          <a:p>
+            <a:endParaRPr lang="en-IL"/>
+          </a:p>
+        </p:txBody>
       </p:sp>
       <p:sp>
         <p:nvSpPr>
@@ -2316,13 +2087,20 @@
             <a:prstDash val="solid"/>
           </a:ln>
           <a:effectLst>
-            <a:outerShdw sx="100000" sy="100000" kx="0" ky="0" algn="bl" rotWithShape="0" blurRad="635000" dist="50800" dir="16200000">
+            <a:outerShdw blurRad="635000" dist="50800" dir="16200000" algn="bl" rotWithShape="0">
               <a:srgbClr val="A855F7">
                 <a:alpha val="85000"/>
               </a:srgbClr>
             </a:outerShdw>
           </a:effectLst>
         </p:spPr>
+        <p:txBody>
+          <a:bodyPr/>
+          <a:lstStyle/>
+          <a:p>
+            <a:endParaRPr lang="en-IL"/>
+          </a:p>
+        </p:txBody>
       </p:sp>
       <p:sp>
         <p:nvSpPr>
@@ -2345,7 +2123,7 @@
           <a:bodyPr wrap="square" lIns="0" tIns="0" rIns="0" bIns="0" rtlCol="0" anchor="ctr"/>
           <a:lstStyle/>
           <a:p>
-            <a:pPr algn="ctr" indent="0" marL="0">
+            <a:pPr marL="0" indent="0" algn="ctr">
               <a:buNone/>
             </a:pPr>
             <a:r>
@@ -2384,7 +2162,7 @@
           <a:bodyPr wrap="square" lIns="0" tIns="0" rIns="0" bIns="0" rtlCol="0" anchor="ctr"/>
           <a:lstStyle/>
           <a:p>
-            <a:pPr rtl="1" algn="ctr" indent="0" marL="0">
+            <a:pPr marL="0" indent="0" algn="ctr" rtl="1">
               <a:buNone/>
             </a:pPr>
             <a:r>
@@ -2423,7 +2201,7 @@
           <a:bodyPr wrap="square" lIns="0" tIns="0" rIns="0" bIns="0" rtlCol="0" anchor="ctr"/>
           <a:lstStyle/>
           <a:p>
-            <a:pPr rtl="1" algn="ctr" indent="0" marL="0">
+            <a:pPr marL="0" indent="0" algn="ctr" rtl="1">
               <a:buNone/>
             </a:pPr>
             <a:r>
@@ -2462,11 +2240,11 @@
           <a:bodyPr wrap="square" lIns="0" tIns="0" rIns="0" bIns="0" rtlCol="0" anchor="ctr"/>
           <a:lstStyle/>
           <a:p>
-            <a:pPr algn="ctr" indent="0" marL="0">
-              <a:buNone/>
-            </a:pPr>
-            <a:r>
-              <a:rPr lang="en-US" sz="1100" spc="400" kern="0" dirty="0">
+            <a:pPr marL="0" indent="0" algn="ctr">
+              <a:buNone/>
+            </a:pPr>
+            <a:r>
+              <a:rPr lang="en-US" sz="1100" kern="0" spc="400" dirty="0">
                 <a:solidFill>
                   <a:srgbClr val="94A3B8"/>
                 </a:solidFill>
@@ -2492,12 +2270,12 @@
 </file>
 
 <file path=ppt/slides/slide2.xml><?xml version="1.0" encoding="utf-8"?>
-<p:sld xmlns:mc="http://schemas.openxmlformats.org/markup-compatibility/2006" xmlns:a="http://schemas.openxmlformats.org/drawingml/2006/main" xmlns:r="http://schemas.openxmlformats.org/officeDocument/2006/relationships" xmlns:p="http://schemas.openxmlformats.org/presentationml/2006/main">
+<p:sld xmlns:a="http://schemas.openxmlformats.org/drawingml/2006/main" xmlns:r="http://schemas.openxmlformats.org/officeDocument/2006/relationships" xmlns:p="http://schemas.openxmlformats.org/presentationml/2006/main">
   <p:cSld name="Slide 2">
     <p:bg>
       <p:bgPr>
         <a:blipFill dpi="0" rotWithShape="1">
-          <a:blip r:embed="rId1">
+          <a:blip r:embed="rId3">
             <a:lum/>
           </a:blip>
           <a:srcRect/>
@@ -2543,13 +2321,20 @@
           </a:solidFill>
           <a:ln/>
           <a:effectLst>
-            <a:outerShdw sx="100000" sy="100000" kx="0" ky="0" algn="bl" rotWithShape="0" blurRad="1270000" dist="50800" dir="16200000">
+            <a:outerShdw blurRad="1270000" dist="50800" dir="16200000" algn="bl" rotWithShape="0">
               <a:srgbClr val="A855F7">
                 <a:alpha val="65000"/>
               </a:srgbClr>
             </a:outerShdw>
           </a:effectLst>
         </p:spPr>
+        <p:txBody>
+          <a:bodyPr/>
+          <a:lstStyle/>
+          <a:p>
+            <a:endParaRPr lang="en-IL"/>
+          </a:p>
+        </p:txBody>
       </p:sp>
       <p:sp>
         <p:nvSpPr>
@@ -2572,13 +2357,20 @@
           </a:solidFill>
           <a:ln/>
           <a:effectLst>
-            <a:outerShdw sx="100000" sy="100000" kx="0" ky="0" algn="bl" rotWithShape="0" blurRad="1270000" dist="50800" dir="16200000">
+            <a:outerShdw blurRad="1270000" dist="50800" dir="16200000" algn="bl" rotWithShape="0">
               <a:srgbClr val="EC4899">
                 <a:alpha val="55000"/>
               </a:srgbClr>
             </a:outerShdw>
           </a:effectLst>
         </p:spPr>
+        <p:txBody>
+          <a:bodyPr/>
+          <a:lstStyle/>
+          <a:p>
+            <a:endParaRPr lang="en-IL"/>
+          </a:p>
+        </p:txBody>
       </p:sp>
       <p:sp>
         <p:nvSpPr>
@@ -2601,11 +2393,11 @@
           <a:bodyPr wrap="square" lIns="0" tIns="0" rIns="0" bIns="0" rtlCol="0" anchor="ctr"/>
           <a:lstStyle/>
           <a:p>
-            <a:pPr rtl="1" algn="r" indent="0" marL="0">
-              <a:buNone/>
-            </a:pPr>
-            <a:r>
-              <a:rPr lang="en-US" sz="900" b="1" spc="500" kern="0" dirty="0">
+            <a:pPr marL="0" indent="0" algn="r" rtl="1">
+              <a:buNone/>
+            </a:pPr>
+            <a:r>
+              <a:rPr lang="en-US" sz="900" b="1" kern="0" spc="500" dirty="0">
                 <a:solidFill>
                   <a:srgbClr val="C084FC"/>
                 </a:solidFill>
@@ -2613,7 +2405,29 @@
                 <a:ea typeface="Arial" pitchFamily="34" charset="-122"/>
                 <a:cs typeface="Arial" pitchFamily="34" charset="-120"/>
               </a:rPr>
-              <a:t>BITCOIN OTC  ·  ניתוח רשתות אמון</a:t>
+              <a:t>BITCOIN OTC  ·  </a:t>
+            </a:r>
+            <a:r>
+              <a:rPr lang="he-IL" sz="900" b="1" kern="0" spc="500" dirty="0">
+                <a:solidFill>
+                  <a:srgbClr val="C084FC"/>
+                </a:solidFill>
+                <a:latin typeface="Arial" pitchFamily="34" charset="0"/>
+                <a:ea typeface="Arial" pitchFamily="34" charset="-122"/>
+                <a:cs typeface="Arial" pitchFamily="34" charset="-120"/>
+              </a:rPr>
+              <a:t> </a:t>
+            </a:r>
+            <a:r>
+              <a:rPr lang="en-US" sz="900" b="1" kern="0" spc="500" dirty="0">
+                <a:solidFill>
+                  <a:srgbClr val="C084FC"/>
+                </a:solidFill>
+                <a:latin typeface="Arial" pitchFamily="34" charset="0"/>
+                <a:ea typeface="Arial" pitchFamily="34" charset="-122"/>
+                <a:cs typeface="Arial" pitchFamily="34" charset="-120"/>
+              </a:rPr>
+              <a:t>ניתוח רשתות אמון</a:t>
             </a:r>
             <a:endParaRPr lang="en-US" sz="900" dirty="0"/>
           </a:p>
@@ -2640,9 +2454,20 @@
           <a:bodyPr wrap="square" lIns="0" tIns="0" rIns="0" bIns="0" rtlCol="0" anchor="t"/>
           <a:lstStyle/>
           <a:p>
-            <a:pPr rtl="1" algn="r" indent="0" marL="0">
-              <a:buNone/>
-            </a:pPr>
+            <a:pPr marL="0" indent="0" algn="r" rtl="1">
+              <a:buNone/>
+            </a:pPr>
+            <a:r>
+              <a:rPr lang="en-US" sz="3800" b="1" dirty="0" err="1">
+                <a:solidFill>
+                  <a:srgbClr val="F8FAFC"/>
+                </a:solidFill>
+                <a:latin typeface="Arial" pitchFamily="34" charset="0"/>
+                <a:ea typeface="Arial" pitchFamily="34" charset="-122"/>
+                <a:cs typeface="Arial" pitchFamily="34" charset="-120"/>
+              </a:rPr>
+              <a:t>מבוא</a:t>
+            </a:r>
             <a:r>
               <a:rPr lang="en-US" sz="3800" b="1" dirty="0">
                 <a:solidFill>
@@ -2652,7 +2477,29 @@
                 <a:ea typeface="Arial" pitchFamily="34" charset="-122"/>
                 <a:cs typeface="Arial" pitchFamily="34" charset="-120"/>
               </a:rPr>
-              <a:t>מבוא — הבעיה והרעיון המרכזי</a:t>
+              <a:t> </a:t>
+            </a:r>
+            <a:r>
+              <a:rPr lang="he-IL" sz="3800" b="1" dirty="0">
+                <a:solidFill>
+                  <a:srgbClr val="F8FAFC"/>
+                </a:solidFill>
+                <a:latin typeface="Arial" pitchFamily="34" charset="0"/>
+                <a:ea typeface="Arial" pitchFamily="34" charset="-122"/>
+                <a:cs typeface="Arial" pitchFamily="34" charset="-120"/>
+              </a:rPr>
+              <a:t>-</a:t>
+            </a:r>
+            <a:r>
+              <a:rPr lang="en-US" sz="3800" b="1" dirty="0">
+                <a:solidFill>
+                  <a:srgbClr val="F8FAFC"/>
+                </a:solidFill>
+                <a:latin typeface="Arial" pitchFamily="34" charset="0"/>
+                <a:ea typeface="Arial" pitchFamily="34" charset="-122"/>
+                <a:cs typeface="Arial" pitchFamily="34" charset="-120"/>
+              </a:rPr>
+              <a:t> הבעיה והרעיון המרכזי</a:t>
             </a:r>
             <a:endParaRPr lang="en-US" sz="3800" dirty="0"/>
           </a:p>
@@ -2677,6 +2524,13 @@
           </a:solidFill>
           <a:ln/>
         </p:spPr>
+        <p:txBody>
+          <a:bodyPr/>
+          <a:lstStyle/>
+          <a:p>
+            <a:endParaRPr lang="en-IL"/>
+          </a:p>
+        </p:txBody>
       </p:sp>
       <p:sp>
         <p:nvSpPr>
@@ -2699,11 +2553,11 @@
           <a:bodyPr wrap="square" lIns="0" tIns="0" rIns="0" bIns="0" rtlCol="0" anchor="ctr"/>
           <a:lstStyle/>
           <a:p>
-            <a:pPr algn="l" indent="0" marL="0">
-              <a:buNone/>
-            </a:pPr>
-            <a:r>
-              <a:rPr lang="en-US" sz="900" spc="200" kern="0" dirty="0">
+            <a:pPr marL="0" indent="0" algn="l">
+              <a:buNone/>
+            </a:pPr>
+            <a:r>
+              <a:rPr lang="en-US" sz="900" kern="0" spc="200" dirty="0">
                 <a:solidFill>
                   <a:srgbClr val="94A3B8"/>
                 </a:solidFill>
@@ -2738,11 +2592,11 @@
           <a:bodyPr wrap="square" lIns="0" tIns="0" rIns="0" bIns="0" rtlCol="0" anchor="ctr"/>
           <a:lstStyle/>
           <a:p>
-            <a:pPr algn="r" indent="0" marL="0">
-              <a:buNone/>
-            </a:pPr>
-            <a:r>
-              <a:rPr lang="en-US" sz="900" spc="200" kern="0" dirty="0">
+            <a:pPr marL="0" indent="0" algn="r">
+              <a:buNone/>
+            </a:pPr>
+            <a:r>
+              <a:rPr lang="en-US" sz="900" kern="0" spc="200" dirty="0">
                 <a:solidFill>
                   <a:srgbClr val="94A3B8"/>
                 </a:solidFill>
@@ -2786,13 +2640,20 @@
             <a:prstDash val="solid"/>
           </a:ln>
           <a:effectLst>
-            <a:outerShdw sx="100000" sy="100000" kx="0" ky="0" algn="bl" rotWithShape="0" blurRad="279400" dist="76200" dir="5400000">
+            <a:outerShdw blurRad="279400" dist="76200" dir="5400000" algn="bl" rotWithShape="0">
               <a:srgbClr val="000000">
                 <a:alpha val="40000"/>
               </a:srgbClr>
             </a:outerShdw>
           </a:effectLst>
         </p:spPr>
+        <p:txBody>
+          <a:bodyPr/>
+          <a:lstStyle/>
+          <a:p>
+            <a:endParaRPr lang="en-IL"/>
+          </a:p>
+        </p:txBody>
       </p:sp>
       <p:sp>
         <p:nvSpPr>
@@ -2815,6 +2676,13 @@
           </a:solidFill>
           <a:ln/>
         </p:spPr>
+        <p:txBody>
+          <a:bodyPr/>
+          <a:lstStyle/>
+          <a:p>
+            <a:endParaRPr lang="en-IL"/>
+          </a:p>
+        </p:txBody>
       </p:sp>
       <p:sp>
         <p:nvSpPr>
@@ -2835,6 +2703,13 @@
           </a:solidFill>
           <a:ln/>
         </p:spPr>
+        <p:txBody>
+          <a:bodyPr/>
+          <a:lstStyle/>
+          <a:p>
+            <a:endParaRPr lang="en-IL"/>
+          </a:p>
+        </p:txBody>
       </p:sp>
       <p:sp>
         <p:nvSpPr>
@@ -2860,13 +2735,20 @@
             <a:prstDash val="solid"/>
           </a:ln>
           <a:effectLst>
-            <a:outerShdw sx="100000" sy="100000" kx="0" ky="0" algn="bl" rotWithShape="0" blurRad="152400" dist="50800" dir="16200000">
+            <a:outerShdw blurRad="152400" dist="50800" dir="16200000" algn="bl" rotWithShape="0">
               <a:srgbClr val="A855F7">
                 <a:alpha val="80000"/>
               </a:srgbClr>
             </a:outerShdw>
           </a:effectLst>
         </p:spPr>
+        <p:txBody>
+          <a:bodyPr/>
+          <a:lstStyle/>
+          <a:p>
+            <a:endParaRPr lang="en-IL"/>
+          </a:p>
+        </p:txBody>
       </p:sp>
       <p:sp>
         <p:nvSpPr>
@@ -2889,7 +2771,7 @@
           <a:bodyPr wrap="square" lIns="0" tIns="0" rIns="0" bIns="0" rtlCol="0" anchor="ctr"/>
           <a:lstStyle/>
           <a:p>
-            <a:pPr algn="ctr" indent="0" marL="0">
+            <a:pPr marL="0" indent="0" algn="ctr">
               <a:buNone/>
             </a:pPr>
             <a:r>
@@ -2928,7 +2810,7 @@
           <a:bodyPr wrap="square" lIns="0" tIns="0" rIns="0" bIns="0" rtlCol="0" anchor="ctr"/>
           <a:lstStyle/>
           <a:p>
-            <a:pPr rtl="1" algn="r" indent="0" marL="0">
+            <a:pPr marL="0" indent="0" algn="r" rtl="1">
               <a:buNone/>
             </a:pPr>
             <a:r>
@@ -2967,7 +2849,7 @@
           <a:bodyPr wrap="square" lIns="0" tIns="0" rIns="0" bIns="0" rtlCol="0" anchor="t"/>
           <a:lstStyle/>
           <a:p>
-            <a:pPr rtl="1" algn="r" indent="0" marL="0">
+            <a:pPr marL="0" indent="0" algn="r" rtl="1">
               <a:buNone/>
             </a:pPr>
             <a:r>
@@ -2979,7 +2861,73 @@
                 <a:ea typeface="Arial" pitchFamily="34" charset="-122"/>
                 <a:cs typeface="Arial" pitchFamily="34" charset="-120"/>
               </a:rPr>
-              <a:t>מסחר בביטקוין הוא אנונימי לחלוטין — איך אפשר לדעת על מי לסמוך בפלטפורמות מסחר אישי (P2P)?</a:t>
+              <a:t>מסחר בביטקוין הוא אנונימי </a:t>
+            </a:r>
+            <a:r>
+              <a:rPr lang="en-US" sz="1400" dirty="0" err="1">
+                <a:solidFill>
+                  <a:srgbClr val="CBD5E1"/>
+                </a:solidFill>
+                <a:latin typeface="Arial" pitchFamily="34" charset="0"/>
+                <a:ea typeface="Arial" pitchFamily="34" charset="-122"/>
+                <a:cs typeface="Arial" pitchFamily="34" charset="-120"/>
+              </a:rPr>
+              <a:t>לחלוטין</a:t>
+            </a:r>
+            <a:r>
+              <a:rPr lang="en-US" sz="1400" dirty="0">
+                <a:solidFill>
+                  <a:srgbClr val="CBD5E1"/>
+                </a:solidFill>
+                <a:latin typeface="Arial" pitchFamily="34" charset="0"/>
+                <a:ea typeface="Arial" pitchFamily="34" charset="-122"/>
+                <a:cs typeface="Arial" pitchFamily="34" charset="-120"/>
+              </a:rPr>
+              <a:t> </a:t>
+            </a:r>
+            <a:r>
+              <a:rPr lang="he-IL" sz="1400" dirty="0">
+                <a:solidFill>
+                  <a:srgbClr val="CBD5E1"/>
+                </a:solidFill>
+                <a:latin typeface="Arial" pitchFamily="34" charset="0"/>
+                <a:ea typeface="Arial" pitchFamily="34" charset="-122"/>
+                <a:cs typeface="Arial" pitchFamily="34" charset="-120"/>
+              </a:rPr>
+              <a:t>-</a:t>
+            </a:r>
+            <a:r>
+              <a:rPr lang="en-US" sz="1400" dirty="0">
+                <a:solidFill>
+                  <a:srgbClr val="CBD5E1"/>
+                </a:solidFill>
+                <a:latin typeface="Arial" pitchFamily="34" charset="0"/>
+                <a:ea typeface="Arial" pitchFamily="34" charset="-122"/>
+                <a:cs typeface="Arial" pitchFamily="34" charset="-120"/>
+              </a:rPr>
+              <a:t> איך אפשר לדעת על מי לסמוך בפלטפורמות מסחר </a:t>
+            </a:r>
+            <a:r>
+              <a:rPr lang="en-US" sz="1400" dirty="0" err="1">
+                <a:solidFill>
+                  <a:srgbClr val="CBD5E1"/>
+                </a:solidFill>
+                <a:latin typeface="Arial" pitchFamily="34" charset="0"/>
+                <a:ea typeface="Arial" pitchFamily="34" charset="-122"/>
+                <a:cs typeface="Arial" pitchFamily="34" charset="-120"/>
+              </a:rPr>
+              <a:t>אישי</a:t>
+            </a:r>
+            <a:r>
+              <a:rPr lang="en-US" sz="1400" dirty="0">
+                <a:solidFill>
+                  <a:srgbClr val="CBD5E1"/>
+                </a:solidFill>
+                <a:latin typeface="Arial" pitchFamily="34" charset="0"/>
+                <a:ea typeface="Arial" pitchFamily="34" charset="-122"/>
+                <a:cs typeface="Arial" pitchFamily="34" charset="-120"/>
+              </a:rPr>
+              <a:t> (P2P)?</a:t>
             </a:r>
             <a:endParaRPr lang="en-US" sz="1400" dirty="0"/>
           </a:p>
@@ -3015,13 +2963,20 @@
             <a:prstDash val="solid"/>
           </a:ln>
           <a:effectLst>
-            <a:outerShdw sx="100000" sy="100000" kx="0" ky="0" algn="bl" rotWithShape="0" blurRad="279400" dist="76200" dir="5400000">
+            <a:outerShdw blurRad="279400" dist="76200" dir="5400000" algn="bl" rotWithShape="0">
               <a:srgbClr val="000000">
                 <a:alpha val="40000"/>
               </a:srgbClr>
             </a:outerShdw>
           </a:effectLst>
         </p:spPr>
+        <p:txBody>
+          <a:bodyPr/>
+          <a:lstStyle/>
+          <a:p>
+            <a:endParaRPr lang="en-IL"/>
+          </a:p>
+        </p:txBody>
       </p:sp>
       <p:sp>
         <p:nvSpPr>
@@ -3044,6 +2999,13 @@
           </a:solidFill>
           <a:ln/>
         </p:spPr>
+        <p:txBody>
+          <a:bodyPr/>
+          <a:lstStyle/>
+          <a:p>
+            <a:endParaRPr lang="en-IL"/>
+          </a:p>
+        </p:txBody>
       </p:sp>
       <p:sp>
         <p:nvSpPr>
@@ -3064,6 +3026,13 @@
           </a:solidFill>
           <a:ln/>
         </p:spPr>
+        <p:txBody>
+          <a:bodyPr/>
+          <a:lstStyle/>
+          <a:p>
+            <a:endParaRPr lang="en-IL"/>
+          </a:p>
+        </p:txBody>
       </p:sp>
       <p:sp>
         <p:nvSpPr>
@@ -3089,13 +3058,20 @@
             <a:prstDash val="solid"/>
           </a:ln>
           <a:effectLst>
-            <a:outerShdw sx="100000" sy="100000" kx="0" ky="0" algn="bl" rotWithShape="0" blurRad="152400" dist="50800" dir="16200000">
+            <a:outerShdw blurRad="152400" dist="50800" dir="16200000" algn="bl" rotWithShape="0">
               <a:srgbClr val="A855F7">
                 <a:alpha val="80000"/>
               </a:srgbClr>
             </a:outerShdw>
           </a:effectLst>
         </p:spPr>
+        <p:txBody>
+          <a:bodyPr/>
+          <a:lstStyle/>
+          <a:p>
+            <a:endParaRPr lang="en-IL"/>
+          </a:p>
+        </p:txBody>
       </p:sp>
       <p:sp>
         <p:nvSpPr>
@@ -3118,7 +3094,7 @@
           <a:bodyPr wrap="square" lIns="0" tIns="0" rIns="0" bIns="0" rtlCol="0" anchor="ctr"/>
           <a:lstStyle/>
           <a:p>
-            <a:pPr algn="ctr" indent="0" marL="0">
+            <a:pPr marL="0" indent="0" algn="ctr">
               <a:buNone/>
             </a:pPr>
             <a:r>
@@ -3157,7 +3133,7 @@
           <a:bodyPr wrap="square" lIns="0" tIns="0" rIns="0" bIns="0" rtlCol="0" anchor="ctr"/>
           <a:lstStyle/>
           <a:p>
-            <a:pPr rtl="1" algn="r" indent="0" marL="0">
+            <a:pPr marL="0" indent="0" algn="r" rtl="1">
               <a:buNone/>
             </a:pPr>
             <a:r>
@@ -3196,7 +3172,7 @@
           <a:bodyPr wrap="square" lIns="0" tIns="0" rIns="0" bIns="0" rtlCol="0" anchor="t"/>
           <a:lstStyle/>
           <a:p>
-            <a:pPr rtl="1" algn="r" indent="0" marL="0">
+            <a:pPr marL="0" indent="0" algn="r" rtl="1">
               <a:buNone/>
             </a:pPr>
             <a:r>
@@ -3244,13 +3220,20 @@
             <a:prstDash val="solid"/>
           </a:ln>
           <a:effectLst>
-            <a:outerShdw sx="100000" sy="100000" kx="0" ky="0" algn="bl" rotWithShape="0" blurRad="279400" dist="76200" dir="5400000">
+            <a:outerShdw blurRad="279400" dist="76200" dir="5400000" algn="bl" rotWithShape="0">
               <a:srgbClr val="000000">
                 <a:alpha val="40000"/>
               </a:srgbClr>
             </a:outerShdw>
           </a:effectLst>
         </p:spPr>
+        <p:txBody>
+          <a:bodyPr/>
+          <a:lstStyle/>
+          <a:p>
+            <a:endParaRPr lang="en-IL"/>
+          </a:p>
+        </p:txBody>
       </p:sp>
       <p:sp>
         <p:nvSpPr>
@@ -3273,6 +3256,13 @@
           </a:solidFill>
           <a:ln/>
         </p:spPr>
+        <p:txBody>
+          <a:bodyPr/>
+          <a:lstStyle/>
+          <a:p>
+            <a:endParaRPr lang="en-IL"/>
+          </a:p>
+        </p:txBody>
       </p:sp>
       <p:sp>
         <p:nvSpPr>
@@ -3293,6 +3283,13 @@
           </a:solidFill>
           <a:ln/>
         </p:spPr>
+        <p:txBody>
+          <a:bodyPr/>
+          <a:lstStyle/>
+          <a:p>
+            <a:endParaRPr lang="en-IL"/>
+          </a:p>
+        </p:txBody>
       </p:sp>
       <p:sp>
         <p:nvSpPr>
@@ -3318,13 +3315,20 @@
             <a:prstDash val="solid"/>
           </a:ln>
           <a:effectLst>
-            <a:outerShdw sx="100000" sy="100000" kx="0" ky="0" algn="bl" rotWithShape="0" blurRad="152400" dist="50800" dir="16200000">
+            <a:outerShdw blurRad="152400" dist="50800" dir="16200000" algn="bl" rotWithShape="0">
               <a:srgbClr val="A855F7">
                 <a:alpha val="80000"/>
               </a:srgbClr>
             </a:outerShdw>
           </a:effectLst>
         </p:spPr>
+        <p:txBody>
+          <a:bodyPr/>
+          <a:lstStyle/>
+          <a:p>
+            <a:endParaRPr lang="en-IL"/>
+          </a:p>
+        </p:txBody>
       </p:sp>
       <p:sp>
         <p:nvSpPr>
@@ -3347,7 +3351,7 @@
           <a:bodyPr wrap="square" lIns="0" tIns="0" rIns="0" bIns="0" rtlCol="0" anchor="ctr"/>
           <a:lstStyle/>
           <a:p>
-            <a:pPr algn="ctr" indent="0" marL="0">
+            <a:pPr marL="0" indent="0" algn="ctr">
               <a:buNone/>
             </a:pPr>
             <a:r>
@@ -3386,7 +3390,7 @@
           <a:bodyPr wrap="square" lIns="0" tIns="0" rIns="0" bIns="0" rtlCol="0" anchor="ctr"/>
           <a:lstStyle/>
           <a:p>
-            <a:pPr rtl="1" algn="r" indent="0" marL="0">
+            <a:pPr marL="0" indent="0" algn="r" rtl="1">
               <a:buNone/>
             </a:pPr>
             <a:r>
@@ -3425,7 +3429,7 @@
           <a:bodyPr wrap="square" lIns="0" tIns="0" rIns="0" bIns="0" rtlCol="0" anchor="t"/>
           <a:lstStyle/>
           <a:p>
-            <a:pPr rtl="1" algn="r" indent="0" marL="0">
+            <a:pPr marL="0" indent="0" algn="r" rtl="1">
               <a:buNone/>
             </a:pPr>
             <a:r>
@@ -3437,7 +3441,51 @@
                 <a:ea typeface="Arial" pitchFamily="34" charset="-122"/>
                 <a:cs typeface="Arial" pitchFamily="34" charset="-120"/>
               </a:rPr>
-              <a:t>נוכלים יוצרים משתמשים פיקטיביים שמדרגים זה את זה חיובית (Sybil Attack), נראים אמינים — ואז עוקצים.</a:t>
+              <a:t>נוכלים יוצרים משתמשים פיקטיביים שמדרגים זה את זה חיובית (Sybil Attack), נראים </a:t>
+            </a:r>
+            <a:r>
+              <a:rPr lang="en-US" sz="1400" dirty="0" err="1">
+                <a:solidFill>
+                  <a:srgbClr val="CBD5E1"/>
+                </a:solidFill>
+                <a:latin typeface="Arial" pitchFamily="34" charset="0"/>
+                <a:ea typeface="Arial" pitchFamily="34" charset="-122"/>
+                <a:cs typeface="Arial" pitchFamily="34" charset="-120"/>
+              </a:rPr>
+              <a:t>אמינים</a:t>
+            </a:r>
+            <a:r>
+              <a:rPr lang="en-US" sz="1400" dirty="0">
+                <a:solidFill>
+                  <a:srgbClr val="CBD5E1"/>
+                </a:solidFill>
+                <a:latin typeface="Arial" pitchFamily="34" charset="0"/>
+                <a:ea typeface="Arial" pitchFamily="34" charset="-122"/>
+                <a:cs typeface="Arial" pitchFamily="34" charset="-120"/>
+              </a:rPr>
+              <a:t> </a:t>
+            </a:r>
+            <a:r>
+              <a:rPr lang="he-IL" sz="1400" dirty="0">
+                <a:solidFill>
+                  <a:srgbClr val="CBD5E1"/>
+                </a:solidFill>
+                <a:latin typeface="Arial" pitchFamily="34" charset="0"/>
+                <a:ea typeface="Arial" pitchFamily="34" charset="-122"/>
+                <a:cs typeface="Arial" pitchFamily="34" charset="-120"/>
+              </a:rPr>
+              <a:t>-</a:t>
+            </a:r>
+            <a:r>
+              <a:rPr lang="en-US" sz="1400" dirty="0">
+                <a:solidFill>
+                  <a:srgbClr val="CBD5E1"/>
+                </a:solidFill>
+                <a:latin typeface="Arial" pitchFamily="34" charset="0"/>
+                <a:ea typeface="Arial" pitchFamily="34" charset="-122"/>
+                <a:cs typeface="Arial" pitchFamily="34" charset="-120"/>
+              </a:rPr>
+              <a:t> ואז עוקצים.</a:t>
             </a:r>
             <a:endParaRPr lang="en-US" sz="1400" dirty="0"/>
           </a:p>
@@ -3448,13 +3496,13 @@
   <p:clrMapOvr>
     <a:masterClrMapping/>
   </p:clrMapOvr>
-  <mc:AlternateContent xmlns:mc="http://schemas.openxmlformats.org/markup-compatibility/2006">
-    <mc:Choice xmlns:p159="http://schemas.microsoft.com/office/powerpoint/2015/09/main" Requires="p159">
-      <p:transition spd="med" p159:dur="1500">
+  <mc:AlternateContent xmlns:mc="http://schemas.openxmlformats.org/markup-compatibility/2006" xmlns:p159="http://schemas.microsoft.com/office/powerpoint/2015/09/main">
+    <mc:Choice Requires="p159">
+      <p:transition spd="med">
         <p159:morph option="byObject"/>
       </p:transition>
     </mc:Choice>
-    <mc:Fallback>
+    <mc:Fallback xmlns="">
       <p:transition spd="med">
         <p:fade/>
       </p:transition>
@@ -3464,12 +3512,12 @@
 </file>
 
 <file path=ppt/slides/slide3.xml><?xml version="1.0" encoding="utf-8"?>
-<p:sld xmlns:mc="http://schemas.openxmlformats.org/markup-compatibility/2006" xmlns:a="http://schemas.openxmlformats.org/drawingml/2006/main" xmlns:r="http://schemas.openxmlformats.org/officeDocument/2006/relationships" xmlns:p="http://schemas.openxmlformats.org/presentationml/2006/main">
+<p:sld xmlns:a="http://schemas.openxmlformats.org/drawingml/2006/main" xmlns:r="http://schemas.openxmlformats.org/officeDocument/2006/relationships" xmlns:p="http://schemas.openxmlformats.org/presentationml/2006/main">
   <p:cSld name="Slide 3">
     <p:bg>
       <p:bgPr>
         <a:blipFill dpi="0" rotWithShape="1">
-          <a:blip r:embed="rId1">
+          <a:blip r:embed="rId3">
             <a:lum/>
           </a:blip>
           <a:srcRect/>
@@ -3515,13 +3563,20 @@
           </a:solidFill>
           <a:ln/>
           <a:effectLst>
-            <a:outerShdw sx="100000" sy="100000" kx="0" ky="0" algn="bl" rotWithShape="0" blurRad="1270000" dist="50800" dir="16200000">
+            <a:outerShdw blurRad="1270000" dist="50800" dir="16200000" algn="bl" rotWithShape="0">
               <a:srgbClr val="A855F7">
                 <a:alpha val="65000"/>
               </a:srgbClr>
             </a:outerShdw>
           </a:effectLst>
         </p:spPr>
+        <p:txBody>
+          <a:bodyPr/>
+          <a:lstStyle/>
+          <a:p>
+            <a:endParaRPr lang="en-IL"/>
+          </a:p>
+        </p:txBody>
       </p:sp>
       <p:sp>
         <p:nvSpPr>
@@ -3544,13 +3599,20 @@
           </a:solidFill>
           <a:ln/>
           <a:effectLst>
-            <a:outerShdw sx="100000" sy="100000" kx="0" ky="0" algn="bl" rotWithShape="0" blurRad="1270000" dist="50800" dir="16200000">
+            <a:outerShdw blurRad="1270000" dist="50800" dir="16200000" algn="bl" rotWithShape="0">
               <a:srgbClr val="22D3EE">
                 <a:alpha val="55000"/>
               </a:srgbClr>
             </a:outerShdw>
           </a:effectLst>
         </p:spPr>
+        <p:txBody>
+          <a:bodyPr/>
+          <a:lstStyle/>
+          <a:p>
+            <a:endParaRPr lang="en-IL"/>
+          </a:p>
+        </p:txBody>
       </p:sp>
       <p:sp>
         <p:nvSpPr>
@@ -3573,11 +3635,11 @@
           <a:bodyPr wrap="square" lIns="0" tIns="0" rIns="0" bIns="0" rtlCol="0" anchor="ctr"/>
           <a:lstStyle/>
           <a:p>
-            <a:pPr rtl="1" algn="r" indent="0" marL="0">
-              <a:buNone/>
-            </a:pPr>
-            <a:r>
-              <a:rPr lang="en-US" sz="900" b="1" spc="500" kern="0" dirty="0">
+            <a:pPr marL="0" indent="0" algn="r" rtl="1">
+              <a:buNone/>
+            </a:pPr>
+            <a:r>
+              <a:rPr lang="en-US" sz="900" b="1" kern="0" spc="500" dirty="0">
                 <a:solidFill>
                   <a:srgbClr val="C084FC"/>
                 </a:solidFill>
@@ -3585,7 +3647,29 @@
                 <a:ea typeface="Arial" pitchFamily="34" charset="-122"/>
                 <a:cs typeface="Arial" pitchFamily="34" charset="-120"/>
               </a:rPr>
-              <a:t>BITCOIN OTC  ·  ניתוח רשתות אמון</a:t>
+              <a:t>BITCOIN OTC  ·  </a:t>
+            </a:r>
+            <a:r>
+              <a:rPr lang="he-IL" sz="900" b="1" kern="0" spc="500" dirty="0">
+                <a:solidFill>
+                  <a:srgbClr val="C084FC"/>
+                </a:solidFill>
+                <a:latin typeface="Arial" pitchFamily="34" charset="0"/>
+                <a:ea typeface="Arial" pitchFamily="34" charset="-122"/>
+                <a:cs typeface="Arial" pitchFamily="34" charset="-120"/>
+              </a:rPr>
+              <a:t> </a:t>
+            </a:r>
+            <a:r>
+              <a:rPr lang="en-US" sz="900" b="1" kern="0" spc="500" dirty="0">
+                <a:solidFill>
+                  <a:srgbClr val="C084FC"/>
+                </a:solidFill>
+                <a:latin typeface="Arial" pitchFamily="34" charset="0"/>
+                <a:ea typeface="Arial" pitchFamily="34" charset="-122"/>
+                <a:cs typeface="Arial" pitchFamily="34" charset="-120"/>
+              </a:rPr>
+              <a:t>ניתוח רשתות אמון</a:t>
             </a:r>
             <a:endParaRPr lang="en-US" sz="900" dirty="0"/>
           </a:p>
@@ -3612,7 +3696,7 @@
           <a:bodyPr wrap="square" lIns="0" tIns="0" rIns="0" bIns="0" rtlCol="0" anchor="t"/>
           <a:lstStyle/>
           <a:p>
-            <a:pPr rtl="1" algn="r" indent="0" marL="0">
+            <a:pPr marL="0" indent="0" algn="r" rtl="1">
               <a:buNone/>
             </a:pPr>
             <a:r>
@@ -3649,6 +3733,13 @@
           </a:solidFill>
           <a:ln/>
         </p:spPr>
+        <p:txBody>
+          <a:bodyPr/>
+          <a:lstStyle/>
+          <a:p>
+            <a:endParaRPr lang="en-IL"/>
+          </a:p>
+        </p:txBody>
       </p:sp>
       <p:sp>
         <p:nvSpPr>
@@ -3671,11 +3762,11 @@
           <a:bodyPr wrap="square" lIns="0" tIns="0" rIns="0" bIns="0" rtlCol="0" anchor="ctr"/>
           <a:lstStyle/>
           <a:p>
-            <a:pPr algn="l" indent="0" marL="0">
-              <a:buNone/>
-            </a:pPr>
-            <a:r>
-              <a:rPr lang="en-US" sz="900" spc="200" kern="0" dirty="0">
+            <a:pPr marL="0" indent="0" algn="l">
+              <a:buNone/>
+            </a:pPr>
+            <a:r>
+              <a:rPr lang="en-US" sz="900" kern="0" spc="200" dirty="0">
                 <a:solidFill>
                   <a:srgbClr val="94A3B8"/>
                 </a:solidFill>
@@ -3710,11 +3801,11 @@
           <a:bodyPr wrap="square" lIns="0" tIns="0" rIns="0" bIns="0" rtlCol="0" anchor="ctr"/>
           <a:lstStyle/>
           <a:p>
-            <a:pPr algn="r" indent="0" marL="0">
-              <a:buNone/>
-            </a:pPr>
-            <a:r>
-              <a:rPr lang="en-US" sz="900" spc="200" kern="0" dirty="0">
+            <a:pPr marL="0" indent="0" algn="r">
+              <a:buNone/>
+            </a:pPr>
+            <a:r>
+              <a:rPr lang="en-US" sz="900" kern="0" spc="200" dirty="0">
                 <a:solidFill>
                   <a:srgbClr val="94A3B8"/>
                 </a:solidFill>
@@ -3758,13 +3849,20 @@
             <a:prstDash val="solid"/>
           </a:ln>
           <a:effectLst>
-            <a:outerShdw sx="100000" sy="100000" kx="0" ky="0" algn="bl" rotWithShape="0" blurRad="279400" dist="76200" dir="5400000">
+            <a:outerShdw blurRad="279400" dist="76200" dir="5400000" algn="bl" rotWithShape="0">
               <a:srgbClr val="000000">
                 <a:alpha val="40000"/>
               </a:srgbClr>
             </a:outerShdw>
           </a:effectLst>
         </p:spPr>
+        <p:txBody>
+          <a:bodyPr/>
+          <a:lstStyle/>
+          <a:p>
+            <a:endParaRPr lang="en-IL"/>
+          </a:p>
+        </p:txBody>
       </p:sp>
       <p:sp>
         <p:nvSpPr>
@@ -3787,6 +3885,13 @@
           </a:solidFill>
           <a:ln/>
         </p:spPr>
+        <p:txBody>
+          <a:bodyPr/>
+          <a:lstStyle/>
+          <a:p>
+            <a:endParaRPr lang="en-IL"/>
+          </a:p>
+        </p:txBody>
       </p:sp>
       <p:sp>
         <p:nvSpPr>
@@ -3809,7 +3914,7 @@
           <a:bodyPr wrap="square" lIns="0" tIns="0" rIns="0" bIns="0" rtlCol="0" anchor="t"/>
           <a:lstStyle/>
           <a:p>
-            <a:pPr algn="r" indent="0" marL="0">
+            <a:pPr marL="0" indent="0" algn="r">
               <a:buNone/>
             </a:pPr>
             <a:r>
@@ -3846,6 +3951,13 @@
           </a:solidFill>
           <a:ln/>
         </p:spPr>
+        <p:txBody>
+          <a:bodyPr/>
+          <a:lstStyle/>
+          <a:p>
+            <a:endParaRPr lang="en-IL"/>
+          </a:p>
+        </p:txBody>
       </p:sp>
       <p:sp>
         <p:nvSpPr>
@@ -3868,11 +3980,11 @@
           <a:bodyPr wrap="square" lIns="0" tIns="0" rIns="0" bIns="0" rtlCol="0" anchor="ctr"/>
           <a:lstStyle/>
           <a:p>
-            <a:pPr rtl="1" algn="r" indent="0" marL="0">
-              <a:buNone/>
-            </a:pPr>
-            <a:r>
-              <a:rPr lang="en-US" sz="900" b="1" spc="300" kern="0" dirty="0">
+            <a:pPr marL="0" indent="0" algn="r" rtl="1">
+              <a:buNone/>
+            </a:pPr>
+            <a:r>
+              <a:rPr lang="en-US" sz="900" b="1" kern="0" spc="300" dirty="0">
                 <a:solidFill>
                   <a:srgbClr val="C084FC"/>
                 </a:solidFill>
@@ -3907,7 +4019,7 @@
           <a:bodyPr wrap="square" lIns="0" tIns="0" rIns="0" bIns="0" rtlCol="0" anchor="t"/>
           <a:lstStyle/>
           <a:p>
-            <a:pPr rtl="1" algn="r" indent="0" marL="0">
+            <a:pPr marL="0" indent="0" algn="r" rtl="1">
               <a:buNone/>
             </a:pPr>
             <a:r>
@@ -3919,7 +4031,51 @@
                 <a:ea typeface="Arial" pitchFamily="34" charset="-122"/>
                 <a:cs typeface="Arial" pitchFamily="34" charset="-120"/>
               </a:rPr>
-              <a:t>האם ניתן להפריד בין משתמשים אמינים לנוכלים, רק לפי המבנה הטופולוגי של הרשת — ללא מידע חיצוני?</a:t>
+              <a:t>האם ניתן להפריד בין משתמשים אמינים לנוכלים, רק לפי המבנה הטופולוגי של </a:t>
+            </a:r>
+            <a:r>
+              <a:rPr lang="en-US" sz="1400" dirty="0" err="1">
+                <a:solidFill>
+                  <a:srgbClr val="F8FAFC"/>
+                </a:solidFill>
+                <a:latin typeface="Arial" pitchFamily="34" charset="0"/>
+                <a:ea typeface="Arial" pitchFamily="34" charset="-122"/>
+                <a:cs typeface="Arial" pitchFamily="34" charset="-120"/>
+              </a:rPr>
+              <a:t>הרשת</a:t>
+            </a:r>
+            <a:r>
+              <a:rPr lang="en-US" sz="1400" dirty="0">
+                <a:solidFill>
+                  <a:srgbClr val="F8FAFC"/>
+                </a:solidFill>
+                <a:latin typeface="Arial" pitchFamily="34" charset="0"/>
+                <a:ea typeface="Arial" pitchFamily="34" charset="-122"/>
+                <a:cs typeface="Arial" pitchFamily="34" charset="-120"/>
+              </a:rPr>
+              <a:t> </a:t>
+            </a:r>
+            <a:r>
+              <a:rPr lang="he-IL" sz="1400" dirty="0">
+                <a:solidFill>
+                  <a:srgbClr val="F8FAFC"/>
+                </a:solidFill>
+                <a:latin typeface="Arial" pitchFamily="34" charset="0"/>
+                <a:ea typeface="Arial" pitchFamily="34" charset="-122"/>
+                <a:cs typeface="Arial" pitchFamily="34" charset="-120"/>
+              </a:rPr>
+              <a:t>-</a:t>
+            </a:r>
+            <a:r>
+              <a:rPr lang="en-US" sz="1400" dirty="0">
+                <a:solidFill>
+                  <a:srgbClr val="F8FAFC"/>
+                </a:solidFill>
+                <a:latin typeface="Arial" pitchFamily="34" charset="0"/>
+                <a:ea typeface="Arial" pitchFamily="34" charset="-122"/>
+                <a:cs typeface="Arial" pitchFamily="34" charset="-120"/>
+              </a:rPr>
+              <a:t> ללא מידע חיצוני?</a:t>
             </a:r>
             <a:endParaRPr lang="en-US" sz="1400" dirty="0"/>
           </a:p>
@@ -3955,13 +4111,20 @@
             <a:prstDash val="solid"/>
           </a:ln>
           <a:effectLst>
-            <a:outerShdw sx="100000" sy="100000" kx="0" ky="0" algn="bl" rotWithShape="0" blurRad="279400" dist="76200" dir="5400000">
+            <a:outerShdw blurRad="279400" dist="76200" dir="5400000" algn="bl" rotWithShape="0">
               <a:srgbClr val="000000">
                 <a:alpha val="40000"/>
               </a:srgbClr>
             </a:outerShdw>
           </a:effectLst>
         </p:spPr>
+        <p:txBody>
+          <a:bodyPr/>
+          <a:lstStyle/>
+          <a:p>
+            <a:endParaRPr lang="en-IL"/>
+          </a:p>
+        </p:txBody>
       </p:sp>
       <p:sp>
         <p:nvSpPr>
@@ -3984,6 +4147,13 @@
           </a:solidFill>
           <a:ln/>
         </p:spPr>
+        <p:txBody>
+          <a:bodyPr/>
+          <a:lstStyle/>
+          <a:p>
+            <a:endParaRPr lang="en-IL"/>
+          </a:p>
+        </p:txBody>
       </p:sp>
       <p:sp>
         <p:nvSpPr>
@@ -4006,7 +4176,7 @@
           <a:bodyPr wrap="square" lIns="0" tIns="0" rIns="0" bIns="0" rtlCol="0" anchor="t"/>
           <a:lstStyle/>
           <a:p>
-            <a:pPr algn="r" indent="0" marL="0">
+            <a:pPr marL="0" indent="0" algn="r">
               <a:buNone/>
             </a:pPr>
             <a:r>
@@ -4043,6 +4213,13 @@
           </a:solidFill>
           <a:ln/>
         </p:spPr>
+        <p:txBody>
+          <a:bodyPr/>
+          <a:lstStyle/>
+          <a:p>
+            <a:endParaRPr lang="en-IL"/>
+          </a:p>
+        </p:txBody>
       </p:sp>
       <p:sp>
         <p:nvSpPr>
@@ -4065,11 +4242,11 @@
           <a:bodyPr wrap="square" lIns="0" tIns="0" rIns="0" bIns="0" rtlCol="0" anchor="ctr"/>
           <a:lstStyle/>
           <a:p>
-            <a:pPr rtl="1" algn="r" indent="0" marL="0">
-              <a:buNone/>
-            </a:pPr>
-            <a:r>
-              <a:rPr lang="en-US" sz="900" b="1" spc="300" kern="0" dirty="0">
+            <a:pPr marL="0" indent="0" algn="r" rtl="1">
+              <a:buNone/>
+            </a:pPr>
+            <a:r>
+              <a:rPr lang="en-US" sz="900" b="1" kern="0" spc="300" dirty="0">
                 <a:solidFill>
                   <a:srgbClr val="C084FC"/>
                 </a:solidFill>
@@ -4104,7 +4281,7 @@
           <a:bodyPr wrap="square" lIns="0" tIns="0" rIns="0" bIns="0" rtlCol="0" anchor="t"/>
           <a:lstStyle/>
           <a:p>
-            <a:pPr rtl="1" algn="r" indent="0" marL="0">
+            <a:pPr marL="0" indent="0" algn="r" rtl="1">
               <a:buNone/>
             </a:pPr>
             <a:r>
@@ -4116,7 +4293,40 @@
                 <a:ea typeface="Arial" pitchFamily="34" charset="-122"/>
                 <a:cs typeface="Arial" pitchFamily="34" charset="-120"/>
               </a:rPr>
-              <a:t>כיצד לזהות קהילות קטנות של נוכלים (Cliques) שמייצרות לעצמן מוניטין מזויף?</a:t>
+              <a:t>כיצד לזהות קהילות קטנות של נוכלים (Cliques) </a:t>
+            </a:r>
+            <a:r>
+              <a:rPr lang="he-IL" sz="1400" dirty="0">
+                <a:solidFill>
+                  <a:srgbClr val="F8FAFC"/>
+                </a:solidFill>
+                <a:latin typeface="Arial" pitchFamily="34" charset="0"/>
+                <a:ea typeface="Arial" pitchFamily="34" charset="-122"/>
+                <a:cs typeface="Arial" pitchFamily="34" charset="-120"/>
+              </a:rPr>
+              <a:t> </a:t>
+            </a:r>
+            <a:r>
+              <a:rPr lang="en-US" sz="1400" dirty="0" err="1">
+                <a:solidFill>
+                  <a:srgbClr val="F8FAFC"/>
+                </a:solidFill>
+                <a:latin typeface="Arial" pitchFamily="34" charset="0"/>
+                <a:ea typeface="Arial" pitchFamily="34" charset="-122"/>
+                <a:cs typeface="Arial" pitchFamily="34" charset="-120"/>
+              </a:rPr>
+              <a:t>שמייצרות</a:t>
+            </a:r>
+            <a:r>
+              <a:rPr lang="en-US" sz="1400" dirty="0">
+                <a:solidFill>
+                  <a:srgbClr val="F8FAFC"/>
+                </a:solidFill>
+                <a:latin typeface="Arial" pitchFamily="34" charset="0"/>
+                <a:ea typeface="Arial" pitchFamily="34" charset="-122"/>
+                <a:cs typeface="Arial" pitchFamily="34" charset="-120"/>
+              </a:rPr>
+              <a:t> לעצמן מוניטין מזויף?</a:t>
             </a:r>
             <a:endParaRPr lang="en-US" sz="1400" dirty="0"/>
           </a:p>
@@ -4152,13 +4362,20 @@
             <a:prstDash val="solid"/>
           </a:ln>
           <a:effectLst>
-            <a:outerShdw sx="100000" sy="100000" kx="0" ky="0" algn="bl" rotWithShape="0" blurRad="279400" dist="76200" dir="5400000">
+            <a:outerShdw blurRad="279400" dist="76200" dir="5400000" algn="bl" rotWithShape="0">
               <a:srgbClr val="000000">
                 <a:alpha val="40000"/>
               </a:srgbClr>
             </a:outerShdw>
           </a:effectLst>
         </p:spPr>
+        <p:txBody>
+          <a:bodyPr/>
+          <a:lstStyle/>
+          <a:p>
+            <a:endParaRPr lang="en-IL"/>
+          </a:p>
+        </p:txBody>
       </p:sp>
       <p:sp>
         <p:nvSpPr>
@@ -4181,6 +4398,13 @@
           </a:solidFill>
           <a:ln/>
         </p:spPr>
+        <p:txBody>
+          <a:bodyPr/>
+          <a:lstStyle/>
+          <a:p>
+            <a:endParaRPr lang="en-IL"/>
+          </a:p>
+        </p:txBody>
       </p:sp>
       <p:sp>
         <p:nvSpPr>
@@ -4203,7 +4427,7 @@
           <a:bodyPr wrap="square" lIns="0" tIns="0" rIns="0" bIns="0" rtlCol="0" anchor="t"/>
           <a:lstStyle/>
           <a:p>
-            <a:pPr algn="r" indent="0" marL="0">
+            <a:pPr marL="0" indent="0" algn="r">
               <a:buNone/>
             </a:pPr>
             <a:r>
@@ -4240,6 +4464,13 @@
           </a:solidFill>
           <a:ln/>
         </p:spPr>
+        <p:txBody>
+          <a:bodyPr/>
+          <a:lstStyle/>
+          <a:p>
+            <a:endParaRPr lang="en-IL"/>
+          </a:p>
+        </p:txBody>
       </p:sp>
       <p:sp>
         <p:nvSpPr>
@@ -4262,11 +4493,11 @@
           <a:bodyPr wrap="square" lIns="0" tIns="0" rIns="0" bIns="0" rtlCol="0" anchor="ctr"/>
           <a:lstStyle/>
           <a:p>
-            <a:pPr rtl="1" algn="r" indent="0" marL="0">
-              <a:buNone/>
-            </a:pPr>
-            <a:r>
-              <a:rPr lang="en-US" sz="900" b="1" spc="300" kern="0" dirty="0">
+            <a:pPr marL="0" indent="0" algn="r" rtl="1">
+              <a:buNone/>
+            </a:pPr>
+            <a:r>
+              <a:rPr lang="en-US" sz="900" b="1" kern="0" spc="300" dirty="0">
                 <a:solidFill>
                   <a:srgbClr val="C084FC"/>
                 </a:solidFill>
@@ -4301,7 +4532,7 @@
           <a:bodyPr wrap="square" lIns="0" tIns="0" rIns="0" bIns="0" rtlCol="0" anchor="t"/>
           <a:lstStyle/>
           <a:p>
-            <a:pPr rtl="1" algn="r" indent="0" marL="0">
+            <a:pPr marL="0" indent="0" algn="r" rtl="1">
               <a:buNone/>
             </a:pPr>
             <a:r>
@@ -4313,7 +4544,51 @@
                 <a:ea typeface="Arial" pitchFamily="34" charset="-122"/>
                 <a:cs typeface="Arial" pitchFamily="34" charset="-120"/>
               </a:rPr>
-              <a:t>כיצד ניתן לחזות האם קשת עתידית בין שני משתמשים תהיה אמינה — או הונאה?</a:t>
+              <a:t>כיצד ניתן לחזות האם קשת עתידית בין שני משתמשים תהיה </a:t>
+            </a:r>
+            <a:r>
+              <a:rPr lang="en-US" sz="1400" dirty="0" err="1">
+                <a:solidFill>
+                  <a:srgbClr val="F8FAFC"/>
+                </a:solidFill>
+                <a:latin typeface="Arial" pitchFamily="34" charset="0"/>
+                <a:ea typeface="Arial" pitchFamily="34" charset="-122"/>
+                <a:cs typeface="Arial" pitchFamily="34" charset="-120"/>
+              </a:rPr>
+              <a:t>אמינה</a:t>
+            </a:r>
+            <a:r>
+              <a:rPr lang="en-US" sz="1400" dirty="0">
+                <a:solidFill>
+                  <a:srgbClr val="F8FAFC"/>
+                </a:solidFill>
+                <a:latin typeface="Arial" pitchFamily="34" charset="0"/>
+                <a:ea typeface="Arial" pitchFamily="34" charset="-122"/>
+                <a:cs typeface="Arial" pitchFamily="34" charset="-120"/>
+              </a:rPr>
+              <a:t> </a:t>
+            </a:r>
+            <a:r>
+              <a:rPr lang="en-US" sz="1400" dirty="0" err="1">
+                <a:solidFill>
+                  <a:srgbClr val="F8FAFC"/>
+                </a:solidFill>
+                <a:latin typeface="Arial" pitchFamily="34" charset="0"/>
+                <a:ea typeface="Arial" pitchFamily="34" charset="-122"/>
+                <a:cs typeface="Arial" pitchFamily="34" charset="-120"/>
+              </a:rPr>
+              <a:t>או</a:t>
+            </a:r>
+            <a:r>
+              <a:rPr lang="en-US" sz="1400" dirty="0">
+                <a:solidFill>
+                  <a:srgbClr val="F8FAFC"/>
+                </a:solidFill>
+                <a:latin typeface="Arial" pitchFamily="34" charset="0"/>
+                <a:ea typeface="Arial" pitchFamily="34" charset="-122"/>
+                <a:cs typeface="Arial" pitchFamily="34" charset="-120"/>
+              </a:rPr>
+              <a:t> הונאה?</a:t>
             </a:r>
             <a:endParaRPr lang="en-US" sz="1400" dirty="0"/>
           </a:p>
@@ -4349,13 +4624,20 @@
             <a:prstDash val="solid"/>
           </a:ln>
           <a:effectLst>
-            <a:outerShdw sx="100000" sy="100000" kx="0" ky="0" algn="bl" rotWithShape="0" blurRad="279400" dist="76200" dir="5400000">
+            <a:outerShdw blurRad="279400" dist="76200" dir="5400000" algn="bl" rotWithShape="0">
               <a:srgbClr val="000000">
                 <a:alpha val="40000"/>
               </a:srgbClr>
             </a:outerShdw>
           </a:effectLst>
         </p:spPr>
+        <p:txBody>
+          <a:bodyPr/>
+          <a:lstStyle/>
+          <a:p>
+            <a:endParaRPr lang="en-IL"/>
+          </a:p>
+        </p:txBody>
       </p:sp>
       <p:sp>
         <p:nvSpPr>
@@ -4378,6 +4660,13 @@
           </a:solidFill>
           <a:ln/>
         </p:spPr>
+        <p:txBody>
+          <a:bodyPr/>
+          <a:lstStyle/>
+          <a:p>
+            <a:endParaRPr lang="en-IL"/>
+          </a:p>
+        </p:txBody>
       </p:sp>
       <p:sp>
         <p:nvSpPr>
@@ -4398,6 +4687,13 @@
           </a:solidFill>
           <a:ln/>
         </p:spPr>
+        <p:txBody>
+          <a:bodyPr/>
+          <a:lstStyle/>
+          <a:p>
+            <a:endParaRPr lang="en-IL"/>
+          </a:p>
+        </p:txBody>
       </p:sp>
       <p:sp>
         <p:nvSpPr>
@@ -4420,11 +4716,11 @@
           <a:bodyPr wrap="square" lIns="0" tIns="0" rIns="0" bIns="0" rtlCol="0" anchor="ctr"/>
           <a:lstStyle/>
           <a:p>
-            <a:pPr rtl="1" algn="r" indent="0" marL="0">
-              <a:buNone/>
-            </a:pPr>
-            <a:r>
-              <a:rPr lang="en-US" sz="1100" b="1" spc="400" kern="0" dirty="0">
+            <a:pPr marL="0" indent="0" algn="r" rtl="1">
+              <a:buNone/>
+            </a:pPr>
+            <a:r>
+              <a:rPr lang="en-US" sz="1100" b="1" kern="0" spc="400" dirty="0">
                 <a:solidFill>
                   <a:srgbClr val="FBBF24"/>
                 </a:solidFill>
@@ -4459,7 +4755,7 @@
           <a:bodyPr wrap="square" lIns="0" tIns="0" rIns="0" bIns="0" rtlCol="0" anchor="ctr"/>
           <a:lstStyle/>
           <a:p>
-            <a:pPr rtl="1" algn="r" indent="0" marL="0">
+            <a:pPr marL="0" indent="0" algn="r" rtl="1">
               <a:buNone/>
             </a:pPr>
             <a:r>
@@ -4471,7 +4767,51 @@
                 <a:ea typeface="Arial" pitchFamily="34" charset="-122"/>
                 <a:cs typeface="Arial" pitchFamily="34" charset="-120"/>
               </a:rPr>
-              <a:t>פיתוח מודל לחיזוי אמינות קשרים עתידיים בין משתמשים — חיובית או שלילית.</a:t>
+              <a:t>פיתוח מודל לחיזוי אמינות קשרים עתידיים בין </a:t>
+            </a:r>
+            <a:r>
+              <a:rPr lang="en-US" sz="1700" b="1" dirty="0" err="1">
+                <a:solidFill>
+                  <a:srgbClr val="F8FAFC"/>
+                </a:solidFill>
+                <a:latin typeface="Arial" pitchFamily="34" charset="0"/>
+                <a:ea typeface="Arial" pitchFamily="34" charset="-122"/>
+                <a:cs typeface="Arial" pitchFamily="34" charset="-120"/>
+              </a:rPr>
+              <a:t>משתמשים</a:t>
+            </a:r>
+            <a:r>
+              <a:rPr lang="en-US" sz="1700" b="1" dirty="0">
+                <a:solidFill>
+                  <a:srgbClr val="F8FAFC"/>
+                </a:solidFill>
+                <a:latin typeface="Arial" pitchFamily="34" charset="0"/>
+                <a:ea typeface="Arial" pitchFamily="34" charset="-122"/>
+                <a:cs typeface="Arial" pitchFamily="34" charset="-120"/>
+              </a:rPr>
+              <a:t> </a:t>
+            </a:r>
+            <a:r>
+              <a:rPr lang="he-IL" sz="1700" b="1" dirty="0">
+                <a:solidFill>
+                  <a:srgbClr val="F8FAFC"/>
+                </a:solidFill>
+                <a:latin typeface="Arial" pitchFamily="34" charset="0"/>
+                <a:ea typeface="Arial" pitchFamily="34" charset="-122"/>
+                <a:cs typeface="Arial" pitchFamily="34" charset="-120"/>
+              </a:rPr>
+              <a:t>-</a:t>
+            </a:r>
+            <a:r>
+              <a:rPr lang="en-US" sz="1700" b="1" dirty="0">
+                <a:solidFill>
+                  <a:srgbClr val="F8FAFC"/>
+                </a:solidFill>
+                <a:latin typeface="Arial" pitchFamily="34" charset="0"/>
+                <a:ea typeface="Arial" pitchFamily="34" charset="-122"/>
+                <a:cs typeface="Arial" pitchFamily="34" charset="-120"/>
+              </a:rPr>
+              <a:t> חיובית או שלילית.</a:t>
             </a:r>
             <a:endParaRPr lang="en-US" sz="1700" dirty="0"/>
           </a:p>
@@ -4482,13 +4822,13 @@
   <p:clrMapOvr>
     <a:masterClrMapping/>
   </p:clrMapOvr>
-  <mc:AlternateContent xmlns:mc="http://schemas.openxmlformats.org/markup-compatibility/2006">
-    <mc:Choice xmlns:p159="http://schemas.microsoft.com/office/powerpoint/2015/09/main" Requires="p159">
-      <p:transition spd="med" p159:dur="1500">
+  <mc:AlternateContent xmlns:mc="http://schemas.openxmlformats.org/markup-compatibility/2006" xmlns:p159="http://schemas.microsoft.com/office/powerpoint/2015/09/main">
+    <mc:Choice Requires="p159">
+      <p:transition spd="med">
         <p159:morph option="byObject"/>
       </p:transition>
     </mc:Choice>
-    <mc:Fallback>
+    <mc:Fallback xmlns="">
       <p:transition spd="med">
         <p:fade/>
       </p:transition>
@@ -4498,12 +4838,12 @@
 </file>
 
 <file path=ppt/slides/slide4.xml><?xml version="1.0" encoding="utf-8"?>
-<p:sld xmlns:mc="http://schemas.openxmlformats.org/markup-compatibility/2006" xmlns:a="http://schemas.openxmlformats.org/drawingml/2006/main" xmlns:r="http://schemas.openxmlformats.org/officeDocument/2006/relationships" xmlns:p="http://schemas.openxmlformats.org/presentationml/2006/main">
+<p:sld xmlns:a="http://schemas.openxmlformats.org/drawingml/2006/main" xmlns:r="http://schemas.openxmlformats.org/officeDocument/2006/relationships" xmlns:p="http://schemas.openxmlformats.org/presentationml/2006/main">
   <p:cSld name="Slide 4">
     <p:bg>
       <p:bgPr>
         <a:blipFill dpi="0" rotWithShape="1">
-          <a:blip r:embed="rId1">
+          <a:blip r:embed="rId3">
             <a:lum/>
           </a:blip>
           <a:srcRect/>
@@ -4549,13 +4889,20 @@
           </a:solidFill>
           <a:ln/>
           <a:effectLst>
-            <a:outerShdw sx="100000" sy="100000" kx="0" ky="0" algn="bl" rotWithShape="0" blurRad="1270000" dist="50800" dir="16200000">
+            <a:outerShdw blurRad="1270000" dist="50800" dir="16200000" algn="bl" rotWithShape="0">
               <a:srgbClr val="A855F7">
                 <a:alpha val="65000"/>
               </a:srgbClr>
             </a:outerShdw>
           </a:effectLst>
         </p:spPr>
+        <p:txBody>
+          <a:bodyPr/>
+          <a:lstStyle/>
+          <a:p>
+            <a:endParaRPr lang="en-IL"/>
+          </a:p>
+        </p:txBody>
       </p:sp>
       <p:sp>
         <p:nvSpPr>
@@ -4578,13 +4925,20 @@
           </a:solidFill>
           <a:ln/>
           <a:effectLst>
-            <a:outerShdw sx="100000" sy="100000" kx="0" ky="0" algn="bl" rotWithShape="0" blurRad="1270000" dist="50800" dir="16200000">
+            <a:outerShdw blurRad="1270000" dist="50800" dir="16200000" algn="bl" rotWithShape="0">
               <a:srgbClr val="EC4899">
                 <a:alpha val="55000"/>
               </a:srgbClr>
             </a:outerShdw>
           </a:effectLst>
         </p:spPr>
+        <p:txBody>
+          <a:bodyPr/>
+          <a:lstStyle/>
+          <a:p>
+            <a:endParaRPr lang="en-IL"/>
+          </a:p>
+        </p:txBody>
       </p:sp>
       <p:sp>
         <p:nvSpPr>
@@ -4607,11 +4961,11 @@
           <a:bodyPr wrap="square" lIns="0" tIns="0" rIns="0" bIns="0" rtlCol="0" anchor="ctr"/>
           <a:lstStyle/>
           <a:p>
-            <a:pPr rtl="1" algn="r" indent="0" marL="0">
-              <a:buNone/>
-            </a:pPr>
-            <a:r>
-              <a:rPr lang="en-US" sz="900" b="1" spc="500" kern="0" dirty="0">
+            <a:pPr marL="0" indent="0" algn="r" rtl="1">
+              <a:buNone/>
+            </a:pPr>
+            <a:r>
+              <a:rPr lang="en-US" sz="900" b="1" kern="0" spc="500" dirty="0">
                 <a:solidFill>
                   <a:srgbClr val="C084FC"/>
                 </a:solidFill>
@@ -4619,7 +4973,29 @@
                 <a:ea typeface="Arial" pitchFamily="34" charset="-122"/>
                 <a:cs typeface="Arial" pitchFamily="34" charset="-120"/>
               </a:rPr>
-              <a:t>BITCOIN OTC  ·  ניתוח רשתות אמון</a:t>
+              <a:t>BITCOIN OTC  ·  </a:t>
+            </a:r>
+            <a:r>
+              <a:rPr lang="he-IL" sz="900" b="1" kern="0" spc="500" dirty="0">
+                <a:solidFill>
+                  <a:srgbClr val="C084FC"/>
+                </a:solidFill>
+                <a:latin typeface="Arial" pitchFamily="34" charset="0"/>
+                <a:ea typeface="Arial" pitchFamily="34" charset="-122"/>
+                <a:cs typeface="Arial" pitchFamily="34" charset="-120"/>
+              </a:rPr>
+              <a:t> </a:t>
+            </a:r>
+            <a:r>
+              <a:rPr lang="en-US" sz="900" b="1" kern="0" spc="500" dirty="0">
+                <a:solidFill>
+                  <a:srgbClr val="C084FC"/>
+                </a:solidFill>
+                <a:latin typeface="Arial" pitchFamily="34" charset="0"/>
+                <a:ea typeface="Arial" pitchFamily="34" charset="-122"/>
+                <a:cs typeface="Arial" pitchFamily="34" charset="-120"/>
+              </a:rPr>
+              <a:t>ניתוח רשתות אמון</a:t>
             </a:r>
             <a:endParaRPr lang="en-US" sz="900" dirty="0"/>
           </a:p>
@@ -4646,7 +5022,7 @@
           <a:bodyPr wrap="square" lIns="0" tIns="0" rIns="0" bIns="0" rtlCol="0" anchor="t"/>
           <a:lstStyle/>
           <a:p>
-            <a:pPr rtl="1" algn="r" indent="0" marL="0">
+            <a:pPr marL="0" indent="0" algn="r" rtl="1">
               <a:buNone/>
             </a:pPr>
             <a:r>
@@ -4683,6 +5059,13 @@
           </a:solidFill>
           <a:ln/>
         </p:spPr>
+        <p:txBody>
+          <a:bodyPr/>
+          <a:lstStyle/>
+          <a:p>
+            <a:endParaRPr lang="en-IL"/>
+          </a:p>
+        </p:txBody>
       </p:sp>
       <p:sp>
         <p:nvSpPr>
@@ -4705,11 +5088,11 @@
           <a:bodyPr wrap="square" lIns="0" tIns="0" rIns="0" bIns="0" rtlCol="0" anchor="ctr"/>
           <a:lstStyle/>
           <a:p>
-            <a:pPr algn="l" indent="0" marL="0">
-              <a:buNone/>
-            </a:pPr>
-            <a:r>
-              <a:rPr lang="en-US" sz="900" spc="200" kern="0" dirty="0">
+            <a:pPr marL="0" indent="0" algn="l">
+              <a:buNone/>
+            </a:pPr>
+            <a:r>
+              <a:rPr lang="en-US" sz="900" kern="0" spc="200" dirty="0">
                 <a:solidFill>
                   <a:srgbClr val="94A3B8"/>
                 </a:solidFill>
@@ -4744,11 +5127,11 @@
           <a:bodyPr wrap="square" lIns="0" tIns="0" rIns="0" bIns="0" rtlCol="0" anchor="ctr"/>
           <a:lstStyle/>
           <a:p>
-            <a:pPr algn="r" indent="0" marL="0">
-              <a:buNone/>
-            </a:pPr>
-            <a:r>
-              <a:rPr lang="en-US" sz="900" spc="200" kern="0" dirty="0">
+            <a:pPr marL="0" indent="0" algn="r">
+              <a:buNone/>
+            </a:pPr>
+            <a:r>
+              <a:rPr lang="en-US" sz="900" kern="0" spc="200" dirty="0">
                 <a:solidFill>
                   <a:srgbClr val="94A3B8"/>
                 </a:solidFill>
@@ -4792,13 +5175,20 @@
             <a:prstDash val="solid"/>
           </a:ln>
           <a:effectLst>
-            <a:outerShdw sx="100000" sy="100000" kx="0" ky="0" algn="bl" rotWithShape="0" blurRad="279400" dist="76200" dir="5400000">
+            <a:outerShdw blurRad="279400" dist="76200" dir="5400000" algn="bl" rotWithShape="0">
               <a:srgbClr val="000000">
                 <a:alpha val="40000"/>
               </a:srgbClr>
             </a:outerShdw>
           </a:effectLst>
         </p:spPr>
+        <p:txBody>
+          <a:bodyPr/>
+          <a:lstStyle/>
+          <a:p>
+            <a:endParaRPr lang="en-IL"/>
+          </a:p>
+        </p:txBody>
       </p:sp>
       <p:sp>
         <p:nvSpPr>
@@ -4821,6 +5211,13 @@
           </a:solidFill>
           <a:ln/>
         </p:spPr>
+        <p:txBody>
+          <a:bodyPr/>
+          <a:lstStyle/>
+          <a:p>
+            <a:endParaRPr lang="en-IL"/>
+          </a:p>
+        </p:txBody>
       </p:sp>
       <p:sp>
         <p:nvSpPr>
@@ -4843,11 +5240,11 @@
           <a:bodyPr wrap="square" lIns="0" tIns="0" rIns="0" bIns="0" rtlCol="0" anchor="ctr"/>
           <a:lstStyle/>
           <a:p>
-            <a:pPr rtl="1" algn="r" indent="0" marL="0">
-              <a:buNone/>
-            </a:pPr>
-            <a:r>
-              <a:rPr lang="en-US" sz="1000" b="1" spc="300" kern="0" dirty="0">
+            <a:pPr marL="0" indent="0" algn="r" rtl="1">
+              <a:buNone/>
+            </a:pPr>
+            <a:r>
+              <a:rPr lang="en-US" sz="1000" b="1" kern="0" spc="300" dirty="0">
                 <a:solidFill>
                   <a:srgbClr val="C084FC"/>
                 </a:solidFill>
@@ -4882,7 +5279,7 @@
           <a:bodyPr wrap="square" lIns="0" tIns="0" rIns="0" bIns="0" rtlCol="0" anchor="t"/>
           <a:lstStyle/>
           <a:p>
-            <a:pPr rtl="1" algn="r" indent="0" marL="0">
+            <a:pPr marL="0" indent="0" algn="r" rtl="1">
               <a:buNone/>
             </a:pPr>
             <a:r>
@@ -4921,7 +5318,7 @@
           <a:bodyPr wrap="square" lIns="0" tIns="0" rIns="0" bIns="0" rtlCol="0" anchor="ctr"/>
           <a:lstStyle/>
           <a:p>
-            <a:pPr algn="r" indent="0" marL="0">
+            <a:pPr marL="0" indent="0" algn="r">
               <a:buNone/>
             </a:pPr>
             <a:r>
@@ -4933,7 +5330,7 @@
                 <a:ea typeface="Arial" pitchFamily="34" charset="-122"/>
                 <a:cs typeface="Arial" pitchFamily="34" charset="-120"/>
               </a:rPr>
-              <a:t>Bitcoin OTC trust weighted signed network</a:t>
+              <a:t>snap.stanford.edu/data/soc-sign-bitcoinotc</a:t>
             </a:r>
             <a:endParaRPr lang="en-US" sz="1200" dirty="0"/>
           </a:p>
@@ -4960,11 +5357,11 @@
           <a:bodyPr wrap="square" lIns="0" tIns="0" rIns="0" bIns="0" rtlCol="0" anchor="t"/>
           <a:lstStyle/>
           <a:p>
-            <a:pPr algn="r" indent="0" marL="0">
-              <a:buNone/>
-            </a:pPr>
-            <a:r>
-              <a:rPr lang="en-US" sz="4400" b="1" dirty="0">
+            <a:pPr marL="0" indent="0" algn="r">
+              <a:buNone/>
+            </a:pPr>
+            <a:r>
+              <a:rPr lang="en-US" sz="3400" b="1" dirty="0">
                 <a:solidFill>
                   <a:srgbClr val="C084FC"/>
                 </a:solidFill>
@@ -4972,7 +5369,7 @@
                 <a:ea typeface="Arial" pitchFamily="34" charset="-122"/>
                 <a:cs typeface="Arial" pitchFamily="34" charset="-120"/>
               </a:rPr>
-              <a:t>6K+</a:t>
+              <a:t>5,881</a:t>
             </a:r>
             <a:endParaRPr lang="en-US" sz="4400" dirty="0"/>
           </a:p>
@@ -4999,7 +5396,7 @@
           <a:bodyPr wrap="square" lIns="0" tIns="0" rIns="0" bIns="0" rtlCol="0" anchor="ctr"/>
           <a:lstStyle/>
           <a:p>
-            <a:pPr rtl="1" algn="r" indent="0" marL="0">
+            <a:pPr marL="0" indent="0" algn="r" rtl="1">
               <a:buNone/>
             </a:pPr>
             <a:r>
@@ -5038,11 +5435,11 @@
           <a:bodyPr wrap="square" lIns="0" tIns="0" rIns="0" bIns="0" rtlCol="0" anchor="t"/>
           <a:lstStyle/>
           <a:p>
-            <a:pPr algn="r" indent="0" marL="0">
-              <a:buNone/>
-            </a:pPr>
-            <a:r>
-              <a:rPr lang="en-US" sz="4400" b="1" dirty="0">
+            <a:pPr marL="0" indent="0" algn="r">
+              <a:buNone/>
+            </a:pPr>
+            <a:r>
+              <a:rPr lang="en-US" sz="3400" b="1" dirty="0">
                 <a:solidFill>
                   <a:srgbClr val="C084FC"/>
                 </a:solidFill>
@@ -5050,7 +5447,7 @@
                 <a:ea typeface="Arial" pitchFamily="34" charset="-122"/>
                 <a:cs typeface="Arial" pitchFamily="34" charset="-120"/>
               </a:rPr>
-              <a:t>35K+</a:t>
+              <a:t>35,592</a:t>
             </a:r>
             <a:endParaRPr lang="en-US" sz="4400" dirty="0"/>
           </a:p>
@@ -5077,7 +5474,7 @@
           <a:bodyPr wrap="square" lIns="0" tIns="0" rIns="0" bIns="0" rtlCol="0" anchor="ctr"/>
           <a:lstStyle/>
           <a:p>
-            <a:pPr rtl="1" algn="r" indent="0" marL="0">
+            <a:pPr marL="0" indent="0" algn="r" rtl="1">
               <a:buNone/>
             </a:pPr>
             <a:r>
@@ -5116,6 +5513,13 @@
           </a:solidFill>
           <a:ln/>
         </p:spPr>
+        <p:txBody>
+          <a:bodyPr/>
+          <a:lstStyle/>
+          <a:p>
+            <a:endParaRPr lang="en-IL"/>
+          </a:p>
+        </p:txBody>
       </p:sp>
       <p:sp>
         <p:nvSpPr>
@@ -5138,7 +5542,7 @@
           <a:bodyPr wrap="square" lIns="0" tIns="0" rIns="0" bIns="0" rtlCol="0" anchor="ctr"/>
           <a:lstStyle/>
           <a:p>
-            <a:pPr rtl="1" algn="r" indent="0" marL="0">
+            <a:pPr marL="0" indent="0" algn="r" rtl="1">
               <a:buNone/>
             </a:pPr>
             <a:r>
@@ -5177,7 +5581,7 @@
           <a:bodyPr wrap="square" lIns="0" tIns="0" rIns="0" bIns="0" rtlCol="0" anchor="ctr"/>
           <a:lstStyle/>
           <a:p>
-            <a:pPr rtl="1" algn="r" indent="0" marL="0">
+            <a:pPr marL="0" indent="0" algn="r" rtl="1">
               <a:buNone/>
             </a:pPr>
             <a:r>
@@ -5225,13 +5629,20 @@
             <a:prstDash val="solid"/>
           </a:ln>
           <a:effectLst>
-            <a:outerShdw sx="100000" sy="100000" kx="0" ky="0" algn="bl" rotWithShape="0" blurRad="279400" dist="76200" dir="5400000">
+            <a:outerShdw blurRad="279400" dist="76200" dir="5400000" algn="bl" rotWithShape="0">
               <a:srgbClr val="000000">
                 <a:alpha val="40000"/>
               </a:srgbClr>
             </a:outerShdw>
           </a:effectLst>
         </p:spPr>
+        <p:txBody>
+          <a:bodyPr/>
+          <a:lstStyle/>
+          <a:p>
+            <a:endParaRPr lang="en-IL"/>
+          </a:p>
+        </p:txBody>
       </p:sp>
       <p:sp>
         <p:nvSpPr>
@@ -5254,6 +5665,13 @@
           </a:solidFill>
           <a:ln/>
         </p:spPr>
+        <p:txBody>
+          <a:bodyPr/>
+          <a:lstStyle/>
+          <a:p>
+            <a:endParaRPr lang="en-IL"/>
+          </a:p>
+        </p:txBody>
       </p:sp>
       <p:sp>
         <p:nvSpPr>
@@ -5276,11 +5694,11 @@
           <a:bodyPr wrap="square" lIns="0" tIns="0" rIns="0" bIns="0" rtlCol="0" anchor="ctr"/>
           <a:lstStyle/>
           <a:p>
-            <a:pPr rtl="1" algn="r" indent="0" marL="0">
-              <a:buNone/>
-            </a:pPr>
-            <a:r>
-              <a:rPr lang="en-US" sz="1000" b="1" spc="300" kern="0" dirty="0">
+            <a:pPr marL="0" indent="0" algn="r" rtl="1">
+              <a:buNone/>
+            </a:pPr>
+            <a:r>
+              <a:rPr lang="en-US" sz="1000" b="1" kern="0" spc="300" dirty="0">
                 <a:solidFill>
                   <a:srgbClr val="C084FC"/>
                 </a:solidFill>
@@ -5324,6 +5742,13 @@
             <a:prstDash val="solid"/>
           </a:ln>
         </p:spPr>
+        <p:txBody>
+          <a:bodyPr/>
+          <a:lstStyle/>
+          <a:p>
+            <a:endParaRPr lang="en-IL"/>
+          </a:p>
+        </p:txBody>
       </p:sp>
       <p:sp>
         <p:nvSpPr>
@@ -5346,7 +5771,7 @@
           <a:bodyPr wrap="square" lIns="0" tIns="0" rIns="0" bIns="0" rtlCol="0" anchor="ctr"/>
           <a:lstStyle/>
           <a:p>
-            <a:pPr algn="ctr" indent="0" marL="0">
+            <a:pPr marL="0" indent="0" algn="ctr">
               <a:buNone/>
             </a:pPr>
             <a:r>
@@ -5385,7 +5810,7 @@
           <a:bodyPr wrap="square" lIns="0" tIns="0" rIns="0" bIns="0" rtlCol="0" anchor="ctr"/>
           <a:lstStyle/>
           <a:p>
-            <a:pPr rtl="1" algn="r" indent="0" marL="0">
+            <a:pPr marL="0" indent="0" algn="r" rtl="1">
               <a:buNone/>
             </a:pPr>
             <a:r>
@@ -5433,6 +5858,13 @@
             <a:prstDash val="solid"/>
           </a:ln>
         </p:spPr>
+        <p:txBody>
+          <a:bodyPr/>
+          <a:lstStyle/>
+          <a:p>
+            <a:endParaRPr lang="en-IL"/>
+          </a:p>
+        </p:txBody>
       </p:sp>
       <p:sp>
         <p:nvSpPr>
@@ -5455,7 +5887,7 @@
           <a:bodyPr wrap="square" lIns="0" tIns="0" rIns="0" bIns="0" rtlCol="0" anchor="ctr"/>
           <a:lstStyle/>
           <a:p>
-            <a:pPr algn="ctr" indent="0" marL="0">
+            <a:pPr marL="0" indent="0" algn="ctr">
               <a:buNone/>
             </a:pPr>
             <a:r>
@@ -5494,7 +5926,7 @@
           <a:bodyPr wrap="square" lIns="0" tIns="0" rIns="0" bIns="0" rtlCol="0" anchor="ctr"/>
           <a:lstStyle/>
           <a:p>
-            <a:pPr rtl="1" algn="r" indent="0" marL="0">
+            <a:pPr marL="0" indent="0" algn="r" rtl="1">
               <a:buNone/>
             </a:pPr>
             <a:r>
@@ -5542,6 +5974,13 @@
             <a:prstDash val="solid"/>
           </a:ln>
         </p:spPr>
+        <p:txBody>
+          <a:bodyPr/>
+          <a:lstStyle/>
+          <a:p>
+            <a:endParaRPr lang="en-IL"/>
+          </a:p>
+        </p:txBody>
       </p:sp>
       <p:sp>
         <p:nvSpPr>
@@ -5564,7 +6003,7 @@
           <a:bodyPr wrap="square" lIns="0" tIns="0" rIns="0" bIns="0" rtlCol="0" anchor="ctr"/>
           <a:lstStyle/>
           <a:p>
-            <a:pPr algn="ctr" indent="0" marL="0">
+            <a:pPr marL="0" indent="0" algn="ctr">
               <a:buNone/>
             </a:pPr>
             <a:r>
@@ -5603,7 +6042,7 @@
           <a:bodyPr wrap="square" lIns="0" tIns="0" rIns="0" bIns="0" rtlCol="0" anchor="ctr"/>
           <a:lstStyle/>
           <a:p>
-            <a:pPr rtl="1" algn="r" indent="0" marL="0">
+            <a:pPr marL="0" indent="0" algn="r" rtl="1">
               <a:buNone/>
             </a:pPr>
             <a:r>
@@ -5651,6 +6090,13 @@
             <a:prstDash val="solid"/>
           </a:ln>
         </p:spPr>
+        <p:txBody>
+          <a:bodyPr/>
+          <a:lstStyle/>
+          <a:p>
+            <a:endParaRPr lang="en-IL"/>
+          </a:p>
+        </p:txBody>
       </p:sp>
       <p:sp>
         <p:nvSpPr>
@@ -5673,7 +6119,7 @@
           <a:bodyPr wrap="square" lIns="0" tIns="0" rIns="0" bIns="0" rtlCol="0" anchor="ctr"/>
           <a:lstStyle/>
           <a:p>
-            <a:pPr algn="ctr" indent="0" marL="0">
+            <a:pPr marL="0" indent="0" algn="ctr">
               <a:buNone/>
             </a:pPr>
             <a:r>
@@ -5712,7 +6158,7 @@
           <a:bodyPr wrap="square" lIns="0" tIns="0" rIns="0" bIns="0" rtlCol="0" anchor="ctr"/>
           <a:lstStyle/>
           <a:p>
-            <a:pPr rtl="1" algn="r" indent="0" marL="0">
+            <a:pPr marL="0" indent="0" algn="r" rtl="1">
               <a:buNone/>
             </a:pPr>
             <a:r>
@@ -5735,13 +6181,13 @@
   <p:clrMapOvr>
     <a:masterClrMapping/>
   </p:clrMapOvr>
-  <mc:AlternateContent xmlns:mc="http://schemas.openxmlformats.org/markup-compatibility/2006">
-    <mc:Choice xmlns:p159="http://schemas.microsoft.com/office/powerpoint/2015/09/main" Requires="p159">
-      <p:transition spd="med" p159:dur="1500">
+  <mc:AlternateContent xmlns:mc="http://schemas.openxmlformats.org/markup-compatibility/2006" xmlns:p159="http://schemas.microsoft.com/office/powerpoint/2015/09/main">
+    <mc:Choice Requires="p159">
+      <p:transition spd="med">
         <p159:morph option="byObject"/>
       </p:transition>
     </mc:Choice>
-    <mc:Fallback>
+    <mc:Fallback xmlns="">
       <p:transition spd="med">
         <p:fade/>
       </p:transition>
@@ -5751,12 +6197,12 @@
 </file>
 
 <file path=ppt/slides/slide5.xml><?xml version="1.0" encoding="utf-8"?>
-<p:sld xmlns:mc="http://schemas.openxmlformats.org/markup-compatibility/2006" xmlns:a="http://schemas.openxmlformats.org/drawingml/2006/main" xmlns:r="http://schemas.openxmlformats.org/officeDocument/2006/relationships" xmlns:p="http://schemas.openxmlformats.org/presentationml/2006/main">
-  <p:cSld name="Slide 5">
+<p:sld xmlns:a="http://schemas.openxmlformats.org/drawingml/2006/main" xmlns:r="http://schemas.openxmlformats.org/officeDocument/2006/relationships" xmlns:p="http://schemas.openxmlformats.org/presentationml/2006/main">
+  <p:cSld name="Slide 6">
     <p:bg>
       <p:bgPr>
         <a:blipFill dpi="0" rotWithShape="1">
-          <a:blip r:embed="rId1">
+          <a:blip r:embed="rId3">
             <a:lum/>
           </a:blip>
           <a:srcRect/>
@@ -5789,8 +6235,8 @@
         </p:nvSpPr>
         <p:spPr>
           <a:xfrm>
-            <a:off x="3657600" y="-2286000"/>
-            <a:ext cx="5486400" cy="5486400"/>
+            <a:off x="9601200" y="1828800"/>
+            <a:ext cx="5029200" cy="5029200"/>
           </a:xfrm>
           <a:prstGeom prst="ellipse">
             <a:avLst/>
@@ -5802,13 +6248,20 @@
           </a:solidFill>
           <a:ln/>
           <a:effectLst>
-            <a:outerShdw sx="100000" sy="100000" kx="0" ky="0" algn="bl" rotWithShape="0" blurRad="1270000" dist="50800" dir="16200000">
+            <a:outerShdw blurRad="1270000" dist="50800" dir="16200000" algn="bl" rotWithShape="0">
               <a:srgbClr val="A855F7">
                 <a:alpha val="65000"/>
               </a:srgbClr>
             </a:outerShdw>
           </a:effectLst>
         </p:spPr>
+        <p:txBody>
+          <a:bodyPr/>
+          <a:lstStyle/>
+          <a:p>
+            <a:endParaRPr lang="en-IL"/>
+          </a:p>
+        </p:txBody>
       </p:sp>
       <p:sp>
         <p:nvSpPr>
@@ -5818,26 +6271,33 @@
         </p:nvSpPr>
         <p:spPr>
           <a:xfrm>
-            <a:off x="3657600" y="5029200"/>
-            <a:ext cx="5486400" cy="5486400"/>
+            <a:off x="-1828800" y="2743200"/>
+            <a:ext cx="4114800" cy="4114800"/>
           </a:xfrm>
           <a:prstGeom prst="ellipse">
             <a:avLst/>
           </a:prstGeom>
           <a:solidFill>
-            <a:srgbClr val="EC4899">
+            <a:srgbClr val="22D3EE">
               <a:alpha val="16000"/>
             </a:srgbClr>
           </a:solidFill>
           <a:ln/>
           <a:effectLst>
-            <a:outerShdw sx="100000" sy="100000" kx="0" ky="0" algn="bl" rotWithShape="0" blurRad="1270000" dist="50800" dir="16200000">
-              <a:srgbClr val="EC4899">
+            <a:outerShdw blurRad="1270000" dist="50800" dir="16200000" algn="bl" rotWithShape="0">
+              <a:srgbClr val="22D3EE">
                 <a:alpha val="55000"/>
               </a:srgbClr>
             </a:outerShdw>
           </a:effectLst>
         </p:spPr>
+        <p:txBody>
+          <a:bodyPr/>
+          <a:lstStyle/>
+          <a:p>
+            <a:endParaRPr lang="en-IL"/>
+          </a:p>
+        </p:txBody>
       </p:sp>
       <p:sp>
         <p:nvSpPr>
@@ -5860,11 +6320,11 @@
           <a:bodyPr wrap="square" lIns="0" tIns="0" rIns="0" bIns="0" rtlCol="0" anchor="ctr"/>
           <a:lstStyle/>
           <a:p>
-            <a:pPr rtl="1" algn="r" indent="0" marL="0">
-              <a:buNone/>
-            </a:pPr>
-            <a:r>
-              <a:rPr lang="en-US" sz="900" b="1" spc="500" kern="0" dirty="0">
+            <a:pPr marL="0" indent="0" algn="r" rtl="1">
+              <a:buNone/>
+            </a:pPr>
+            <a:r>
+              <a:rPr lang="en-US" sz="900" b="1" kern="0" spc="500" dirty="0">
                 <a:solidFill>
                   <a:srgbClr val="C084FC"/>
                 </a:solidFill>
@@ -5872,7 +6332,29 @@
                 <a:ea typeface="Arial" pitchFamily="34" charset="-122"/>
                 <a:cs typeface="Arial" pitchFamily="34" charset="-120"/>
               </a:rPr>
-              <a:t>BITCOIN OTC  ·  ניתוח רשתות אמון</a:t>
+              <a:t>BITCOIN OTC  ·  </a:t>
+            </a:r>
+            <a:r>
+              <a:rPr lang="he-IL" sz="900" b="1" kern="0" spc="500" dirty="0">
+                <a:solidFill>
+                  <a:srgbClr val="C084FC"/>
+                </a:solidFill>
+                <a:latin typeface="Arial" pitchFamily="34" charset="0"/>
+                <a:ea typeface="Arial" pitchFamily="34" charset="-122"/>
+                <a:cs typeface="Arial" pitchFamily="34" charset="-120"/>
+              </a:rPr>
+              <a:t> </a:t>
+            </a:r>
+            <a:r>
+              <a:rPr lang="en-US" sz="900" b="1" kern="0" spc="500" dirty="0">
+                <a:solidFill>
+                  <a:srgbClr val="C084FC"/>
+                </a:solidFill>
+                <a:latin typeface="Arial" pitchFamily="34" charset="0"/>
+                <a:ea typeface="Arial" pitchFamily="34" charset="-122"/>
+                <a:cs typeface="Arial" pitchFamily="34" charset="-120"/>
+              </a:rPr>
+              <a:t>ניתוח רשתות אמון</a:t>
             </a:r>
             <a:endParaRPr lang="en-US" sz="900" dirty="0"/>
           </a:p>
@@ -5899,7 +6381,7 @@
           <a:bodyPr wrap="square" lIns="0" tIns="0" rIns="0" bIns="0" rtlCol="0" anchor="t"/>
           <a:lstStyle/>
           <a:p>
-            <a:pPr rtl="1" algn="r" indent="0" marL="0">
+            <a:pPr marL="0" indent="0" algn="r" rtl="1">
               <a:buNone/>
             </a:pPr>
             <a:r>
@@ -5911,7 +6393,7 @@
                 <a:ea typeface="Arial" pitchFamily="34" charset="-122"/>
                 <a:cs typeface="Arial" pitchFamily="34" charset="-120"/>
               </a:rPr>
-              <a:t>העבודה הנדרשת</a:t>
+              <a:t>אלגוריתמים ושיטות</a:t>
             </a:r>
             <a:endParaRPr lang="en-US" sz="3800" dirty="0"/>
           </a:p>
@@ -5936,6 +6418,13 @@
           </a:solidFill>
           <a:ln/>
         </p:spPr>
+        <p:txBody>
+          <a:bodyPr/>
+          <a:lstStyle/>
+          <a:p>
+            <a:endParaRPr lang="en-IL"/>
+          </a:p>
+        </p:txBody>
       </p:sp>
       <p:sp>
         <p:nvSpPr>
@@ -5958,11 +6447,11 @@
           <a:bodyPr wrap="square" lIns="0" tIns="0" rIns="0" bIns="0" rtlCol="0" anchor="ctr"/>
           <a:lstStyle/>
           <a:p>
-            <a:pPr algn="l" indent="0" marL="0">
-              <a:buNone/>
-            </a:pPr>
-            <a:r>
-              <a:rPr lang="en-US" sz="900" spc="200" kern="0" dirty="0">
+            <a:pPr marL="0" indent="0" algn="l">
+              <a:buNone/>
+            </a:pPr>
+            <a:r>
+              <a:rPr lang="en-US" sz="900" kern="0" spc="200" dirty="0">
                 <a:solidFill>
                   <a:srgbClr val="94A3B8"/>
                 </a:solidFill>
@@ -5997,11 +6486,11 @@
           <a:bodyPr wrap="square" lIns="0" tIns="0" rIns="0" bIns="0" rtlCol="0" anchor="ctr"/>
           <a:lstStyle/>
           <a:p>
-            <a:pPr algn="r" indent="0" marL="0">
-              <a:buNone/>
-            </a:pPr>
-            <a:r>
-              <a:rPr lang="en-US" sz="900" spc="200" kern="0" dirty="0">
+            <a:pPr marL="0" indent="0" algn="r">
+              <a:buNone/>
+            </a:pPr>
+            <a:r>
+              <a:rPr lang="en-US" sz="900" kern="0" spc="200" dirty="0">
                 <a:solidFill>
                   <a:srgbClr val="94A3B8"/>
                 </a:solidFill>
@@ -6023,8 +6512,8 @@
         </p:nvSpPr>
         <p:spPr>
           <a:xfrm>
-            <a:off x="7955280" y="1783080"/>
-            <a:ext cx="3657600" cy="4114800"/>
+            <a:off x="7955280" y="1691640"/>
+            <a:ext cx="3657600" cy="4297680"/>
           </a:xfrm>
           <a:prstGeom prst="roundRect">
             <a:avLst>
@@ -6045,13 +6534,20 @@
             <a:prstDash val="solid"/>
           </a:ln>
           <a:effectLst>
-            <a:outerShdw sx="100000" sy="100000" kx="0" ky="0" algn="bl" rotWithShape="0" blurRad="279400" dist="76200" dir="5400000">
+            <a:outerShdw blurRad="279400" dist="76200" dir="5400000" algn="bl" rotWithShape="0">
               <a:srgbClr val="000000">
                 <a:alpha val="40000"/>
               </a:srgbClr>
             </a:outerShdw>
           </a:effectLst>
         </p:spPr>
+        <p:txBody>
+          <a:bodyPr/>
+          <a:lstStyle/>
+          <a:p>
+            <a:endParaRPr lang="en-IL"/>
+          </a:p>
+        </p:txBody>
       </p:sp>
       <p:sp>
         <p:nvSpPr>
@@ -6061,7 +6557,7 @@
         </p:nvSpPr>
         <p:spPr>
           <a:xfrm>
-            <a:off x="8046720" y="1819656"/>
+            <a:off x="8046720" y="1728216"/>
             <a:ext cx="3474720" cy="18288"/>
           </a:xfrm>
           <a:prstGeom prst="rect">
@@ -6074,17 +6570,51 @@
           </a:solidFill>
           <a:ln/>
         </p:spPr>
-      </p:sp>
-      <p:sp>
-        <p:nvSpPr>
-          <p:cNvPr id="11" name="Text 9"/>
-          <p:cNvSpPr/>
-          <p:nvPr/>
-        </p:nvSpPr>
-        <p:spPr>
-          <a:xfrm>
-            <a:off x="10058400" y="1984248"/>
-            <a:ext cx="1280160" cy="228600"/>
+        <p:txBody>
+          <a:bodyPr/>
+          <a:lstStyle/>
+          <a:p>
+            <a:endParaRPr lang="en-IL"/>
+          </a:p>
+        </p:txBody>
+      </p:sp>
+      <p:sp>
+        <p:nvSpPr>
+          <p:cNvPr id="11" name="Shape 9"/>
+          <p:cNvSpPr/>
+          <p:nvPr/>
+        </p:nvSpPr>
+        <p:spPr>
+          <a:xfrm>
+            <a:off x="8119872" y="1856232"/>
+            <a:ext cx="3328416" cy="54864"/>
+          </a:xfrm>
+          <a:prstGeom prst="rect">
+            <a:avLst/>
+          </a:prstGeom>
+          <a:solidFill>
+            <a:srgbClr val="22D3EE"/>
+          </a:solidFill>
+          <a:ln/>
+        </p:spPr>
+        <p:txBody>
+          <a:bodyPr/>
+          <a:lstStyle/>
+          <a:p>
+            <a:endParaRPr lang="en-IL"/>
+          </a:p>
+        </p:txBody>
+      </p:sp>
+      <p:sp>
+        <p:nvSpPr>
+          <p:cNvPr id="12" name="Text 10"/>
+          <p:cNvSpPr/>
+          <p:nvPr/>
+        </p:nvSpPr>
+        <p:spPr>
+          <a:xfrm>
+            <a:off x="8229600" y="2020824"/>
+            <a:ext cx="3108960" cy="274320"/>
           </a:xfrm>
           <a:prstGeom prst="rect">
             <a:avLst/>
@@ -6096,50 +6626,11 @@
           <a:bodyPr wrap="square" lIns="0" tIns="0" rIns="0" bIns="0" rtlCol="0" anchor="ctr"/>
           <a:lstStyle/>
           <a:p>
-            <a:pPr algn="r" indent="0" marL="0">
-              <a:buNone/>
-            </a:pPr>
-            <a:r>
-              <a:rPr lang="en-US" sz="900" b="1" spc="400" kern="0" dirty="0">
-                <a:solidFill>
-                  <a:srgbClr val="94A3B8"/>
-                </a:solidFill>
-                <a:latin typeface="Arial" pitchFamily="34" charset="0"/>
-                <a:ea typeface="Arial" pitchFamily="34" charset="-122"/>
-                <a:cs typeface="Arial" pitchFamily="34" charset="-120"/>
-              </a:rPr>
-              <a:t>STEP</a:t>
-            </a:r>
-            <a:endParaRPr lang="en-US" sz="900" dirty="0"/>
-          </a:p>
-        </p:txBody>
-      </p:sp>
-      <p:sp>
-        <p:nvSpPr>
-          <p:cNvPr id="12" name="Text 10"/>
-          <p:cNvSpPr/>
-          <p:nvPr/>
-        </p:nvSpPr>
-        <p:spPr>
-          <a:xfrm>
-            <a:off x="10058400" y="2240280"/>
-            <a:ext cx="1280160" cy="1280160"/>
-          </a:xfrm>
-          <a:prstGeom prst="rect">
-            <a:avLst/>
-          </a:prstGeom>
-          <a:noFill/>
-          <a:ln/>
-        </p:spPr>
-        <p:txBody>
-          <a:bodyPr wrap="square" lIns="0" tIns="0" rIns="0" bIns="0" rtlCol="0" anchor="t"/>
-          <a:lstStyle/>
-          <a:p>
-            <a:pPr algn="r" indent="0" marL="0">
-              <a:buNone/>
-            </a:pPr>
-            <a:r>
-              <a:rPr lang="en-US" sz="7600" b="1" dirty="0">
+            <a:pPr marL="0" indent="0" algn="r">
+              <a:buNone/>
+            </a:pPr>
+            <a:r>
+              <a:rPr lang="en-US" sz="1000" b="1" kern="0" spc="300" dirty="0">
                 <a:solidFill>
                   <a:srgbClr val="22D3EE"/>
                 </a:solidFill>
@@ -6147,9 +6638,9 @@
                 <a:ea typeface="Arial" pitchFamily="34" charset="-122"/>
                 <a:cs typeface="Arial" pitchFamily="34" charset="-120"/>
               </a:rPr>
-              <a:t>1</a:t>
-            </a:r>
-            <a:endParaRPr lang="en-US" sz="7600" dirty="0"/>
+              <a:t>01  ·  CENTRALITY</a:t>
+            </a:r>
+            <a:endParaRPr lang="en-US" sz="1000" dirty="0"/>
           </a:p>
         </p:txBody>
       </p:sp>
@@ -6161,8 +6652,8 @@
         </p:nvSpPr>
         <p:spPr>
           <a:xfrm>
-            <a:off x="8229600" y="3337560"/>
-            <a:ext cx="3108960" cy="502920"/>
+            <a:off x="8229600" y="2331720"/>
+            <a:ext cx="3108960" cy="594360"/>
           </a:xfrm>
           <a:prstGeom prst="rect">
             <a:avLst/>
@@ -6174,11 +6665,11 @@
           <a:bodyPr wrap="square" lIns="0" tIns="0" rIns="0" bIns="0" rtlCol="0" anchor="ctr"/>
           <a:lstStyle/>
           <a:p>
-            <a:pPr rtl="1" algn="r" indent="0" marL="0">
-              <a:buNone/>
-            </a:pPr>
-            <a:r>
-              <a:rPr lang="en-US" sz="2200" b="1" dirty="0">
+            <a:pPr marL="0" indent="0" algn="r" rtl="1">
+              <a:buNone/>
+            </a:pPr>
+            <a:r>
+              <a:rPr lang="en-US" sz="2600" b="1" dirty="0">
                 <a:solidFill>
                   <a:srgbClr val="F8FAFC"/>
                 </a:solidFill>
@@ -6186,92 +6677,60 @@
                 <a:ea typeface="Arial" pitchFamily="34" charset="-122"/>
                 <a:cs typeface="Arial" pitchFamily="34" charset="-120"/>
               </a:rPr>
-              <a:t>טעינה וניקוי</a:t>
-            </a:r>
-            <a:endParaRPr lang="en-US" sz="2200" dirty="0"/>
-          </a:p>
-        </p:txBody>
-      </p:sp>
-      <p:sp>
-        <p:nvSpPr>
-          <p:cNvPr id="14" name="Text 12"/>
-          <p:cNvSpPr/>
-          <p:nvPr/>
-        </p:nvSpPr>
-        <p:spPr>
-          <a:xfrm>
-            <a:off x="8229600" y="3886200"/>
-            <a:ext cx="3108960" cy="1280160"/>
-          </a:xfrm>
-          <a:prstGeom prst="rect">
-            <a:avLst/>
-          </a:prstGeom>
-          <a:noFill/>
-          <a:ln/>
-        </p:spPr>
-        <p:txBody>
-          <a:bodyPr wrap="square" lIns="0" tIns="0" rIns="0" bIns="0" rtlCol="0" anchor="t"/>
-          <a:lstStyle/>
-          <a:p>
-            <a:pPr rtl="1" algn="r" indent="0" marL="0">
-              <a:buNone/>
-            </a:pPr>
-            <a:r>
-              <a:rPr lang="en-US" sz="1300" dirty="0">
-                <a:solidFill>
-                  <a:srgbClr val="CBD5E1"/>
-                </a:solidFill>
-                <a:latin typeface="Arial" pitchFamily="34" charset="0"/>
-                <a:ea typeface="Arial" pitchFamily="34" charset="-122"/>
-                <a:cs typeface="Arial" pitchFamily="34" charset="-120"/>
-              </a:rPr>
-              <a:t>טעינת הנתונים, טיפול בערכים חסרים ואימות פורמט.</a:t>
-            </a:r>
-            <a:endParaRPr lang="en-US" sz="1300" dirty="0"/>
-          </a:p>
-        </p:txBody>
-      </p:sp>
-      <p:sp>
-        <p:nvSpPr>
-          <p:cNvPr id="15" name="Shape 13"/>
-          <p:cNvSpPr/>
-          <p:nvPr/>
-        </p:nvSpPr>
-        <p:spPr>
-          <a:xfrm>
-            <a:off x="8229600" y="5257800"/>
-            <a:ext cx="3108960" cy="411480"/>
+              <a:t>מדדי מרכזיות</a:t>
+            </a:r>
+            <a:endParaRPr lang="en-US" sz="2600" dirty="0"/>
+          </a:p>
+        </p:txBody>
+      </p:sp>
+      <p:sp>
+        <p:nvSpPr>
+          <p:cNvPr id="14" name="Shape 12"/>
+          <p:cNvSpPr/>
+          <p:nvPr/>
+        </p:nvSpPr>
+        <p:spPr>
+          <a:xfrm>
+            <a:off x="8229600" y="3200400"/>
+            <a:ext cx="3108960" cy="457200"/>
           </a:xfrm>
           <a:prstGeom prst="roundRect">
             <a:avLst>
-              <a:gd name="adj" fmla="val 17778"/>
+              <a:gd name="adj" fmla="val 12000"/>
             </a:avLst>
           </a:prstGeom>
           <a:solidFill>
             <a:srgbClr val="22D3EE">
-              <a:alpha val="22000"/>
+              <a:alpha val="20000"/>
             </a:srgbClr>
           </a:solidFill>
           <a:ln w="12700">
             <a:solidFill>
               <a:srgbClr val="22D3EE">
-                <a:alpha val="60000"/>
+                <a:alpha val="50000"/>
               </a:srgbClr>
             </a:solidFill>
             <a:prstDash val="solid"/>
           </a:ln>
         </p:spPr>
-      </p:sp>
-      <p:sp>
-        <p:nvSpPr>
-          <p:cNvPr id="16" name="Text 14"/>
-          <p:cNvSpPr/>
-          <p:nvPr/>
-        </p:nvSpPr>
-        <p:spPr>
-          <a:xfrm>
-            <a:off x="8229600" y="5257800"/>
-            <a:ext cx="3108960" cy="411480"/>
+        <p:txBody>
+          <a:bodyPr/>
+          <a:lstStyle/>
+          <a:p>
+            <a:endParaRPr lang="en-IL"/>
+          </a:p>
+        </p:txBody>
+      </p:sp>
+      <p:sp>
+        <p:nvSpPr>
+          <p:cNvPr id="15" name="Text 13"/>
+          <p:cNvSpPr/>
+          <p:nvPr/>
+        </p:nvSpPr>
+        <p:spPr>
+          <a:xfrm>
+            <a:off x="8229600" y="3200400"/>
+            <a:ext cx="3108960" cy="457200"/>
           </a:xfrm>
           <a:prstGeom prst="rect">
             <a:avLst/>
@@ -6283,11 +6742,11 @@
           <a:bodyPr wrap="square" lIns="0" tIns="0" rIns="0" bIns="0" rtlCol="0" anchor="ctr"/>
           <a:lstStyle/>
           <a:p>
-            <a:pPr algn="ctr" indent="0" marL="0">
-              <a:buNone/>
-            </a:pPr>
-            <a:r>
-              <a:rPr lang="en-US" sz="1100" b="1" dirty="0">
+            <a:pPr marL="0" indent="0" algn="ctr">
+              <a:buNone/>
+            </a:pPr>
+            <a:r>
+              <a:rPr lang="en-US" sz="1400" b="1" dirty="0">
                 <a:solidFill>
                   <a:srgbClr val="FFFFFF"/>
                 </a:solidFill>
@@ -6295,9 +6754,92 @@
                 <a:ea typeface="Consolas" pitchFamily="34" charset="-122"/>
                 <a:cs typeface="Consolas" pitchFamily="34" charset="-120"/>
               </a:rPr>
-              <a:t>Python · pandas</a:t>
-            </a:r>
-            <a:endParaRPr lang="en-US" sz="1100" dirty="0"/>
+              <a:t>PageRank</a:t>
+            </a:r>
+            <a:endParaRPr lang="en-US" sz="1400" dirty="0"/>
+          </a:p>
+        </p:txBody>
+      </p:sp>
+      <p:sp>
+        <p:nvSpPr>
+          <p:cNvPr id="16" name="Text 14"/>
+          <p:cNvSpPr/>
+          <p:nvPr/>
+        </p:nvSpPr>
+        <p:spPr>
+          <a:xfrm>
+            <a:off x="8229600" y="3703320"/>
+            <a:ext cx="3108960" cy="594360"/>
+          </a:xfrm>
+          <a:prstGeom prst="rect">
+            <a:avLst/>
+          </a:prstGeom>
+          <a:noFill/>
+          <a:ln/>
+        </p:spPr>
+        <p:txBody>
+          <a:bodyPr wrap="square" lIns="0" tIns="0" rIns="0" bIns="0" rtlCol="0" anchor="t"/>
+          <a:lstStyle/>
+          <a:p>
+            <a:pPr marL="0" indent="0" algn="r" rtl="1">
+              <a:buNone/>
+            </a:pPr>
+            <a:r>
+              <a:rPr lang="en-US" sz="1200" dirty="0">
+                <a:solidFill>
+                  <a:srgbClr val="CBD5E1"/>
+                </a:solidFill>
+                <a:latin typeface="Arial" pitchFamily="34" charset="0"/>
+                <a:ea typeface="Arial" pitchFamily="34" charset="-122"/>
+                <a:cs typeface="Arial" pitchFamily="34" charset="-120"/>
+              </a:rPr>
+              <a:t>על רשת </a:t>
+            </a:r>
+            <a:r>
+              <a:rPr lang="en-US" sz="1200" dirty="0" err="1">
+                <a:solidFill>
+                  <a:srgbClr val="CBD5E1"/>
+                </a:solidFill>
+                <a:latin typeface="Arial" pitchFamily="34" charset="0"/>
+                <a:ea typeface="Arial" pitchFamily="34" charset="-122"/>
+                <a:cs typeface="Arial" pitchFamily="34" charset="-120"/>
+              </a:rPr>
+              <a:t>האמון</a:t>
+            </a:r>
+            <a:r>
+              <a:rPr lang="en-US" sz="1200" dirty="0">
+                <a:solidFill>
+                  <a:srgbClr val="CBD5E1"/>
+                </a:solidFill>
+                <a:latin typeface="Arial" pitchFamily="34" charset="0"/>
+                <a:ea typeface="Arial" pitchFamily="34" charset="-122"/>
+                <a:cs typeface="Arial" pitchFamily="34" charset="-120"/>
+              </a:rPr>
+              <a:t> </a:t>
+            </a:r>
+            <a:r>
+              <a:rPr lang="he-IL" sz="1200" dirty="0">
+                <a:solidFill>
+                  <a:srgbClr val="CBD5E1"/>
+                </a:solidFill>
+                <a:latin typeface="Arial" pitchFamily="34" charset="0"/>
+                <a:ea typeface="Arial" pitchFamily="34" charset="-122"/>
+                <a:cs typeface="Arial" pitchFamily="34" charset="-120"/>
+              </a:rPr>
+              <a:t>-</a:t>
+            </a:r>
+            <a:r>
+              <a:rPr lang="en-US" sz="1200" dirty="0">
+                <a:solidFill>
+                  <a:srgbClr val="CBD5E1"/>
+                </a:solidFill>
+                <a:latin typeface="Arial" pitchFamily="34" charset="0"/>
+                <a:ea typeface="Arial" pitchFamily="34" charset="-122"/>
+                <a:cs typeface="Arial" pitchFamily="34" charset="-120"/>
+              </a:rPr>
+              <a:t> לזיהוי הגרעין האמין</a:t>
+            </a:r>
+            <a:endParaRPr lang="en-US" sz="1200" dirty="0"/>
           </a:p>
         </p:txBody>
       </p:sp>
@@ -6308,31 +6850,169 @@
           <p:nvPr/>
         </p:nvSpPr>
         <p:spPr>
-          <a:xfrm rot="16200000">
-            <a:off x="7635240" y="3675888"/>
-            <a:ext cx="329184" cy="329184"/>
-          </a:xfrm>
-          <a:prstGeom prst="triangle">
-            <a:avLst/>
-          </a:prstGeom>
-          <a:solidFill>
-            <a:srgbClr val="C084FC">
-              <a:alpha val="70000"/>
+          <a:xfrm>
+            <a:off x="8229600" y="4434840"/>
+            <a:ext cx="3108960" cy="457200"/>
+          </a:xfrm>
+          <a:prstGeom prst="roundRect">
+            <a:avLst>
+              <a:gd name="adj" fmla="val 12000"/>
+            </a:avLst>
+          </a:prstGeom>
+          <a:solidFill>
+            <a:srgbClr val="22D3EE">
+              <a:alpha val="20000"/>
             </a:srgbClr>
           </a:solidFill>
-          <a:ln/>
-        </p:spPr>
-      </p:sp>
-      <p:sp>
-        <p:nvSpPr>
-          <p:cNvPr id="18" name="Shape 16"/>
-          <p:cNvSpPr/>
-          <p:nvPr/>
-        </p:nvSpPr>
-        <p:spPr>
-          <a:xfrm>
-            <a:off x="4187952" y="1783080"/>
-            <a:ext cx="3657600" cy="4114800"/>
+          <a:ln w="12700">
+            <a:solidFill>
+              <a:srgbClr val="22D3EE">
+                <a:alpha val="50000"/>
+              </a:srgbClr>
+            </a:solidFill>
+            <a:prstDash val="solid"/>
+          </a:ln>
+        </p:spPr>
+        <p:txBody>
+          <a:bodyPr/>
+          <a:lstStyle/>
+          <a:p>
+            <a:endParaRPr lang="en-IL"/>
+          </a:p>
+        </p:txBody>
+      </p:sp>
+      <p:sp>
+        <p:nvSpPr>
+          <p:cNvPr id="18" name="Text 16"/>
+          <p:cNvSpPr/>
+          <p:nvPr/>
+        </p:nvSpPr>
+        <p:spPr>
+          <a:xfrm>
+            <a:off x="8229600" y="4434840"/>
+            <a:ext cx="3108960" cy="457200"/>
+          </a:xfrm>
+          <a:prstGeom prst="rect">
+            <a:avLst/>
+          </a:prstGeom>
+          <a:noFill/>
+          <a:ln/>
+        </p:spPr>
+        <p:txBody>
+          <a:bodyPr wrap="square" lIns="0" tIns="0" rIns="0" bIns="0" rtlCol="0" anchor="ctr"/>
+          <a:lstStyle/>
+          <a:p>
+            <a:pPr marL="0" indent="0" algn="ctr">
+              <a:buNone/>
+            </a:pPr>
+            <a:r>
+              <a:rPr lang="en-US" sz="1400" b="1" dirty="0">
+                <a:solidFill>
+                  <a:srgbClr val="FFFFFF"/>
+                </a:solidFill>
+                <a:latin typeface="Consolas" pitchFamily="34" charset="0"/>
+                <a:ea typeface="Consolas" pitchFamily="34" charset="-122"/>
+                <a:cs typeface="Consolas" pitchFamily="34" charset="-120"/>
+              </a:rPr>
+              <a:t>In-Degree</a:t>
+            </a:r>
+            <a:endParaRPr lang="en-US" sz="1400" dirty="0"/>
+          </a:p>
+        </p:txBody>
+      </p:sp>
+      <p:sp>
+        <p:nvSpPr>
+          <p:cNvPr id="19" name="Text 17"/>
+          <p:cNvSpPr/>
+          <p:nvPr/>
+        </p:nvSpPr>
+        <p:spPr>
+          <a:xfrm>
+            <a:off x="8229600" y="4937760"/>
+            <a:ext cx="3108960" cy="594360"/>
+          </a:xfrm>
+          <a:prstGeom prst="rect">
+            <a:avLst/>
+          </a:prstGeom>
+          <a:noFill/>
+          <a:ln/>
+        </p:spPr>
+        <p:txBody>
+          <a:bodyPr wrap="square" lIns="0" tIns="0" rIns="0" bIns="0" rtlCol="0" anchor="t"/>
+          <a:lstStyle/>
+          <a:p>
+            <a:pPr marL="0" indent="0" algn="r" rtl="1">
+              <a:buNone/>
+            </a:pPr>
+            <a:r>
+              <a:rPr lang="en-US" sz="1200" dirty="0">
+                <a:solidFill>
+                  <a:srgbClr val="CBD5E1"/>
+                </a:solidFill>
+                <a:latin typeface="Arial" pitchFamily="34" charset="0"/>
+                <a:ea typeface="Arial" pitchFamily="34" charset="-122"/>
+                <a:cs typeface="Arial" pitchFamily="34" charset="-120"/>
+              </a:rPr>
+              <a:t>על רשת חוסר </a:t>
+            </a:r>
+            <a:r>
+              <a:rPr lang="en-US" sz="1200" dirty="0" err="1">
+                <a:solidFill>
+                  <a:srgbClr val="CBD5E1"/>
+                </a:solidFill>
+                <a:latin typeface="Arial" pitchFamily="34" charset="0"/>
+                <a:ea typeface="Arial" pitchFamily="34" charset="-122"/>
+                <a:cs typeface="Arial" pitchFamily="34" charset="-120"/>
+              </a:rPr>
+              <a:t>האמון</a:t>
+            </a:r>
+            <a:r>
+              <a:rPr lang="en-US" sz="1200" dirty="0">
+                <a:solidFill>
+                  <a:srgbClr val="CBD5E1"/>
+                </a:solidFill>
+                <a:latin typeface="Arial" pitchFamily="34" charset="0"/>
+                <a:ea typeface="Arial" pitchFamily="34" charset="-122"/>
+                <a:cs typeface="Arial" pitchFamily="34" charset="-120"/>
+              </a:rPr>
+              <a:t> </a:t>
+            </a:r>
+            <a:r>
+              <a:rPr lang="he-IL" sz="1200" dirty="0">
+                <a:solidFill>
+                  <a:srgbClr val="CBD5E1"/>
+                </a:solidFill>
+                <a:latin typeface="Arial" pitchFamily="34" charset="0"/>
+                <a:ea typeface="Arial" pitchFamily="34" charset="-122"/>
+                <a:cs typeface="Arial" pitchFamily="34" charset="-120"/>
+              </a:rPr>
+              <a:t>-</a:t>
+            </a:r>
+            <a:r>
+              <a:rPr lang="en-US" sz="1200" dirty="0">
+                <a:solidFill>
+                  <a:srgbClr val="CBD5E1"/>
+                </a:solidFill>
+                <a:latin typeface="Arial" pitchFamily="34" charset="0"/>
+                <a:ea typeface="Arial" pitchFamily="34" charset="-122"/>
+                <a:cs typeface="Arial" pitchFamily="34" charset="-120"/>
+              </a:rPr>
+              <a:t> לאיתור נוכלים</a:t>
+            </a:r>
+            <a:endParaRPr lang="en-US" sz="1200" dirty="0"/>
+          </a:p>
+        </p:txBody>
+      </p:sp>
+      <p:sp>
+        <p:nvSpPr>
+          <p:cNvPr id="20" name="Shape 18"/>
+          <p:cNvSpPr/>
+          <p:nvPr/>
+        </p:nvSpPr>
+        <p:spPr>
+          <a:xfrm>
+            <a:off x="4187952" y="1691640"/>
+            <a:ext cx="3657600" cy="4297680"/>
           </a:xfrm>
           <a:prstGeom prst="roundRect">
             <a:avLst>
@@ -6353,23 +7033,30 @@
             <a:prstDash val="solid"/>
           </a:ln>
           <a:effectLst>
-            <a:outerShdw sx="100000" sy="100000" kx="0" ky="0" algn="bl" rotWithShape="0" blurRad="279400" dist="76200" dir="5400000">
+            <a:outerShdw blurRad="279400" dist="76200" dir="5400000" algn="bl" rotWithShape="0">
               <a:srgbClr val="000000">
                 <a:alpha val="40000"/>
               </a:srgbClr>
             </a:outerShdw>
           </a:effectLst>
         </p:spPr>
-      </p:sp>
-      <p:sp>
-        <p:nvSpPr>
-          <p:cNvPr id="19" name="Shape 17"/>
-          <p:cNvSpPr/>
-          <p:nvPr/>
-        </p:nvSpPr>
-        <p:spPr>
-          <a:xfrm>
-            <a:off x="4279392" y="1819656"/>
+        <p:txBody>
+          <a:bodyPr/>
+          <a:lstStyle/>
+          <a:p>
+            <a:endParaRPr lang="en-IL"/>
+          </a:p>
+        </p:txBody>
+      </p:sp>
+      <p:sp>
+        <p:nvSpPr>
+          <p:cNvPr id="21" name="Shape 19"/>
+          <p:cNvSpPr/>
+          <p:nvPr/>
+        </p:nvSpPr>
+        <p:spPr>
+          <a:xfrm>
+            <a:off x="4279392" y="1728216"/>
             <a:ext cx="3474720" cy="18288"/>
           </a:xfrm>
           <a:prstGeom prst="rect">
@@ -6382,17 +7069,51 @@
           </a:solidFill>
           <a:ln/>
         </p:spPr>
-      </p:sp>
-      <p:sp>
-        <p:nvSpPr>
-          <p:cNvPr id="20" name="Text 18"/>
-          <p:cNvSpPr/>
-          <p:nvPr/>
-        </p:nvSpPr>
-        <p:spPr>
-          <a:xfrm>
-            <a:off x="6291072" y="1984248"/>
-            <a:ext cx="1280160" cy="228600"/>
+        <p:txBody>
+          <a:bodyPr/>
+          <a:lstStyle/>
+          <a:p>
+            <a:endParaRPr lang="en-IL"/>
+          </a:p>
+        </p:txBody>
+      </p:sp>
+      <p:sp>
+        <p:nvSpPr>
+          <p:cNvPr id="22" name="Shape 20"/>
+          <p:cNvSpPr/>
+          <p:nvPr/>
+        </p:nvSpPr>
+        <p:spPr>
+          <a:xfrm>
+            <a:off x="4352544" y="1856232"/>
+            <a:ext cx="3328416" cy="54864"/>
+          </a:xfrm>
+          <a:prstGeom prst="rect">
+            <a:avLst/>
+          </a:prstGeom>
+          <a:solidFill>
+            <a:srgbClr val="A855F7"/>
+          </a:solidFill>
+          <a:ln/>
+        </p:spPr>
+        <p:txBody>
+          <a:bodyPr/>
+          <a:lstStyle/>
+          <a:p>
+            <a:endParaRPr lang="en-IL"/>
+          </a:p>
+        </p:txBody>
+      </p:sp>
+      <p:sp>
+        <p:nvSpPr>
+          <p:cNvPr id="23" name="Text 21"/>
+          <p:cNvSpPr/>
+          <p:nvPr/>
+        </p:nvSpPr>
+        <p:spPr>
+          <a:xfrm>
+            <a:off x="4462272" y="2020824"/>
+            <a:ext cx="3108960" cy="274320"/>
           </a:xfrm>
           <a:prstGeom prst="rect">
             <a:avLst/>
@@ -6404,50 +7125,11 @@
           <a:bodyPr wrap="square" lIns="0" tIns="0" rIns="0" bIns="0" rtlCol="0" anchor="ctr"/>
           <a:lstStyle/>
           <a:p>
-            <a:pPr algn="r" indent="0" marL="0">
-              <a:buNone/>
-            </a:pPr>
-            <a:r>
-              <a:rPr lang="en-US" sz="900" b="1" spc="400" kern="0" dirty="0">
-                <a:solidFill>
-                  <a:srgbClr val="94A3B8"/>
-                </a:solidFill>
-                <a:latin typeface="Arial" pitchFamily="34" charset="0"/>
-                <a:ea typeface="Arial" pitchFamily="34" charset="-122"/>
-                <a:cs typeface="Arial" pitchFamily="34" charset="-120"/>
-              </a:rPr>
-              <a:t>STEP</a:t>
-            </a:r>
-            <a:endParaRPr lang="en-US" sz="900" dirty="0"/>
-          </a:p>
-        </p:txBody>
-      </p:sp>
-      <p:sp>
-        <p:nvSpPr>
-          <p:cNvPr id="21" name="Text 19"/>
-          <p:cNvSpPr/>
-          <p:nvPr/>
-        </p:nvSpPr>
-        <p:spPr>
-          <a:xfrm>
-            <a:off x="6291072" y="2240280"/>
-            <a:ext cx="1280160" cy="1280160"/>
-          </a:xfrm>
-          <a:prstGeom prst="rect">
-            <a:avLst/>
-          </a:prstGeom>
-          <a:noFill/>
-          <a:ln/>
-        </p:spPr>
-        <p:txBody>
-          <a:bodyPr wrap="square" lIns="0" tIns="0" rIns="0" bIns="0" rtlCol="0" anchor="t"/>
-          <a:lstStyle/>
-          <a:p>
-            <a:pPr algn="r" indent="0" marL="0">
-              <a:buNone/>
-            </a:pPr>
-            <a:r>
-              <a:rPr lang="en-US" sz="7600" b="1" dirty="0">
+            <a:pPr marL="0" indent="0" algn="r">
+              <a:buNone/>
+            </a:pPr>
+            <a:r>
+              <a:rPr lang="en-US" sz="1000" b="1" kern="0" spc="300" dirty="0">
                 <a:solidFill>
                   <a:srgbClr val="A855F7"/>
                 </a:solidFill>
@@ -6455,22 +7137,22 @@
                 <a:ea typeface="Arial" pitchFamily="34" charset="-122"/>
                 <a:cs typeface="Arial" pitchFamily="34" charset="-120"/>
               </a:rPr>
-              <a:t>2</a:t>
-            </a:r>
-            <a:endParaRPr lang="en-US" sz="7600" dirty="0"/>
-          </a:p>
-        </p:txBody>
-      </p:sp>
-      <p:sp>
-        <p:nvSpPr>
-          <p:cNvPr id="22" name="Text 20"/>
-          <p:cNvSpPr/>
-          <p:nvPr/>
-        </p:nvSpPr>
-        <p:spPr>
-          <a:xfrm>
-            <a:off x="4462272" y="3337560"/>
-            <a:ext cx="3108960" cy="502920"/>
+              <a:t>02  ·  COMMUNITY</a:t>
+            </a:r>
+            <a:endParaRPr lang="en-US" sz="1000" dirty="0"/>
+          </a:p>
+        </p:txBody>
+      </p:sp>
+      <p:sp>
+        <p:nvSpPr>
+          <p:cNvPr id="24" name="Text 22"/>
+          <p:cNvSpPr/>
+          <p:nvPr/>
+        </p:nvSpPr>
+        <p:spPr>
+          <a:xfrm>
+            <a:off x="4462272" y="2331720"/>
+            <a:ext cx="3108960" cy="594360"/>
           </a:xfrm>
           <a:prstGeom prst="rect">
             <a:avLst/>
@@ -6482,11 +7164,11 @@
           <a:bodyPr wrap="square" lIns="0" tIns="0" rIns="0" bIns="0" rtlCol="0" anchor="ctr"/>
           <a:lstStyle/>
           <a:p>
-            <a:pPr rtl="1" algn="r" indent="0" marL="0">
-              <a:buNone/>
-            </a:pPr>
-            <a:r>
-              <a:rPr lang="en-US" sz="2200" b="1" dirty="0">
+            <a:pPr marL="0" indent="0" algn="r" rtl="1">
+              <a:buNone/>
+            </a:pPr>
+            <a:r>
+              <a:rPr lang="en-US" sz="2600" b="1" dirty="0">
                 <a:solidFill>
                   <a:srgbClr val="F8FAFC"/>
                 </a:solidFill>
@@ -6494,92 +7176,60 @@
                 <a:ea typeface="Arial" pitchFamily="34" charset="-122"/>
                 <a:cs typeface="Arial" pitchFamily="34" charset="-120"/>
               </a:rPr>
-              <a:t>בניית הרשת</a:t>
-            </a:r>
-            <a:endParaRPr lang="en-US" sz="2200" dirty="0"/>
-          </a:p>
-        </p:txBody>
-      </p:sp>
-      <p:sp>
-        <p:nvSpPr>
-          <p:cNvPr id="23" name="Text 21"/>
-          <p:cNvSpPr/>
-          <p:nvPr/>
-        </p:nvSpPr>
-        <p:spPr>
-          <a:xfrm>
-            <a:off x="4462272" y="3886200"/>
-            <a:ext cx="3108960" cy="1280160"/>
-          </a:xfrm>
-          <a:prstGeom prst="rect">
-            <a:avLst/>
-          </a:prstGeom>
-          <a:noFill/>
-          <a:ln/>
-        </p:spPr>
-        <p:txBody>
-          <a:bodyPr wrap="square" lIns="0" tIns="0" rIns="0" bIns="0" rtlCol="0" anchor="t"/>
-          <a:lstStyle/>
-          <a:p>
-            <a:pPr rtl="1" algn="r" indent="0" marL="0">
-              <a:buNone/>
-            </a:pPr>
-            <a:r>
-              <a:rPr lang="en-US" sz="1300" dirty="0">
-                <a:solidFill>
-                  <a:srgbClr val="CBD5E1"/>
-                </a:solidFill>
-                <a:latin typeface="Arial" pitchFamily="34" charset="0"/>
-                <a:ea typeface="Arial" pitchFamily="34" charset="-122"/>
-                <a:cs typeface="Arial" pitchFamily="34" charset="-120"/>
-              </a:rPr>
-              <a:t>המרת הדירוגים לגרף מכוון ושקול בעזרת NetworkX.</a:t>
-            </a:r>
-            <a:endParaRPr lang="en-US" sz="1300" dirty="0"/>
-          </a:p>
-        </p:txBody>
-      </p:sp>
-      <p:sp>
-        <p:nvSpPr>
-          <p:cNvPr id="24" name="Shape 22"/>
-          <p:cNvSpPr/>
-          <p:nvPr/>
-        </p:nvSpPr>
-        <p:spPr>
-          <a:xfrm>
-            <a:off x="4462272" y="5257800"/>
-            <a:ext cx="3108960" cy="411480"/>
+              <a:t>זיהוי קהילות</a:t>
+            </a:r>
+            <a:endParaRPr lang="en-US" sz="2600" dirty="0"/>
+          </a:p>
+        </p:txBody>
+      </p:sp>
+      <p:sp>
+        <p:nvSpPr>
+          <p:cNvPr id="25" name="Shape 23"/>
+          <p:cNvSpPr/>
+          <p:nvPr/>
+        </p:nvSpPr>
+        <p:spPr>
+          <a:xfrm>
+            <a:off x="4462272" y="3200400"/>
+            <a:ext cx="3108960" cy="457200"/>
           </a:xfrm>
           <a:prstGeom prst="roundRect">
             <a:avLst>
-              <a:gd name="adj" fmla="val 17778"/>
+              <a:gd name="adj" fmla="val 12000"/>
             </a:avLst>
           </a:prstGeom>
           <a:solidFill>
             <a:srgbClr val="A855F7">
-              <a:alpha val="22000"/>
+              <a:alpha val="20000"/>
             </a:srgbClr>
           </a:solidFill>
           <a:ln w="12700">
             <a:solidFill>
               <a:srgbClr val="A855F7">
-                <a:alpha val="60000"/>
+                <a:alpha val="50000"/>
               </a:srgbClr>
             </a:solidFill>
             <a:prstDash val="solid"/>
           </a:ln>
         </p:spPr>
-      </p:sp>
-      <p:sp>
-        <p:nvSpPr>
-          <p:cNvPr id="25" name="Text 23"/>
-          <p:cNvSpPr/>
-          <p:nvPr/>
-        </p:nvSpPr>
-        <p:spPr>
-          <a:xfrm>
-            <a:off x="4462272" y="5257800"/>
-            <a:ext cx="3108960" cy="411480"/>
+        <p:txBody>
+          <a:bodyPr/>
+          <a:lstStyle/>
+          <a:p>
+            <a:endParaRPr lang="en-IL"/>
+          </a:p>
+        </p:txBody>
+      </p:sp>
+      <p:sp>
+        <p:nvSpPr>
+          <p:cNvPr id="26" name="Text 24"/>
+          <p:cNvSpPr/>
+          <p:nvPr/>
+        </p:nvSpPr>
+        <p:spPr>
+          <a:xfrm>
+            <a:off x="4462272" y="3200400"/>
+            <a:ext cx="3108960" cy="457200"/>
           </a:xfrm>
           <a:prstGeom prst="rect">
             <a:avLst/>
@@ -6591,11 +7241,11 @@
           <a:bodyPr wrap="square" lIns="0" tIns="0" rIns="0" bIns="0" rtlCol="0" anchor="ctr"/>
           <a:lstStyle/>
           <a:p>
-            <a:pPr algn="ctr" indent="0" marL="0">
-              <a:buNone/>
-            </a:pPr>
-            <a:r>
-              <a:rPr lang="en-US" sz="1100" b="1" dirty="0">
+            <a:pPr marL="0" indent="0" algn="ctr">
+              <a:buNone/>
+            </a:pPr>
+            <a:r>
+              <a:rPr lang="en-US" sz="1400" b="1" dirty="0">
                 <a:solidFill>
                   <a:srgbClr val="FFFFFF"/>
                 </a:solidFill>
@@ -6603,44 +7253,177 @@
                 <a:ea typeface="Consolas" pitchFamily="34" charset="-122"/>
                 <a:cs typeface="Consolas" pitchFamily="34" charset="-120"/>
               </a:rPr>
-              <a:t>NetworkX · DiGraph</a:t>
-            </a:r>
-            <a:endParaRPr lang="en-US" sz="1100" dirty="0"/>
-          </a:p>
-        </p:txBody>
-      </p:sp>
-      <p:sp>
-        <p:nvSpPr>
-          <p:cNvPr id="26" name="Shape 24"/>
-          <p:cNvSpPr/>
-          <p:nvPr/>
-        </p:nvSpPr>
-        <p:spPr>
-          <a:xfrm rot="16200000">
-            <a:off x="3867912" y="3675888"/>
-            <a:ext cx="329184" cy="329184"/>
-          </a:xfrm>
-          <a:prstGeom prst="triangle">
-            <a:avLst/>
-          </a:prstGeom>
-          <a:solidFill>
-            <a:srgbClr val="C084FC">
-              <a:alpha val="70000"/>
+              <a:t>Louvain</a:t>
+            </a:r>
+            <a:endParaRPr lang="en-US" sz="1400" dirty="0"/>
+          </a:p>
+        </p:txBody>
+      </p:sp>
+      <p:sp>
+        <p:nvSpPr>
+          <p:cNvPr id="27" name="Text 25"/>
+          <p:cNvSpPr/>
+          <p:nvPr/>
+        </p:nvSpPr>
+        <p:spPr>
+          <a:xfrm>
+            <a:off x="4462272" y="3703320"/>
+            <a:ext cx="3108960" cy="594360"/>
+          </a:xfrm>
+          <a:prstGeom prst="rect">
+            <a:avLst/>
+          </a:prstGeom>
+          <a:noFill/>
+          <a:ln/>
+        </p:spPr>
+        <p:txBody>
+          <a:bodyPr wrap="square" lIns="0" tIns="0" rIns="0" bIns="0" rtlCol="0" anchor="t"/>
+          <a:lstStyle/>
+          <a:p>
+            <a:pPr marL="0" indent="0" algn="r" rtl="1">
+              <a:buNone/>
+            </a:pPr>
+            <a:r>
+              <a:rPr lang="en-US" sz="1200" dirty="0">
+                <a:solidFill>
+                  <a:srgbClr val="CBD5E1"/>
+                </a:solidFill>
+                <a:latin typeface="Arial" pitchFamily="34" charset="0"/>
+                <a:ea typeface="Arial" pitchFamily="34" charset="-122"/>
+                <a:cs typeface="Arial" pitchFamily="34" charset="-120"/>
+              </a:rPr>
+              <a:t>לזיהוי קבוצות צפופות במהירות</a:t>
+            </a:r>
+            <a:endParaRPr lang="en-US" sz="1200" dirty="0"/>
+          </a:p>
+        </p:txBody>
+      </p:sp>
+      <p:sp>
+        <p:nvSpPr>
+          <p:cNvPr id="28" name="Shape 26"/>
+          <p:cNvSpPr/>
+          <p:nvPr/>
+        </p:nvSpPr>
+        <p:spPr>
+          <a:xfrm>
+            <a:off x="4462272" y="4434840"/>
+            <a:ext cx="3108960" cy="457200"/>
+          </a:xfrm>
+          <a:prstGeom prst="roundRect">
+            <a:avLst>
+              <a:gd name="adj" fmla="val 12000"/>
+            </a:avLst>
+          </a:prstGeom>
+          <a:solidFill>
+            <a:srgbClr val="A855F7">
+              <a:alpha val="20000"/>
             </a:srgbClr>
           </a:solidFill>
-          <a:ln/>
-        </p:spPr>
-      </p:sp>
-      <p:sp>
-        <p:nvSpPr>
-          <p:cNvPr id="27" name="Shape 25"/>
-          <p:cNvSpPr/>
-          <p:nvPr/>
-        </p:nvSpPr>
-        <p:spPr>
-          <a:xfrm>
-            <a:off x="420624" y="1783080"/>
-            <a:ext cx="3657600" cy="4114800"/>
+          <a:ln w="12700">
+            <a:solidFill>
+              <a:srgbClr val="A855F7">
+                <a:alpha val="50000"/>
+              </a:srgbClr>
+            </a:solidFill>
+            <a:prstDash val="solid"/>
+          </a:ln>
+        </p:spPr>
+        <p:txBody>
+          <a:bodyPr/>
+          <a:lstStyle/>
+          <a:p>
+            <a:endParaRPr lang="en-IL"/>
+          </a:p>
+        </p:txBody>
+      </p:sp>
+      <p:sp>
+        <p:nvSpPr>
+          <p:cNvPr id="29" name="Text 27"/>
+          <p:cNvSpPr/>
+          <p:nvPr/>
+        </p:nvSpPr>
+        <p:spPr>
+          <a:xfrm>
+            <a:off x="4462272" y="4434840"/>
+            <a:ext cx="3108960" cy="457200"/>
+          </a:xfrm>
+          <a:prstGeom prst="rect">
+            <a:avLst/>
+          </a:prstGeom>
+          <a:noFill/>
+          <a:ln/>
+        </p:spPr>
+        <p:txBody>
+          <a:bodyPr wrap="square" lIns="0" tIns="0" rIns="0" bIns="0" rtlCol="0" anchor="ctr"/>
+          <a:lstStyle/>
+          <a:p>
+            <a:pPr marL="0" indent="0" algn="ctr">
+              <a:buNone/>
+            </a:pPr>
+            <a:r>
+              <a:rPr lang="en-US" sz="1400" b="1" dirty="0">
+                <a:solidFill>
+                  <a:srgbClr val="FFFFFF"/>
+                </a:solidFill>
+                <a:latin typeface="Consolas" pitchFamily="34" charset="0"/>
+                <a:ea typeface="Consolas" pitchFamily="34" charset="-122"/>
+                <a:cs typeface="Consolas" pitchFamily="34" charset="-120"/>
+              </a:rPr>
+              <a:t>Girvan-Newman</a:t>
+            </a:r>
+            <a:endParaRPr lang="en-US" sz="1400" dirty="0"/>
+          </a:p>
+        </p:txBody>
+      </p:sp>
+      <p:sp>
+        <p:nvSpPr>
+          <p:cNvPr id="30" name="Text 28"/>
+          <p:cNvSpPr/>
+          <p:nvPr/>
+        </p:nvSpPr>
+        <p:spPr>
+          <a:xfrm>
+            <a:off x="4462272" y="4937760"/>
+            <a:ext cx="3108960" cy="594360"/>
+          </a:xfrm>
+          <a:prstGeom prst="rect">
+            <a:avLst/>
+          </a:prstGeom>
+          <a:noFill/>
+          <a:ln/>
+        </p:spPr>
+        <p:txBody>
+          <a:bodyPr wrap="square" lIns="0" tIns="0" rIns="0" bIns="0" rtlCol="0" anchor="t"/>
+          <a:lstStyle/>
+          <a:p>
+            <a:pPr marL="0" indent="0" algn="r" rtl="1">
+              <a:buNone/>
+            </a:pPr>
+            <a:r>
+              <a:rPr lang="en-US" sz="1200" dirty="0">
+                <a:solidFill>
+                  <a:srgbClr val="CBD5E1"/>
+                </a:solidFill>
+                <a:latin typeface="Arial" pitchFamily="34" charset="0"/>
+                <a:ea typeface="Arial" pitchFamily="34" charset="-122"/>
+                <a:cs typeface="Arial" pitchFamily="34" charset="-120"/>
+              </a:rPr>
+              <a:t>לאימות חתכי קצה חשודים</a:t>
+            </a:r>
+            <a:endParaRPr lang="en-US" sz="1200" dirty="0"/>
+          </a:p>
+        </p:txBody>
+      </p:sp>
+      <p:sp>
+        <p:nvSpPr>
+          <p:cNvPr id="31" name="Shape 29"/>
+          <p:cNvSpPr/>
+          <p:nvPr/>
+        </p:nvSpPr>
+        <p:spPr>
+          <a:xfrm>
+            <a:off x="420624" y="1691640"/>
+            <a:ext cx="3657600" cy="4297680"/>
           </a:xfrm>
           <a:prstGeom prst="roundRect">
             <a:avLst>
@@ -6661,23 +7444,30 @@
             <a:prstDash val="solid"/>
           </a:ln>
           <a:effectLst>
-            <a:outerShdw sx="100000" sy="100000" kx="0" ky="0" algn="bl" rotWithShape="0" blurRad="279400" dist="76200" dir="5400000">
+            <a:outerShdw blurRad="279400" dist="76200" dir="5400000" algn="bl" rotWithShape="0">
               <a:srgbClr val="000000">
                 <a:alpha val="40000"/>
               </a:srgbClr>
             </a:outerShdw>
           </a:effectLst>
         </p:spPr>
-      </p:sp>
-      <p:sp>
-        <p:nvSpPr>
-          <p:cNvPr id="28" name="Shape 26"/>
-          <p:cNvSpPr/>
-          <p:nvPr/>
-        </p:nvSpPr>
-        <p:spPr>
-          <a:xfrm>
-            <a:off x="512064" y="1819656"/>
+        <p:txBody>
+          <a:bodyPr/>
+          <a:lstStyle/>
+          <a:p>
+            <a:endParaRPr lang="en-IL"/>
+          </a:p>
+        </p:txBody>
+      </p:sp>
+      <p:sp>
+        <p:nvSpPr>
+          <p:cNvPr id="32" name="Shape 30"/>
+          <p:cNvSpPr/>
+          <p:nvPr/>
+        </p:nvSpPr>
+        <p:spPr>
+          <a:xfrm>
+            <a:off x="512064" y="1728216"/>
             <a:ext cx="3474720" cy="18288"/>
           </a:xfrm>
           <a:prstGeom prst="rect">
@@ -6690,17 +7480,51 @@
           </a:solidFill>
           <a:ln/>
         </p:spPr>
-      </p:sp>
-      <p:sp>
-        <p:nvSpPr>
-          <p:cNvPr id="29" name="Text 27"/>
-          <p:cNvSpPr/>
-          <p:nvPr/>
-        </p:nvSpPr>
-        <p:spPr>
-          <a:xfrm>
-            <a:off x="2523744" y="1984248"/>
-            <a:ext cx="1280160" cy="228600"/>
+        <p:txBody>
+          <a:bodyPr/>
+          <a:lstStyle/>
+          <a:p>
+            <a:endParaRPr lang="en-IL"/>
+          </a:p>
+        </p:txBody>
+      </p:sp>
+      <p:sp>
+        <p:nvSpPr>
+          <p:cNvPr id="33" name="Shape 31"/>
+          <p:cNvSpPr/>
+          <p:nvPr/>
+        </p:nvSpPr>
+        <p:spPr>
+          <a:xfrm>
+            <a:off x="585216" y="1856232"/>
+            <a:ext cx="3328416" cy="54864"/>
+          </a:xfrm>
+          <a:prstGeom prst="rect">
+            <a:avLst/>
+          </a:prstGeom>
+          <a:solidFill>
+            <a:srgbClr val="EC4899"/>
+          </a:solidFill>
+          <a:ln/>
+        </p:spPr>
+        <p:txBody>
+          <a:bodyPr/>
+          <a:lstStyle/>
+          <a:p>
+            <a:endParaRPr lang="en-IL"/>
+          </a:p>
+        </p:txBody>
+      </p:sp>
+      <p:sp>
+        <p:nvSpPr>
+          <p:cNvPr id="34" name="Text 32"/>
+          <p:cNvSpPr/>
+          <p:nvPr/>
+        </p:nvSpPr>
+        <p:spPr>
+          <a:xfrm>
+            <a:off x="694944" y="2020824"/>
+            <a:ext cx="3108960" cy="274320"/>
           </a:xfrm>
           <a:prstGeom prst="rect">
             <a:avLst/>
@@ -6712,50 +7536,11 @@
           <a:bodyPr wrap="square" lIns="0" tIns="0" rIns="0" bIns="0" rtlCol="0" anchor="ctr"/>
           <a:lstStyle/>
           <a:p>
-            <a:pPr algn="r" indent="0" marL="0">
-              <a:buNone/>
-            </a:pPr>
-            <a:r>
-              <a:rPr lang="en-US" sz="900" b="1" spc="400" kern="0" dirty="0">
-                <a:solidFill>
-                  <a:srgbClr val="94A3B8"/>
-                </a:solidFill>
-                <a:latin typeface="Arial" pitchFamily="34" charset="0"/>
-                <a:ea typeface="Arial" pitchFamily="34" charset="-122"/>
-                <a:cs typeface="Arial" pitchFamily="34" charset="-120"/>
-              </a:rPr>
-              <a:t>STEP</a:t>
-            </a:r>
-            <a:endParaRPr lang="en-US" sz="900" dirty="0"/>
-          </a:p>
-        </p:txBody>
-      </p:sp>
-      <p:sp>
-        <p:nvSpPr>
-          <p:cNvPr id="30" name="Text 28"/>
-          <p:cNvSpPr/>
-          <p:nvPr/>
-        </p:nvSpPr>
-        <p:spPr>
-          <a:xfrm>
-            <a:off x="2523744" y="2240280"/>
-            <a:ext cx="1280160" cy="1280160"/>
-          </a:xfrm>
-          <a:prstGeom prst="rect">
-            <a:avLst/>
-          </a:prstGeom>
-          <a:noFill/>
-          <a:ln/>
-        </p:spPr>
-        <p:txBody>
-          <a:bodyPr wrap="square" lIns="0" tIns="0" rIns="0" bIns="0" rtlCol="0" anchor="t"/>
-          <a:lstStyle/>
-          <a:p>
-            <a:pPr algn="r" indent="0" marL="0">
-              <a:buNone/>
-            </a:pPr>
-            <a:r>
-              <a:rPr lang="en-US" sz="7600" b="1" dirty="0">
+            <a:pPr marL="0" indent="0" algn="r">
+              <a:buNone/>
+            </a:pPr>
+            <a:r>
+              <a:rPr lang="en-US" sz="1000" b="1" kern="0" spc="300" dirty="0">
                 <a:solidFill>
                   <a:srgbClr val="EC4899"/>
                 </a:solidFill>
@@ -6763,22 +7548,22 @@
                 <a:ea typeface="Arial" pitchFamily="34" charset="-122"/>
                 <a:cs typeface="Arial" pitchFamily="34" charset="-120"/>
               </a:rPr>
-              <a:t>3</a:t>
-            </a:r>
-            <a:endParaRPr lang="en-US" sz="7600" dirty="0"/>
-          </a:p>
-        </p:txBody>
-      </p:sp>
-      <p:sp>
-        <p:nvSpPr>
-          <p:cNvPr id="31" name="Text 29"/>
-          <p:cNvSpPr/>
-          <p:nvPr/>
-        </p:nvSpPr>
-        <p:spPr>
-          <a:xfrm>
-            <a:off x="694944" y="3337560"/>
-            <a:ext cx="3108960" cy="502920"/>
+              <a:t>03  ·  PREDICTION</a:t>
+            </a:r>
+            <a:endParaRPr lang="en-US" sz="1000" dirty="0"/>
+          </a:p>
+        </p:txBody>
+      </p:sp>
+      <p:sp>
+        <p:nvSpPr>
+          <p:cNvPr id="35" name="Text 33"/>
+          <p:cNvSpPr/>
+          <p:nvPr/>
+        </p:nvSpPr>
+        <p:spPr>
+          <a:xfrm>
+            <a:off x="694944" y="2331720"/>
+            <a:ext cx="3108960" cy="594360"/>
           </a:xfrm>
           <a:prstGeom prst="rect">
             <a:avLst/>
@@ -6790,11 +7575,11 @@
           <a:bodyPr wrap="square" lIns="0" tIns="0" rIns="0" bIns="0" rtlCol="0" anchor="ctr"/>
           <a:lstStyle/>
           <a:p>
-            <a:pPr rtl="1" algn="r" indent="0" marL="0">
-              <a:buNone/>
-            </a:pPr>
-            <a:r>
-              <a:rPr lang="en-US" sz="2200" b="1" dirty="0">
+            <a:pPr marL="0" indent="0" algn="r" rtl="1">
+              <a:buNone/>
+            </a:pPr>
+            <a:r>
+              <a:rPr lang="en-US" sz="2600" b="1" dirty="0">
                 <a:solidFill>
                   <a:srgbClr val="F8FAFC"/>
                 </a:solidFill>
@@ -6802,92 +7587,60 @@
                 <a:ea typeface="Arial" pitchFamily="34" charset="-122"/>
                 <a:cs typeface="Arial" pitchFamily="34" charset="-120"/>
               </a:rPr>
-              <a:t>פיצול הגרף</a:t>
-            </a:r>
-            <a:endParaRPr lang="en-US" sz="2200" dirty="0"/>
-          </a:p>
-        </p:txBody>
-      </p:sp>
-      <p:sp>
-        <p:nvSpPr>
-          <p:cNvPr id="32" name="Text 30"/>
-          <p:cNvSpPr/>
-          <p:nvPr/>
-        </p:nvSpPr>
-        <p:spPr>
-          <a:xfrm>
-            <a:off x="694944" y="3886200"/>
-            <a:ext cx="3108960" cy="1280160"/>
-          </a:xfrm>
-          <a:prstGeom prst="rect">
-            <a:avLst/>
-          </a:prstGeom>
-          <a:noFill/>
-          <a:ln/>
-        </p:spPr>
-        <p:txBody>
-          <a:bodyPr wrap="square" lIns="0" tIns="0" rIns="0" bIns="0" rtlCol="0" anchor="t"/>
-          <a:lstStyle/>
-          <a:p>
-            <a:pPr rtl="1" algn="r" indent="0" marL="0">
-              <a:buNone/>
-            </a:pPr>
-            <a:r>
-              <a:rPr lang="en-US" sz="1300" dirty="0">
-                <a:solidFill>
-                  <a:srgbClr val="CBD5E1"/>
-                </a:solidFill>
-                <a:latin typeface="Arial" pitchFamily="34" charset="0"/>
-                <a:ea typeface="Arial" pitchFamily="34" charset="-122"/>
-                <a:cs typeface="Arial" pitchFamily="34" charset="-120"/>
-              </a:rPr>
-              <a:t>גרף 'אמון' (משקל &gt; 0) וגרף 'חוסר אמון' (משקל &lt; 0) — לתאימות לאלגוריתמים.</a:t>
-            </a:r>
-            <a:endParaRPr lang="en-US" sz="1300" dirty="0"/>
-          </a:p>
-        </p:txBody>
-      </p:sp>
-      <p:sp>
-        <p:nvSpPr>
-          <p:cNvPr id="33" name="Shape 31"/>
-          <p:cNvSpPr/>
-          <p:nvPr/>
-        </p:nvSpPr>
-        <p:spPr>
-          <a:xfrm>
-            <a:off x="694944" y="5257800"/>
-            <a:ext cx="3108960" cy="411480"/>
+              <a:t>חיזוי קשרים</a:t>
+            </a:r>
+            <a:endParaRPr lang="en-US" sz="2600" dirty="0"/>
+          </a:p>
+        </p:txBody>
+      </p:sp>
+      <p:sp>
+        <p:nvSpPr>
+          <p:cNvPr id="36" name="Shape 34"/>
+          <p:cNvSpPr/>
+          <p:nvPr/>
+        </p:nvSpPr>
+        <p:spPr>
+          <a:xfrm>
+            <a:off x="694944" y="3200400"/>
+            <a:ext cx="3108960" cy="457200"/>
           </a:xfrm>
           <a:prstGeom prst="roundRect">
             <a:avLst>
-              <a:gd name="adj" fmla="val 17778"/>
+              <a:gd name="adj" fmla="val 12000"/>
             </a:avLst>
           </a:prstGeom>
           <a:solidFill>
             <a:srgbClr val="EC4899">
-              <a:alpha val="22000"/>
+              <a:alpha val="20000"/>
             </a:srgbClr>
           </a:solidFill>
           <a:ln w="12700">
             <a:solidFill>
               <a:srgbClr val="EC4899">
-                <a:alpha val="60000"/>
+                <a:alpha val="50000"/>
               </a:srgbClr>
             </a:solidFill>
             <a:prstDash val="solid"/>
           </a:ln>
         </p:spPr>
-      </p:sp>
-      <p:sp>
-        <p:nvSpPr>
-          <p:cNvPr id="34" name="Text 32"/>
-          <p:cNvSpPr/>
-          <p:nvPr/>
-        </p:nvSpPr>
-        <p:spPr>
-          <a:xfrm>
-            <a:off x="694944" y="5257800"/>
-            <a:ext cx="3108960" cy="411480"/>
+        <p:txBody>
+          <a:bodyPr/>
+          <a:lstStyle/>
+          <a:p>
+            <a:endParaRPr lang="en-IL"/>
+          </a:p>
+        </p:txBody>
+      </p:sp>
+      <p:sp>
+        <p:nvSpPr>
+          <p:cNvPr id="37" name="Text 35"/>
+          <p:cNvSpPr/>
+          <p:nvPr/>
+        </p:nvSpPr>
+        <p:spPr>
+          <a:xfrm>
+            <a:off x="694944" y="3200400"/>
+            <a:ext cx="3108960" cy="457200"/>
           </a:xfrm>
           <a:prstGeom prst="rect">
             <a:avLst/>
@@ -6899,11 +7652,11 @@
           <a:bodyPr wrap="square" lIns="0" tIns="0" rIns="0" bIns="0" rtlCol="0" anchor="ctr"/>
           <a:lstStyle/>
           <a:p>
-            <a:pPr algn="ctr" indent="0" marL="0">
-              <a:buNone/>
-            </a:pPr>
-            <a:r>
-              <a:rPr lang="en-US" sz="1100" b="1" dirty="0">
+            <a:pPr marL="0" indent="0" algn="ctr">
+              <a:buNone/>
+            </a:pPr>
+            <a:r>
+              <a:rPr lang="en-US" sz="1400" b="1" dirty="0">
                 <a:solidFill>
                   <a:srgbClr val="FFFFFF"/>
                 </a:solidFill>
@@ -6911,9 +7664,164 @@
                 <a:ea typeface="Consolas" pitchFamily="34" charset="-122"/>
                 <a:cs typeface="Consolas" pitchFamily="34" charset="-120"/>
               </a:rPr>
-              <a:t>Trust ↔ Distrust</a:t>
-            </a:r>
-            <a:endParaRPr lang="en-US" sz="1100" dirty="0"/>
+              <a:t>Structural Balance</a:t>
+            </a:r>
+            <a:endParaRPr lang="en-US" sz="1400" dirty="0"/>
+          </a:p>
+        </p:txBody>
+      </p:sp>
+      <p:sp>
+        <p:nvSpPr>
+          <p:cNvPr id="38" name="Text 36"/>
+          <p:cNvSpPr/>
+          <p:nvPr/>
+        </p:nvSpPr>
+        <p:spPr>
+          <a:xfrm>
+            <a:off x="694944" y="3703320"/>
+            <a:ext cx="3108960" cy="594360"/>
+          </a:xfrm>
+          <a:prstGeom prst="rect">
+            <a:avLst/>
+          </a:prstGeom>
+          <a:noFill/>
+          <a:ln/>
+        </p:spPr>
+        <p:txBody>
+          <a:bodyPr wrap="square" lIns="0" tIns="0" rIns="0" bIns="0" rtlCol="0" anchor="t"/>
+          <a:lstStyle/>
+          <a:p>
+            <a:pPr marL="0" indent="0" algn="r" rtl="1">
+              <a:buNone/>
+            </a:pPr>
+            <a:r>
+              <a:rPr lang="en-US" sz="1200" dirty="0">
+                <a:solidFill>
+                  <a:srgbClr val="CBD5E1"/>
+                </a:solidFill>
+                <a:latin typeface="Arial" pitchFamily="34" charset="0"/>
+                <a:ea typeface="Arial" pitchFamily="34" charset="-122"/>
+                <a:cs typeface="Arial" pitchFamily="34" charset="-120"/>
+              </a:rPr>
+              <a:t>בהתבסס על משולשים ברשת</a:t>
+            </a:r>
+            <a:endParaRPr lang="en-US" sz="1200" dirty="0"/>
+          </a:p>
+        </p:txBody>
+      </p:sp>
+      <p:sp>
+        <p:nvSpPr>
+          <p:cNvPr id="39" name="Shape 37"/>
+          <p:cNvSpPr/>
+          <p:nvPr/>
+        </p:nvSpPr>
+        <p:spPr>
+          <a:xfrm>
+            <a:off x="694944" y="4434840"/>
+            <a:ext cx="3108960" cy="457200"/>
+          </a:xfrm>
+          <a:prstGeom prst="roundRect">
+            <a:avLst>
+              <a:gd name="adj" fmla="val 12000"/>
+            </a:avLst>
+          </a:prstGeom>
+          <a:solidFill>
+            <a:srgbClr val="EC4899">
+              <a:alpha val="20000"/>
+            </a:srgbClr>
+          </a:solidFill>
+          <a:ln w="12700">
+            <a:solidFill>
+              <a:srgbClr val="EC4899">
+                <a:alpha val="50000"/>
+              </a:srgbClr>
+            </a:solidFill>
+            <a:prstDash val="solid"/>
+          </a:ln>
+        </p:spPr>
+        <p:txBody>
+          <a:bodyPr/>
+          <a:lstStyle/>
+          <a:p>
+            <a:endParaRPr lang="en-IL"/>
+          </a:p>
+        </p:txBody>
+      </p:sp>
+      <p:sp>
+        <p:nvSpPr>
+          <p:cNvPr id="40" name="Text 38"/>
+          <p:cNvSpPr/>
+          <p:nvPr/>
+        </p:nvSpPr>
+        <p:spPr>
+          <a:xfrm>
+            <a:off x="694944" y="4434840"/>
+            <a:ext cx="3108960" cy="457200"/>
+          </a:xfrm>
+          <a:prstGeom prst="rect">
+            <a:avLst/>
+          </a:prstGeom>
+          <a:noFill/>
+          <a:ln/>
+        </p:spPr>
+        <p:txBody>
+          <a:bodyPr wrap="square" lIns="0" tIns="0" rIns="0" bIns="0" rtlCol="0" anchor="ctr"/>
+          <a:lstStyle/>
+          <a:p>
+            <a:pPr marL="0" indent="0" algn="ctr">
+              <a:buNone/>
+            </a:pPr>
+            <a:r>
+              <a:rPr lang="en-US" sz="1400" b="1" dirty="0">
+                <a:solidFill>
+                  <a:srgbClr val="FFFFFF"/>
+                </a:solidFill>
+                <a:latin typeface="Consolas" pitchFamily="34" charset="0"/>
+                <a:ea typeface="Consolas" pitchFamily="34" charset="-122"/>
+                <a:cs typeface="Consolas" pitchFamily="34" charset="-120"/>
+              </a:rPr>
+              <a:t>Time Split</a:t>
+            </a:r>
+            <a:endParaRPr lang="en-US" sz="1400" dirty="0"/>
+          </a:p>
+        </p:txBody>
+      </p:sp>
+      <p:sp>
+        <p:nvSpPr>
+          <p:cNvPr id="41" name="Text 39"/>
+          <p:cNvSpPr/>
+          <p:nvPr/>
+        </p:nvSpPr>
+        <p:spPr>
+          <a:xfrm>
+            <a:off x="694944" y="4937760"/>
+            <a:ext cx="3108960" cy="594360"/>
+          </a:xfrm>
+          <a:prstGeom prst="rect">
+            <a:avLst/>
+          </a:prstGeom>
+          <a:noFill/>
+          <a:ln/>
+        </p:spPr>
+        <p:txBody>
+          <a:bodyPr wrap="square" lIns="0" tIns="0" rIns="0" bIns="0" rtlCol="0" anchor="t"/>
+          <a:lstStyle/>
+          <a:p>
+            <a:pPr marL="0" indent="0" algn="r" rtl="1">
+              <a:buNone/>
+            </a:pPr>
+            <a:r>
+              <a:rPr lang="en-US" sz="1200" dirty="0">
+                <a:solidFill>
+                  <a:srgbClr val="CBD5E1"/>
+                </a:solidFill>
+                <a:latin typeface="Arial" pitchFamily="34" charset="0"/>
+                <a:ea typeface="Arial" pitchFamily="34" charset="-122"/>
+                <a:cs typeface="Arial" pitchFamily="34" charset="-120"/>
+              </a:rPr>
+              <a:t>אימון על העבר, חיזוי על העתיד</a:t>
+            </a:r>
+            <a:endParaRPr lang="en-US" sz="1200" dirty="0"/>
           </a:p>
         </p:txBody>
       </p:sp>
@@ -6922,13 +7830,13 @@
   <p:clrMapOvr>
     <a:masterClrMapping/>
   </p:clrMapOvr>
-  <mc:AlternateContent xmlns:mc="http://schemas.openxmlformats.org/markup-compatibility/2006">
-    <mc:Choice xmlns:p159="http://schemas.microsoft.com/office/powerpoint/2015/09/main" Requires="p159">
-      <p:transition spd="med" p159:dur="1500">
+  <mc:AlternateContent xmlns:mc="http://schemas.openxmlformats.org/markup-compatibility/2006" xmlns:p159="http://schemas.microsoft.com/office/powerpoint/2015/09/main">
+    <mc:Choice Requires="p159">
+      <p:transition spd="med">
         <p159:morph option="byObject"/>
       </p:transition>
     </mc:Choice>
-    <mc:Fallback>
+    <mc:Fallback xmlns="">
       <p:transition spd="med">
         <p:fade/>
       </p:transition>
@@ -6938,12 +7846,12 @@
 </file>
 
 <file path=ppt/slides/slide6.xml><?xml version="1.0" encoding="utf-8"?>
-<p:sld xmlns:mc="http://schemas.openxmlformats.org/markup-compatibility/2006" xmlns:a="http://schemas.openxmlformats.org/drawingml/2006/main" xmlns:r="http://schemas.openxmlformats.org/officeDocument/2006/relationships" xmlns:p="http://schemas.openxmlformats.org/presentationml/2006/main">
-  <p:cSld name="Slide 6">
+<p:sld xmlns:a="http://schemas.openxmlformats.org/drawingml/2006/main" xmlns:r="http://schemas.openxmlformats.org/officeDocument/2006/relationships" xmlns:p="http://schemas.openxmlformats.org/presentationml/2006/main">
+  <p:cSld name="Slide 8">
     <p:bg>
       <p:bgPr>
         <a:blipFill dpi="0" rotWithShape="1">
-          <a:blip r:embed="rId1">
+          <a:blip r:embed="rId3">
             <a:lum/>
           </a:blip>
           <a:srcRect/>
@@ -6976,26 +7884,33 @@
         </p:nvSpPr>
         <p:spPr>
           <a:xfrm>
-            <a:off x="9601200" y="1828800"/>
-            <a:ext cx="5029200" cy="5029200"/>
+            <a:off x="1371600" y="-914400"/>
+            <a:ext cx="5486400" cy="5486400"/>
           </a:xfrm>
           <a:prstGeom prst="ellipse">
             <a:avLst/>
           </a:prstGeom>
           <a:solidFill>
             <a:srgbClr val="A855F7">
-              <a:alpha val="24000"/>
+              <a:alpha val="22000"/>
             </a:srgbClr>
           </a:solidFill>
           <a:ln/>
           <a:effectLst>
-            <a:outerShdw sx="100000" sy="100000" kx="0" ky="0" algn="bl" rotWithShape="0" blurRad="1270000" dist="50800" dir="16200000">
+            <a:outerShdw blurRad="1270000" dist="50800" dir="16200000" algn="bl" rotWithShape="0">
               <a:srgbClr val="A855F7">
                 <a:alpha val="65000"/>
               </a:srgbClr>
             </a:outerShdw>
           </a:effectLst>
         </p:spPr>
+        <p:txBody>
+          <a:bodyPr/>
+          <a:lstStyle/>
+          <a:p>
+            <a:endParaRPr lang="en-IL"/>
+          </a:p>
+        </p:txBody>
       </p:sp>
       <p:sp>
         <p:nvSpPr>
@@ -7005,26 +7920,33 @@
         </p:nvSpPr>
         <p:spPr>
           <a:xfrm>
-            <a:off x="-1828800" y="2743200"/>
-            <a:ext cx="4114800" cy="4114800"/>
+            <a:off x="6858000" y="4114800"/>
+            <a:ext cx="5029200" cy="5029200"/>
           </a:xfrm>
           <a:prstGeom prst="ellipse">
             <a:avLst/>
           </a:prstGeom>
           <a:solidFill>
-            <a:srgbClr val="22D3EE">
-              <a:alpha val="16000"/>
+            <a:srgbClr val="EC4899">
+              <a:alpha val="18000"/>
             </a:srgbClr>
           </a:solidFill>
           <a:ln/>
           <a:effectLst>
-            <a:outerShdw sx="100000" sy="100000" kx="0" ky="0" algn="bl" rotWithShape="0" blurRad="1270000" dist="50800" dir="16200000">
-              <a:srgbClr val="22D3EE">
+            <a:outerShdw blurRad="1270000" dist="50800" dir="16200000" algn="bl" rotWithShape="0">
+              <a:srgbClr val="EC4899">
                 <a:alpha val="55000"/>
               </a:srgbClr>
             </a:outerShdw>
           </a:effectLst>
         </p:spPr>
+        <p:txBody>
+          <a:bodyPr/>
+          <a:lstStyle/>
+          <a:p>
+            <a:endParaRPr lang="en-IL"/>
+          </a:p>
+        </p:txBody>
       </p:sp>
       <p:sp>
         <p:nvSpPr>
@@ -7047,11 +7969,11 @@
           <a:bodyPr wrap="square" lIns="0" tIns="0" rIns="0" bIns="0" rtlCol="0" anchor="ctr"/>
           <a:lstStyle/>
           <a:p>
-            <a:pPr rtl="1" algn="r" indent="0" marL="0">
-              <a:buNone/>
-            </a:pPr>
-            <a:r>
-              <a:rPr lang="en-US" sz="900" b="1" spc="500" kern="0" dirty="0">
+            <a:pPr marL="0" indent="0" algn="r" rtl="1">
+              <a:buNone/>
+            </a:pPr>
+            <a:r>
+              <a:rPr lang="en-US" sz="900" b="1" kern="0" spc="500" dirty="0">
                 <a:solidFill>
                   <a:srgbClr val="C084FC"/>
                 </a:solidFill>
@@ -7059,7 +7981,29 @@
                 <a:ea typeface="Arial" pitchFamily="34" charset="-122"/>
                 <a:cs typeface="Arial" pitchFamily="34" charset="-120"/>
               </a:rPr>
-              <a:t>BITCOIN OTC  ·  ניתוח רשתות אמון</a:t>
+              <a:t>BITCOIN OTC  ·  </a:t>
+            </a:r>
+            <a:r>
+              <a:rPr lang="he-IL" sz="900" b="1" kern="0" spc="500" dirty="0">
+                <a:solidFill>
+                  <a:srgbClr val="C084FC"/>
+                </a:solidFill>
+                <a:latin typeface="Arial" pitchFamily="34" charset="0"/>
+                <a:ea typeface="Arial" pitchFamily="34" charset="-122"/>
+                <a:cs typeface="Arial" pitchFamily="34" charset="-120"/>
+              </a:rPr>
+              <a:t> </a:t>
+            </a:r>
+            <a:r>
+              <a:rPr lang="en-US" sz="900" b="1" kern="0" spc="500" dirty="0">
+                <a:solidFill>
+                  <a:srgbClr val="C084FC"/>
+                </a:solidFill>
+                <a:latin typeface="Arial" pitchFamily="34" charset="0"/>
+                <a:ea typeface="Arial" pitchFamily="34" charset="-122"/>
+                <a:cs typeface="Arial" pitchFamily="34" charset="-120"/>
+              </a:rPr>
+              <a:t>ניתוח רשתות אמון</a:t>
             </a:r>
             <a:endParaRPr lang="en-US" sz="900" dirty="0"/>
           </a:p>
@@ -7086,7 +8030,7 @@
           <a:bodyPr wrap="square" lIns="0" tIns="0" rIns="0" bIns="0" rtlCol="0" anchor="t"/>
           <a:lstStyle/>
           <a:p>
-            <a:pPr rtl="1" algn="r" indent="0" marL="0">
+            <a:pPr marL="0" indent="0" algn="r" rtl="1">
               <a:buNone/>
             </a:pPr>
             <a:r>
@@ -7098,7 +8042,7 @@
                 <a:ea typeface="Arial" pitchFamily="34" charset="-122"/>
                 <a:cs typeface="Arial" pitchFamily="34" charset="-120"/>
               </a:rPr>
-              <a:t>אלגוריתמים ושיטות</a:t>
+              <a:t>גישת הפתרון ואופן ההערכה</a:t>
             </a:r>
             <a:endParaRPr lang="en-US" sz="3800" dirty="0"/>
           </a:p>
@@ -7123,6 +8067,13 @@
           </a:solidFill>
           <a:ln/>
         </p:spPr>
+        <p:txBody>
+          <a:bodyPr/>
+          <a:lstStyle/>
+          <a:p>
+            <a:endParaRPr lang="en-IL"/>
+          </a:p>
+        </p:txBody>
       </p:sp>
       <p:sp>
         <p:nvSpPr>
@@ -7145,11 +8096,11 @@
           <a:bodyPr wrap="square" lIns="0" tIns="0" rIns="0" bIns="0" rtlCol="0" anchor="ctr"/>
           <a:lstStyle/>
           <a:p>
-            <a:pPr algn="l" indent="0" marL="0">
-              <a:buNone/>
-            </a:pPr>
-            <a:r>
-              <a:rPr lang="en-US" sz="900" spc="200" kern="0" dirty="0">
+            <a:pPr marL="0" indent="0" algn="l">
+              <a:buNone/>
+            </a:pPr>
+            <a:r>
+              <a:rPr lang="en-US" sz="900" kern="0" spc="200" dirty="0">
                 <a:solidFill>
                   <a:srgbClr val="94A3B8"/>
                 </a:solidFill>
@@ -7184,11 +8135,11 @@
           <a:bodyPr wrap="square" lIns="0" tIns="0" rIns="0" bIns="0" rtlCol="0" anchor="ctr"/>
           <a:lstStyle/>
           <a:p>
-            <a:pPr algn="r" indent="0" marL="0">
-              <a:buNone/>
-            </a:pPr>
-            <a:r>
-              <a:rPr lang="en-US" sz="900" spc="200" kern="0" dirty="0">
+            <a:pPr marL="0" indent="0" algn="r">
+              <a:buNone/>
+            </a:pPr>
+            <a:r>
+              <a:rPr lang="en-US" sz="900" kern="0" spc="200" dirty="0">
                 <a:solidFill>
                   <a:srgbClr val="94A3B8"/>
                 </a:solidFill>
@@ -7210,12 +8161,12 @@
         </p:nvSpPr>
         <p:spPr>
           <a:xfrm>
-            <a:off x="7955280" y="1691640"/>
-            <a:ext cx="3657600" cy="4297680"/>
+            <a:off x="6263640" y="1691640"/>
+            <a:ext cx="5349240" cy="3291840"/>
           </a:xfrm>
           <a:prstGeom prst="roundRect">
             <a:avLst>
-              <a:gd name="adj" fmla="val 4500"/>
+              <a:gd name="adj" fmla="val 5000"/>
             </a:avLst>
           </a:prstGeom>
           <a:solidFill>
@@ -7232,13 +8183,20 @@
             <a:prstDash val="solid"/>
           </a:ln>
           <a:effectLst>
-            <a:outerShdw sx="100000" sy="100000" kx="0" ky="0" algn="bl" rotWithShape="0" blurRad="279400" dist="76200" dir="5400000">
+            <a:outerShdw blurRad="279400" dist="76200" dir="5400000" algn="bl" rotWithShape="0">
               <a:srgbClr val="000000">
                 <a:alpha val="40000"/>
               </a:srgbClr>
             </a:outerShdw>
           </a:effectLst>
         </p:spPr>
+        <p:txBody>
+          <a:bodyPr/>
+          <a:lstStyle/>
+          <a:p>
+            <a:endParaRPr lang="en-IL"/>
+          </a:p>
+        </p:txBody>
       </p:sp>
       <p:sp>
         <p:nvSpPr>
@@ -7248,8 +8206,8 @@
         </p:nvSpPr>
         <p:spPr>
           <a:xfrm>
-            <a:off x="8046720" y="1728216"/>
-            <a:ext cx="3474720" cy="18288"/>
+            <a:off x="6355080" y="1728216"/>
+            <a:ext cx="5166360" cy="18288"/>
           </a:xfrm>
           <a:prstGeom prst="rect">
             <a:avLst/>
@@ -7261,6 +8219,13 @@
           </a:solidFill>
           <a:ln/>
         </p:spPr>
+        <p:txBody>
+          <a:bodyPr/>
+          <a:lstStyle/>
+          <a:p>
+            <a:endParaRPr lang="en-IL"/>
+          </a:p>
+        </p:txBody>
       </p:sp>
       <p:sp>
         <p:nvSpPr>
@@ -7270,17 +8235,24 @@
         </p:nvSpPr>
         <p:spPr>
           <a:xfrm>
-            <a:off x="8119872" y="1856232"/>
-            <a:ext cx="3328416" cy="54864"/>
-          </a:xfrm>
-          <a:prstGeom prst="rect">
-            <a:avLst/>
-          </a:prstGeom>
-          <a:solidFill>
-            <a:srgbClr val="22D3EE"/>
-          </a:solidFill>
-          <a:ln/>
-        </p:spPr>
+            <a:off x="11475720" y="1783080"/>
+            <a:ext cx="64008" cy="3108960"/>
+          </a:xfrm>
+          <a:prstGeom prst="rect">
+            <a:avLst/>
+          </a:prstGeom>
+          <a:solidFill>
+            <a:srgbClr val="EC4899"/>
+          </a:solidFill>
+          <a:ln/>
+        </p:spPr>
+        <p:txBody>
+          <a:bodyPr/>
+          <a:lstStyle/>
+          <a:p>
+            <a:endParaRPr lang="en-IL"/>
+          </a:p>
+        </p:txBody>
       </p:sp>
       <p:sp>
         <p:nvSpPr>
@@ -7290,8 +8262,8 @@
         </p:nvSpPr>
         <p:spPr>
           <a:xfrm>
-            <a:off x="8229600" y="2020824"/>
-            <a:ext cx="3108960" cy="274320"/>
+            <a:off x="6446520" y="1828800"/>
+            <a:ext cx="4937760" cy="365760"/>
           </a:xfrm>
           <a:prstGeom prst="rect">
             <a:avLst/>
@@ -7303,21 +8275,21 @@
           <a:bodyPr wrap="square" lIns="0" tIns="0" rIns="0" bIns="0" rtlCol="0" anchor="ctr"/>
           <a:lstStyle/>
           <a:p>
-            <a:pPr algn="r" indent="0" marL="0">
-              <a:buNone/>
-            </a:pPr>
-            <a:r>
-              <a:rPr lang="en-US" sz="1000" b="1" spc="300" kern="0" dirty="0">
-                <a:solidFill>
-                  <a:srgbClr val="22D3EE"/>
-                </a:solidFill>
-                <a:latin typeface="Arial" pitchFamily="34" charset="0"/>
-                <a:ea typeface="Arial" pitchFamily="34" charset="-122"/>
-                <a:cs typeface="Arial" pitchFamily="34" charset="-120"/>
-              </a:rPr>
-              <a:t>01  ·  CENTRALITY</a:t>
-            </a:r>
-            <a:endParaRPr lang="en-US" sz="1000" dirty="0"/>
+            <a:pPr marL="0" indent="0" algn="r" rtl="1">
+              <a:buNone/>
+            </a:pPr>
+            <a:r>
+              <a:rPr lang="en-US" sz="1100" b="1" kern="0" spc="300" dirty="0">
+                <a:solidFill>
+                  <a:srgbClr val="EC4899"/>
+                </a:solidFill>
+                <a:latin typeface="Arial" pitchFamily="34" charset="0"/>
+                <a:ea typeface="Arial" pitchFamily="34" charset="-122"/>
+                <a:cs typeface="Arial" pitchFamily="34" charset="-120"/>
+              </a:rPr>
+              <a:t>מדידת הצלחה · לא Accuracy</a:t>
+            </a:r>
+            <a:endParaRPr lang="en-US" sz="1100" dirty="0"/>
           </a:p>
         </p:txBody>
       </p:sp>
@@ -7329,8 +8301,8 @@
         </p:nvSpPr>
         <p:spPr>
           <a:xfrm>
-            <a:off x="8229600" y="2331720"/>
-            <a:ext cx="3108960" cy="594360"/>
+            <a:off x="6446520" y="2194560"/>
+            <a:ext cx="4937760" cy="640080"/>
           </a:xfrm>
           <a:prstGeom prst="rect">
             <a:avLst/>
@@ -7342,7 +8314,7 @@
           <a:bodyPr wrap="square" lIns="0" tIns="0" rIns="0" bIns="0" rtlCol="0" anchor="ctr"/>
           <a:lstStyle/>
           <a:p>
-            <a:pPr rtl="1" algn="r" indent="0" marL="0">
+            <a:pPr marL="0" indent="0" algn="r" rtl="1">
               <a:buNone/>
             </a:pPr>
             <a:r>
@@ -7354,7 +8326,29 @@
                 <a:ea typeface="Arial" pitchFamily="34" charset="-122"/>
                 <a:cs typeface="Arial" pitchFamily="34" charset="-120"/>
               </a:rPr>
-              <a:t>מדדי מרכזיות</a:t>
+              <a:t>Accuracy </a:t>
+            </a:r>
+            <a:r>
+              <a:rPr lang="he-IL" sz="2600" b="1" dirty="0">
+                <a:solidFill>
+                  <a:srgbClr val="F8FAFC"/>
+                </a:solidFill>
+                <a:latin typeface="Arial" pitchFamily="34" charset="0"/>
+                <a:ea typeface="Arial" pitchFamily="34" charset="-122"/>
+                <a:cs typeface="Arial" pitchFamily="34" charset="-120"/>
+              </a:rPr>
+              <a:t> </a:t>
+            </a:r>
+            <a:r>
+              <a:rPr lang="en-US" sz="2600" b="1" dirty="0" err="1">
+                <a:solidFill>
+                  <a:srgbClr val="F8FAFC"/>
+                </a:solidFill>
+                <a:latin typeface="Arial" pitchFamily="34" charset="0"/>
+                <a:ea typeface="Arial" pitchFamily="34" charset="-122"/>
+                <a:cs typeface="Arial" pitchFamily="34" charset="-120"/>
+              </a:rPr>
+              <a:t>מטעה</a:t>
             </a:r>
             <a:endParaRPr lang="en-US" sz="2600" dirty="0"/>
           </a:p>
@@ -7362,236 +8356,57 @@
       </p:sp>
       <p:sp>
         <p:nvSpPr>
-          <p:cNvPr id="14" name="Shape 12"/>
-          <p:cNvSpPr/>
-          <p:nvPr/>
-        </p:nvSpPr>
-        <p:spPr>
-          <a:xfrm>
-            <a:off x="8229600" y="3200400"/>
-            <a:ext cx="3108960" cy="457200"/>
+          <p:cNvPr id="14" name="Text 12"/>
+          <p:cNvSpPr/>
+          <p:nvPr/>
+        </p:nvSpPr>
+        <p:spPr>
+          <a:xfrm>
+            <a:off x="6446520" y="2926080"/>
+            <a:ext cx="4937760" cy="1783080"/>
+          </a:xfrm>
+          <a:prstGeom prst="rect">
+            <a:avLst/>
+          </a:prstGeom>
+          <a:noFill/>
+          <a:ln/>
+        </p:spPr>
+        <p:txBody>
+          <a:bodyPr wrap="square" lIns="0" tIns="0" rIns="0" bIns="0" rtlCol="0" anchor="t"/>
+          <a:lstStyle/>
+          <a:p>
+            <a:pPr marL="0" indent="0" algn="r" rtl="1">
+              <a:buNone/>
+            </a:pPr>
+            <a:r>
+              <a:rPr lang="en-US" sz="1400" dirty="0">
+                <a:solidFill>
+                  <a:srgbClr val="CBD5E1"/>
+                </a:solidFill>
+                <a:latin typeface="Arial" pitchFamily="34" charset="0"/>
+                <a:ea typeface="Arial" pitchFamily="34" charset="-122"/>
+                <a:cs typeface="Arial" pitchFamily="34" charset="-120"/>
+              </a:rPr>
+              <a:t>כ-90% מהדירוגים חיוביים, כך שמודל שמנחש "הכל אמין" מגיע ל-~0.87 Accuracy לבדו. לכן מודדים F1 ו-Recall לכל מחלקה, ולקהילות Sybil — יחס חוסר-האמון החיצוני (שכן אין Ground Truth מלא).</a:t>
+            </a:r>
+            <a:endParaRPr lang="en-US" sz="1400" dirty="0"/>
+          </a:p>
+        </p:txBody>
+      </p:sp>
+      <p:sp>
+        <p:nvSpPr>
+          <p:cNvPr id="15" name="Shape 13"/>
+          <p:cNvSpPr/>
+          <p:nvPr/>
+        </p:nvSpPr>
+        <p:spPr>
+          <a:xfrm>
+            <a:off x="548640" y="1691640"/>
+            <a:ext cx="5486400" cy="3291840"/>
           </a:xfrm>
           <a:prstGeom prst="roundRect">
             <a:avLst>
-              <a:gd name="adj" fmla="val 12000"/>
-            </a:avLst>
-          </a:prstGeom>
-          <a:solidFill>
-            <a:srgbClr val="22D3EE">
-              <a:alpha val="20000"/>
-            </a:srgbClr>
-          </a:solidFill>
-          <a:ln w="12700">
-            <a:solidFill>
-              <a:srgbClr val="22D3EE">
-                <a:alpha val="50000"/>
-              </a:srgbClr>
-            </a:solidFill>
-            <a:prstDash val="solid"/>
-          </a:ln>
-        </p:spPr>
-      </p:sp>
-      <p:sp>
-        <p:nvSpPr>
-          <p:cNvPr id="15" name="Text 13"/>
-          <p:cNvSpPr/>
-          <p:nvPr/>
-        </p:nvSpPr>
-        <p:spPr>
-          <a:xfrm>
-            <a:off x="8229600" y="3200400"/>
-            <a:ext cx="3108960" cy="457200"/>
-          </a:xfrm>
-          <a:prstGeom prst="rect">
-            <a:avLst/>
-          </a:prstGeom>
-          <a:noFill/>
-          <a:ln/>
-        </p:spPr>
-        <p:txBody>
-          <a:bodyPr wrap="square" lIns="0" tIns="0" rIns="0" bIns="0" rtlCol="0" anchor="ctr"/>
-          <a:lstStyle/>
-          <a:p>
-            <a:pPr algn="ctr" indent="0" marL="0">
-              <a:buNone/>
-            </a:pPr>
-            <a:r>
-              <a:rPr lang="en-US" sz="1400" b="1" dirty="0">
-                <a:solidFill>
-                  <a:srgbClr val="FFFFFF"/>
-                </a:solidFill>
-                <a:latin typeface="Consolas" pitchFamily="34" charset="0"/>
-                <a:ea typeface="Consolas" pitchFamily="34" charset="-122"/>
-                <a:cs typeface="Consolas" pitchFamily="34" charset="-120"/>
-              </a:rPr>
-              <a:t>PageRank</a:t>
-            </a:r>
-            <a:endParaRPr lang="en-US" sz="1400" dirty="0"/>
-          </a:p>
-        </p:txBody>
-      </p:sp>
-      <p:sp>
-        <p:nvSpPr>
-          <p:cNvPr id="16" name="Text 14"/>
-          <p:cNvSpPr/>
-          <p:nvPr/>
-        </p:nvSpPr>
-        <p:spPr>
-          <a:xfrm>
-            <a:off x="8229600" y="3703320"/>
-            <a:ext cx="3108960" cy="594360"/>
-          </a:xfrm>
-          <a:prstGeom prst="rect">
-            <a:avLst/>
-          </a:prstGeom>
-          <a:noFill/>
-          <a:ln/>
-        </p:spPr>
-        <p:txBody>
-          <a:bodyPr wrap="square" lIns="0" tIns="0" rIns="0" bIns="0" rtlCol="0" anchor="t"/>
-          <a:lstStyle/>
-          <a:p>
-            <a:pPr rtl="1" algn="r" indent="0" marL="0">
-              <a:buNone/>
-            </a:pPr>
-            <a:r>
-              <a:rPr lang="en-US" sz="1200" dirty="0">
-                <a:solidFill>
-                  <a:srgbClr val="CBD5E1"/>
-                </a:solidFill>
-                <a:latin typeface="Arial" pitchFamily="34" charset="0"/>
-                <a:ea typeface="Arial" pitchFamily="34" charset="-122"/>
-                <a:cs typeface="Arial" pitchFamily="34" charset="-120"/>
-              </a:rPr>
-              <a:t>על רשת האמון — לזיהוי הגרעין האמין</a:t>
-            </a:r>
-            <a:endParaRPr lang="en-US" sz="1200" dirty="0"/>
-          </a:p>
-        </p:txBody>
-      </p:sp>
-      <p:sp>
-        <p:nvSpPr>
-          <p:cNvPr id="17" name="Shape 15"/>
-          <p:cNvSpPr/>
-          <p:nvPr/>
-        </p:nvSpPr>
-        <p:spPr>
-          <a:xfrm>
-            <a:off x="8229600" y="4434840"/>
-            <a:ext cx="3108960" cy="457200"/>
-          </a:xfrm>
-          <a:prstGeom prst="roundRect">
-            <a:avLst>
-              <a:gd name="adj" fmla="val 12000"/>
-            </a:avLst>
-          </a:prstGeom>
-          <a:solidFill>
-            <a:srgbClr val="22D3EE">
-              <a:alpha val="20000"/>
-            </a:srgbClr>
-          </a:solidFill>
-          <a:ln w="12700">
-            <a:solidFill>
-              <a:srgbClr val="22D3EE">
-                <a:alpha val="50000"/>
-              </a:srgbClr>
-            </a:solidFill>
-            <a:prstDash val="solid"/>
-          </a:ln>
-        </p:spPr>
-      </p:sp>
-      <p:sp>
-        <p:nvSpPr>
-          <p:cNvPr id="18" name="Text 16"/>
-          <p:cNvSpPr/>
-          <p:nvPr/>
-        </p:nvSpPr>
-        <p:spPr>
-          <a:xfrm>
-            <a:off x="8229600" y="4434840"/>
-            <a:ext cx="3108960" cy="457200"/>
-          </a:xfrm>
-          <a:prstGeom prst="rect">
-            <a:avLst/>
-          </a:prstGeom>
-          <a:noFill/>
-          <a:ln/>
-        </p:spPr>
-        <p:txBody>
-          <a:bodyPr wrap="square" lIns="0" tIns="0" rIns="0" bIns="0" rtlCol="0" anchor="ctr"/>
-          <a:lstStyle/>
-          <a:p>
-            <a:pPr algn="ctr" indent="0" marL="0">
-              <a:buNone/>
-            </a:pPr>
-            <a:r>
-              <a:rPr lang="en-US" sz="1400" b="1" dirty="0">
-                <a:solidFill>
-                  <a:srgbClr val="FFFFFF"/>
-                </a:solidFill>
-                <a:latin typeface="Consolas" pitchFamily="34" charset="0"/>
-                <a:ea typeface="Consolas" pitchFamily="34" charset="-122"/>
-                <a:cs typeface="Consolas" pitchFamily="34" charset="-120"/>
-              </a:rPr>
-              <a:t>In-Degree</a:t>
-            </a:r>
-            <a:endParaRPr lang="en-US" sz="1400" dirty="0"/>
-          </a:p>
-        </p:txBody>
-      </p:sp>
-      <p:sp>
-        <p:nvSpPr>
-          <p:cNvPr id="19" name="Text 17"/>
-          <p:cNvSpPr/>
-          <p:nvPr/>
-        </p:nvSpPr>
-        <p:spPr>
-          <a:xfrm>
-            <a:off x="8229600" y="4937760"/>
-            <a:ext cx="3108960" cy="594360"/>
-          </a:xfrm>
-          <a:prstGeom prst="rect">
-            <a:avLst/>
-          </a:prstGeom>
-          <a:noFill/>
-          <a:ln/>
-        </p:spPr>
-        <p:txBody>
-          <a:bodyPr wrap="square" lIns="0" tIns="0" rIns="0" bIns="0" rtlCol="0" anchor="t"/>
-          <a:lstStyle/>
-          <a:p>
-            <a:pPr rtl="1" algn="r" indent="0" marL="0">
-              <a:buNone/>
-            </a:pPr>
-            <a:r>
-              <a:rPr lang="en-US" sz="1200" dirty="0">
-                <a:solidFill>
-                  <a:srgbClr val="CBD5E1"/>
-                </a:solidFill>
-                <a:latin typeface="Arial" pitchFamily="34" charset="0"/>
-                <a:ea typeface="Arial" pitchFamily="34" charset="-122"/>
-                <a:cs typeface="Arial" pitchFamily="34" charset="-120"/>
-              </a:rPr>
-              <a:t>על רשת חוסר האמון — לאיתור נוכלים</a:t>
-            </a:r>
-            <a:endParaRPr lang="en-US" sz="1200" dirty="0"/>
-          </a:p>
-        </p:txBody>
-      </p:sp>
-      <p:sp>
-        <p:nvSpPr>
-          <p:cNvPr id="20" name="Shape 18"/>
-          <p:cNvSpPr/>
-          <p:nvPr/>
-        </p:nvSpPr>
-        <p:spPr>
-          <a:xfrm>
-            <a:off x="4187952" y="1691640"/>
-            <a:ext cx="3657600" cy="4297680"/>
-          </a:xfrm>
-          <a:prstGeom prst="roundRect">
-            <a:avLst>
-              <a:gd name="adj" fmla="val 4500"/>
+              <a:gd name="adj" fmla="val 5000"/>
             </a:avLst>
           </a:prstGeom>
           <a:solidFill>
@@ -7608,24 +8423,31 @@
             <a:prstDash val="solid"/>
           </a:ln>
           <a:effectLst>
-            <a:outerShdw sx="100000" sy="100000" kx="0" ky="0" algn="bl" rotWithShape="0" blurRad="279400" dist="76200" dir="5400000">
+            <a:outerShdw blurRad="279400" dist="76200" dir="5400000" algn="bl" rotWithShape="0">
               <a:srgbClr val="000000">
                 <a:alpha val="40000"/>
               </a:srgbClr>
             </a:outerShdw>
           </a:effectLst>
         </p:spPr>
-      </p:sp>
-      <p:sp>
-        <p:nvSpPr>
-          <p:cNvPr id="21" name="Shape 19"/>
-          <p:cNvSpPr/>
-          <p:nvPr/>
-        </p:nvSpPr>
-        <p:spPr>
-          <a:xfrm>
-            <a:off x="4279392" y="1728216"/>
-            <a:ext cx="3474720" cy="18288"/>
+        <p:txBody>
+          <a:bodyPr/>
+          <a:lstStyle/>
+          <a:p>
+            <a:endParaRPr lang="en-IL"/>
+          </a:p>
+        </p:txBody>
+      </p:sp>
+      <p:sp>
+        <p:nvSpPr>
+          <p:cNvPr id="16" name="Shape 14"/>
+          <p:cNvSpPr/>
+          <p:nvPr/>
+        </p:nvSpPr>
+        <p:spPr>
+          <a:xfrm>
+            <a:off x="640080" y="1728216"/>
+            <a:ext cx="5303520" cy="18288"/>
           </a:xfrm>
           <a:prstGeom prst="rect">
             <a:avLst/>
@@ -7637,37 +8459,51 @@
           </a:solidFill>
           <a:ln/>
         </p:spPr>
-      </p:sp>
-      <p:sp>
-        <p:nvSpPr>
-          <p:cNvPr id="22" name="Shape 20"/>
-          <p:cNvSpPr/>
-          <p:nvPr/>
-        </p:nvSpPr>
-        <p:spPr>
-          <a:xfrm>
-            <a:off x="4352544" y="1856232"/>
-            <a:ext cx="3328416" cy="54864"/>
-          </a:xfrm>
-          <a:prstGeom prst="rect">
-            <a:avLst/>
-          </a:prstGeom>
-          <a:solidFill>
-            <a:srgbClr val="A855F7"/>
-          </a:solidFill>
-          <a:ln/>
-        </p:spPr>
-      </p:sp>
-      <p:sp>
-        <p:nvSpPr>
-          <p:cNvPr id="23" name="Text 21"/>
-          <p:cNvSpPr/>
-          <p:nvPr/>
-        </p:nvSpPr>
-        <p:spPr>
-          <a:xfrm>
-            <a:off x="4462272" y="2020824"/>
-            <a:ext cx="3108960" cy="274320"/>
+        <p:txBody>
+          <a:bodyPr/>
+          <a:lstStyle/>
+          <a:p>
+            <a:endParaRPr lang="en-IL"/>
+          </a:p>
+        </p:txBody>
+      </p:sp>
+      <p:sp>
+        <p:nvSpPr>
+          <p:cNvPr id="17" name="Shape 15"/>
+          <p:cNvSpPr/>
+          <p:nvPr/>
+        </p:nvSpPr>
+        <p:spPr>
+          <a:xfrm>
+            <a:off x="548640" y="1783080"/>
+            <a:ext cx="64008" cy="3108960"/>
+          </a:xfrm>
+          <a:prstGeom prst="rect">
+            <a:avLst/>
+          </a:prstGeom>
+          <a:solidFill>
+            <a:srgbClr val="22D3EE"/>
+          </a:solidFill>
+          <a:ln/>
+        </p:spPr>
+        <p:txBody>
+          <a:bodyPr/>
+          <a:lstStyle/>
+          <a:p>
+            <a:endParaRPr lang="en-IL"/>
+          </a:p>
+        </p:txBody>
+      </p:sp>
+      <p:sp>
+        <p:nvSpPr>
+          <p:cNvPr id="18" name="Text 16"/>
+          <p:cNvSpPr/>
+          <p:nvPr/>
+        </p:nvSpPr>
+        <p:spPr>
+          <a:xfrm>
+            <a:off x="731520" y="1828800"/>
+            <a:ext cx="5120640" cy="365760"/>
           </a:xfrm>
           <a:prstGeom prst="rect">
             <a:avLst/>
@@ -7679,34 +8515,34 @@
           <a:bodyPr wrap="square" lIns="0" tIns="0" rIns="0" bIns="0" rtlCol="0" anchor="ctr"/>
           <a:lstStyle/>
           <a:p>
-            <a:pPr algn="r" indent="0" marL="0">
-              <a:buNone/>
-            </a:pPr>
-            <a:r>
-              <a:rPr lang="en-US" sz="1000" b="1" spc="300" kern="0" dirty="0">
-                <a:solidFill>
-                  <a:srgbClr val="A855F7"/>
-                </a:solidFill>
-                <a:latin typeface="Arial" pitchFamily="34" charset="0"/>
-                <a:ea typeface="Arial" pitchFamily="34" charset="-122"/>
-                <a:cs typeface="Arial" pitchFamily="34" charset="-120"/>
-              </a:rPr>
-              <a:t>02  ·  COMMUNITY</a:t>
-            </a:r>
-            <a:endParaRPr lang="en-US" sz="1000" dirty="0"/>
-          </a:p>
-        </p:txBody>
-      </p:sp>
-      <p:sp>
-        <p:nvSpPr>
-          <p:cNvPr id="24" name="Text 22"/>
-          <p:cNvSpPr/>
-          <p:nvPr/>
-        </p:nvSpPr>
-        <p:spPr>
-          <a:xfrm>
-            <a:off x="4462272" y="2331720"/>
-            <a:ext cx="3108960" cy="594360"/>
+            <a:pPr marL="0" indent="0" algn="r" rtl="1">
+              <a:buNone/>
+            </a:pPr>
+            <a:r>
+              <a:rPr lang="en-US" sz="1100" b="1" kern="0" spc="300" dirty="0">
+                <a:solidFill>
+                  <a:srgbClr val="22D3EE"/>
+                </a:solidFill>
+                <a:latin typeface="Arial" pitchFamily="34" charset="0"/>
+                <a:ea typeface="Arial" pitchFamily="34" charset="-122"/>
+                <a:cs typeface="Arial" pitchFamily="34" charset="-120"/>
+              </a:rPr>
+              <a:t>הפתרון</a:t>
+            </a:r>
+            <a:endParaRPr lang="en-US" sz="1100" dirty="0"/>
+          </a:p>
+        </p:txBody>
+      </p:sp>
+      <p:sp>
+        <p:nvSpPr>
+          <p:cNvPr id="19" name="Text 17"/>
+          <p:cNvSpPr/>
+          <p:nvPr/>
+        </p:nvSpPr>
+        <p:spPr>
+          <a:xfrm>
+            <a:off x="731520" y="2194560"/>
+            <a:ext cx="5120640" cy="640080"/>
           </a:xfrm>
           <a:prstGeom prst="rect">
             <a:avLst/>
@@ -7718,9 +8554,31 @@
           <a:bodyPr wrap="square" lIns="0" tIns="0" rIns="0" bIns="0" rtlCol="0" anchor="ctr"/>
           <a:lstStyle/>
           <a:p>
-            <a:pPr rtl="1" algn="r" indent="0" marL="0">
-              <a:buNone/>
-            </a:pPr>
+            <a:pPr marL="0" indent="0" algn="r" rtl="1">
+              <a:buNone/>
+            </a:pPr>
+            <a:r>
+              <a:rPr lang="en-US" sz="2600" b="1" dirty="0" err="1">
+                <a:solidFill>
+                  <a:srgbClr val="F8FAFC"/>
+                </a:solidFill>
+                <a:latin typeface="Arial" pitchFamily="34" charset="0"/>
+                <a:ea typeface="Arial" pitchFamily="34" charset="-122"/>
+                <a:cs typeface="Arial" pitchFamily="34" charset="-120"/>
+              </a:rPr>
+              <a:t>הצלבה</a:t>
+            </a:r>
+            <a:r>
+              <a:rPr lang="he-IL" sz="2600" b="1" dirty="0">
+                <a:solidFill>
+                  <a:srgbClr val="F8FAFC"/>
+                </a:solidFill>
+                <a:latin typeface="Arial" pitchFamily="34" charset="0"/>
+                <a:ea typeface="Arial" pitchFamily="34" charset="-122"/>
+                <a:cs typeface="Arial" pitchFamily="34" charset="-120"/>
+              </a:rPr>
+              <a:t> </a:t>
+            </a:r>
             <a:r>
               <a:rPr lang="en-US" sz="2600" b="1" dirty="0">
                 <a:solidFill>
@@ -7730,7 +8588,7 @@
                 <a:ea typeface="Arial" pitchFamily="34" charset="-122"/>
                 <a:cs typeface="Arial" pitchFamily="34" charset="-120"/>
               </a:rPr>
-              <a:t>זיהוי קהילות</a:t>
+              <a:t> (Cross-Validation)</a:t>
             </a:r>
             <a:endParaRPr lang="en-US" sz="2600" dirty="0"/>
           </a:p>
@@ -7738,236 +8596,57 @@
       </p:sp>
       <p:sp>
         <p:nvSpPr>
-          <p:cNvPr id="25" name="Shape 23"/>
-          <p:cNvSpPr/>
-          <p:nvPr/>
-        </p:nvSpPr>
-        <p:spPr>
-          <a:xfrm>
-            <a:off x="4462272" y="3200400"/>
-            <a:ext cx="3108960" cy="457200"/>
+          <p:cNvPr id="20" name="Text 18"/>
+          <p:cNvSpPr/>
+          <p:nvPr/>
+        </p:nvSpPr>
+        <p:spPr>
+          <a:xfrm>
+            <a:off x="731520" y="2926080"/>
+            <a:ext cx="5120640" cy="1783080"/>
+          </a:xfrm>
+          <a:prstGeom prst="rect">
+            <a:avLst/>
+          </a:prstGeom>
+          <a:noFill/>
+          <a:ln/>
+        </p:spPr>
+        <p:txBody>
+          <a:bodyPr wrap="square" lIns="0" tIns="0" rIns="0" bIns="0" rtlCol="0" anchor="t"/>
+          <a:lstStyle/>
+          <a:p>
+            <a:pPr marL="0" indent="0" algn="r" rtl="1">
+              <a:buNone/>
+            </a:pPr>
+            <a:r>
+              <a:rPr lang="en-US" sz="1400" dirty="0">
+                <a:solidFill>
+                  <a:srgbClr val="CBD5E1"/>
+                </a:solidFill>
+                <a:latin typeface="Arial" pitchFamily="34" charset="0"/>
+                <a:ea typeface="Arial" pitchFamily="34" charset="-122"/>
+                <a:cs typeface="Arial" pitchFamily="34" charset="-120"/>
+              </a:rPr>
+              <a:t>בדיקה האם קהילות חשודות שזיהינו אכן קיבלו דירוגים שליליים מצמתים בעלי PageRank גבוה לאורך הזמן.</a:t>
+            </a:r>
+            <a:endParaRPr lang="en-US" sz="1400" dirty="0"/>
+          </a:p>
+        </p:txBody>
+      </p:sp>
+      <p:sp>
+        <p:nvSpPr>
+          <p:cNvPr id="21" name="Shape 19"/>
+          <p:cNvSpPr/>
+          <p:nvPr/>
+        </p:nvSpPr>
+        <p:spPr>
+          <a:xfrm>
+            <a:off x="548640" y="5166360"/>
+            <a:ext cx="11064240" cy="1143000"/>
           </a:xfrm>
           <a:prstGeom prst="roundRect">
             <a:avLst>
-              <a:gd name="adj" fmla="val 12000"/>
-            </a:avLst>
-          </a:prstGeom>
-          <a:solidFill>
-            <a:srgbClr val="A855F7">
-              <a:alpha val="20000"/>
-            </a:srgbClr>
-          </a:solidFill>
-          <a:ln w="12700">
-            <a:solidFill>
-              <a:srgbClr val="A855F7">
-                <a:alpha val="50000"/>
-              </a:srgbClr>
-            </a:solidFill>
-            <a:prstDash val="solid"/>
-          </a:ln>
-        </p:spPr>
-      </p:sp>
-      <p:sp>
-        <p:nvSpPr>
-          <p:cNvPr id="26" name="Text 24"/>
-          <p:cNvSpPr/>
-          <p:nvPr/>
-        </p:nvSpPr>
-        <p:spPr>
-          <a:xfrm>
-            <a:off x="4462272" y="3200400"/>
-            <a:ext cx="3108960" cy="457200"/>
-          </a:xfrm>
-          <a:prstGeom prst="rect">
-            <a:avLst/>
-          </a:prstGeom>
-          <a:noFill/>
-          <a:ln/>
-        </p:spPr>
-        <p:txBody>
-          <a:bodyPr wrap="square" lIns="0" tIns="0" rIns="0" bIns="0" rtlCol="0" anchor="ctr"/>
-          <a:lstStyle/>
-          <a:p>
-            <a:pPr algn="ctr" indent="0" marL="0">
-              <a:buNone/>
-            </a:pPr>
-            <a:r>
-              <a:rPr lang="en-US" sz="1400" b="1" dirty="0">
-                <a:solidFill>
-                  <a:srgbClr val="FFFFFF"/>
-                </a:solidFill>
-                <a:latin typeface="Consolas" pitchFamily="34" charset="0"/>
-                <a:ea typeface="Consolas" pitchFamily="34" charset="-122"/>
-                <a:cs typeface="Consolas" pitchFamily="34" charset="-120"/>
-              </a:rPr>
-              <a:t>Louvain</a:t>
-            </a:r>
-            <a:endParaRPr lang="en-US" sz="1400" dirty="0"/>
-          </a:p>
-        </p:txBody>
-      </p:sp>
-      <p:sp>
-        <p:nvSpPr>
-          <p:cNvPr id="27" name="Text 25"/>
-          <p:cNvSpPr/>
-          <p:nvPr/>
-        </p:nvSpPr>
-        <p:spPr>
-          <a:xfrm>
-            <a:off x="4462272" y="3703320"/>
-            <a:ext cx="3108960" cy="594360"/>
-          </a:xfrm>
-          <a:prstGeom prst="rect">
-            <a:avLst/>
-          </a:prstGeom>
-          <a:noFill/>
-          <a:ln/>
-        </p:spPr>
-        <p:txBody>
-          <a:bodyPr wrap="square" lIns="0" tIns="0" rIns="0" bIns="0" rtlCol="0" anchor="t"/>
-          <a:lstStyle/>
-          <a:p>
-            <a:pPr rtl="1" algn="r" indent="0" marL="0">
-              <a:buNone/>
-            </a:pPr>
-            <a:r>
-              <a:rPr lang="en-US" sz="1200" dirty="0">
-                <a:solidFill>
-                  <a:srgbClr val="CBD5E1"/>
-                </a:solidFill>
-                <a:latin typeface="Arial" pitchFamily="34" charset="0"/>
-                <a:ea typeface="Arial" pitchFamily="34" charset="-122"/>
-                <a:cs typeface="Arial" pitchFamily="34" charset="-120"/>
-              </a:rPr>
-              <a:t>לזיהוי קבוצות צפופות במהירות</a:t>
-            </a:r>
-            <a:endParaRPr lang="en-US" sz="1200" dirty="0"/>
-          </a:p>
-        </p:txBody>
-      </p:sp>
-      <p:sp>
-        <p:nvSpPr>
-          <p:cNvPr id="28" name="Shape 26"/>
-          <p:cNvSpPr/>
-          <p:nvPr/>
-        </p:nvSpPr>
-        <p:spPr>
-          <a:xfrm>
-            <a:off x="4462272" y="4434840"/>
-            <a:ext cx="3108960" cy="457200"/>
-          </a:xfrm>
-          <a:prstGeom prst="roundRect">
-            <a:avLst>
-              <a:gd name="adj" fmla="val 12000"/>
-            </a:avLst>
-          </a:prstGeom>
-          <a:solidFill>
-            <a:srgbClr val="A855F7">
-              <a:alpha val="20000"/>
-            </a:srgbClr>
-          </a:solidFill>
-          <a:ln w="12700">
-            <a:solidFill>
-              <a:srgbClr val="A855F7">
-                <a:alpha val="50000"/>
-              </a:srgbClr>
-            </a:solidFill>
-            <a:prstDash val="solid"/>
-          </a:ln>
-        </p:spPr>
-      </p:sp>
-      <p:sp>
-        <p:nvSpPr>
-          <p:cNvPr id="29" name="Text 27"/>
-          <p:cNvSpPr/>
-          <p:nvPr/>
-        </p:nvSpPr>
-        <p:spPr>
-          <a:xfrm>
-            <a:off x="4462272" y="4434840"/>
-            <a:ext cx="3108960" cy="457200"/>
-          </a:xfrm>
-          <a:prstGeom prst="rect">
-            <a:avLst/>
-          </a:prstGeom>
-          <a:noFill/>
-          <a:ln/>
-        </p:spPr>
-        <p:txBody>
-          <a:bodyPr wrap="square" lIns="0" tIns="0" rIns="0" bIns="0" rtlCol="0" anchor="ctr"/>
-          <a:lstStyle/>
-          <a:p>
-            <a:pPr algn="ctr" indent="0" marL="0">
-              <a:buNone/>
-            </a:pPr>
-            <a:r>
-              <a:rPr lang="en-US" sz="1400" b="1" dirty="0">
-                <a:solidFill>
-                  <a:srgbClr val="FFFFFF"/>
-                </a:solidFill>
-                <a:latin typeface="Consolas" pitchFamily="34" charset="0"/>
-                <a:ea typeface="Consolas" pitchFamily="34" charset="-122"/>
-                <a:cs typeface="Consolas" pitchFamily="34" charset="-120"/>
-              </a:rPr>
-              <a:t>Girvan-Newman</a:t>
-            </a:r>
-            <a:endParaRPr lang="en-US" sz="1400" dirty="0"/>
-          </a:p>
-        </p:txBody>
-      </p:sp>
-      <p:sp>
-        <p:nvSpPr>
-          <p:cNvPr id="30" name="Text 28"/>
-          <p:cNvSpPr/>
-          <p:nvPr/>
-        </p:nvSpPr>
-        <p:spPr>
-          <a:xfrm>
-            <a:off x="4462272" y="4937760"/>
-            <a:ext cx="3108960" cy="594360"/>
-          </a:xfrm>
-          <a:prstGeom prst="rect">
-            <a:avLst/>
-          </a:prstGeom>
-          <a:noFill/>
-          <a:ln/>
-        </p:spPr>
-        <p:txBody>
-          <a:bodyPr wrap="square" lIns="0" tIns="0" rIns="0" bIns="0" rtlCol="0" anchor="t"/>
-          <a:lstStyle/>
-          <a:p>
-            <a:pPr rtl="1" algn="r" indent="0" marL="0">
-              <a:buNone/>
-            </a:pPr>
-            <a:r>
-              <a:rPr lang="en-US" sz="1200" dirty="0">
-                <a:solidFill>
-                  <a:srgbClr val="CBD5E1"/>
-                </a:solidFill>
-                <a:latin typeface="Arial" pitchFamily="34" charset="0"/>
-                <a:ea typeface="Arial" pitchFamily="34" charset="-122"/>
-                <a:cs typeface="Arial" pitchFamily="34" charset="-120"/>
-              </a:rPr>
-              <a:t>לאימות חתכי קצה חשודים</a:t>
-            </a:r>
-            <a:endParaRPr lang="en-US" sz="1200" dirty="0"/>
-          </a:p>
-        </p:txBody>
-      </p:sp>
-      <p:sp>
-        <p:nvSpPr>
-          <p:cNvPr id="31" name="Shape 29"/>
-          <p:cNvSpPr/>
-          <p:nvPr/>
-        </p:nvSpPr>
-        <p:spPr>
-          <a:xfrm>
-            <a:off x="420624" y="1691640"/>
-            <a:ext cx="3657600" cy="4297680"/>
-          </a:xfrm>
-          <a:prstGeom prst="roundRect">
-            <a:avLst>
-              <a:gd name="adj" fmla="val 4500"/>
+              <a:gd name="adj" fmla="val 14400"/>
             </a:avLst>
           </a:prstGeom>
           <a:solidFill>
@@ -7984,24 +8663,31 @@
             <a:prstDash val="solid"/>
           </a:ln>
           <a:effectLst>
-            <a:outerShdw sx="100000" sy="100000" kx="0" ky="0" algn="bl" rotWithShape="0" blurRad="279400" dist="76200" dir="5400000">
+            <a:outerShdw blurRad="279400" dist="76200" dir="5400000" algn="bl" rotWithShape="0">
               <a:srgbClr val="000000">
                 <a:alpha val="40000"/>
               </a:srgbClr>
             </a:outerShdw>
           </a:effectLst>
         </p:spPr>
-      </p:sp>
-      <p:sp>
-        <p:nvSpPr>
-          <p:cNvPr id="32" name="Shape 30"/>
-          <p:cNvSpPr/>
-          <p:nvPr/>
-        </p:nvSpPr>
-        <p:spPr>
-          <a:xfrm>
-            <a:off x="512064" y="1728216"/>
-            <a:ext cx="3474720" cy="18288"/>
+        <p:txBody>
+          <a:bodyPr/>
+          <a:lstStyle/>
+          <a:p>
+            <a:endParaRPr lang="en-IL"/>
+          </a:p>
+        </p:txBody>
+      </p:sp>
+      <p:sp>
+        <p:nvSpPr>
+          <p:cNvPr id="22" name="Shape 20"/>
+          <p:cNvSpPr/>
+          <p:nvPr/>
+        </p:nvSpPr>
+        <p:spPr>
+          <a:xfrm>
+            <a:off x="640080" y="5202936"/>
+            <a:ext cx="10881360" cy="18288"/>
           </a:xfrm>
           <a:prstGeom prst="rect">
             <a:avLst/>
@@ -8013,37 +8699,24 @@
           </a:solidFill>
           <a:ln/>
         </p:spPr>
-      </p:sp>
-      <p:sp>
-        <p:nvSpPr>
-          <p:cNvPr id="33" name="Shape 31"/>
-          <p:cNvSpPr/>
-          <p:nvPr/>
-        </p:nvSpPr>
-        <p:spPr>
-          <a:xfrm>
-            <a:off x="585216" y="1856232"/>
-            <a:ext cx="3328416" cy="54864"/>
-          </a:xfrm>
-          <a:prstGeom prst="rect">
-            <a:avLst/>
-          </a:prstGeom>
-          <a:solidFill>
-            <a:srgbClr val="EC4899"/>
-          </a:solidFill>
-          <a:ln/>
-        </p:spPr>
-      </p:sp>
-      <p:sp>
-        <p:nvSpPr>
-          <p:cNvPr id="34" name="Text 32"/>
-          <p:cNvSpPr/>
-          <p:nvPr/>
-        </p:nvSpPr>
-        <p:spPr>
-          <a:xfrm>
-            <a:off x="694944" y="2020824"/>
-            <a:ext cx="3108960" cy="274320"/>
+        <p:txBody>
+          <a:bodyPr/>
+          <a:lstStyle/>
+          <a:p>
+            <a:endParaRPr lang="en-IL"/>
+          </a:p>
+        </p:txBody>
+      </p:sp>
+      <p:sp>
+        <p:nvSpPr>
+          <p:cNvPr id="23" name="Text 21"/>
+          <p:cNvSpPr/>
+          <p:nvPr/>
+        </p:nvSpPr>
+        <p:spPr>
+          <a:xfrm>
+            <a:off x="777240" y="5285232"/>
+            <a:ext cx="10607040" cy="320040"/>
           </a:xfrm>
           <a:prstGeom prst="rect">
             <a:avLst/>
@@ -8055,213 +8728,96 @@
           <a:bodyPr wrap="square" lIns="0" tIns="0" rIns="0" bIns="0" rtlCol="0" anchor="ctr"/>
           <a:lstStyle/>
           <a:p>
-            <a:pPr algn="r" indent="0" marL="0">
-              <a:buNone/>
-            </a:pPr>
-            <a:r>
-              <a:rPr lang="en-US" sz="1000" b="1" spc="300" kern="0" dirty="0">
-                <a:solidFill>
-                  <a:srgbClr val="EC4899"/>
-                </a:solidFill>
-                <a:latin typeface="Arial" pitchFamily="34" charset="0"/>
-                <a:ea typeface="Arial" pitchFamily="34" charset="-122"/>
-                <a:cs typeface="Arial" pitchFamily="34" charset="-120"/>
-              </a:rPr>
-              <a:t>03  ·  PREDICTION</a:t>
-            </a:r>
-            <a:endParaRPr lang="en-US" sz="1000" dirty="0"/>
-          </a:p>
-        </p:txBody>
-      </p:sp>
-      <p:sp>
-        <p:nvSpPr>
-          <p:cNvPr id="35" name="Text 33"/>
-          <p:cNvSpPr/>
-          <p:nvPr/>
-        </p:nvSpPr>
-        <p:spPr>
-          <a:xfrm>
-            <a:off x="694944" y="2331720"/>
-            <a:ext cx="3108960" cy="594360"/>
-          </a:xfrm>
-          <a:prstGeom prst="rect">
-            <a:avLst/>
-          </a:prstGeom>
-          <a:noFill/>
-          <a:ln/>
-        </p:spPr>
-        <p:txBody>
-          <a:bodyPr wrap="square" lIns="0" tIns="0" rIns="0" bIns="0" rtlCol="0" anchor="ctr"/>
-          <a:lstStyle/>
-          <a:p>
-            <a:pPr rtl="1" algn="r" indent="0" marL="0">
-              <a:buNone/>
-            </a:pPr>
-            <a:r>
-              <a:rPr lang="en-US" sz="2600" b="1" dirty="0">
-                <a:solidFill>
-                  <a:srgbClr val="F8FAFC"/>
-                </a:solidFill>
-                <a:latin typeface="Arial" pitchFamily="34" charset="0"/>
-                <a:ea typeface="Arial" pitchFamily="34" charset="-122"/>
-                <a:cs typeface="Arial" pitchFamily="34" charset="-120"/>
-              </a:rPr>
-              <a:t>חיזוי קשרים</a:t>
-            </a:r>
-            <a:endParaRPr lang="en-US" sz="2600" dirty="0"/>
-          </a:p>
-        </p:txBody>
-      </p:sp>
-      <p:sp>
-        <p:nvSpPr>
-          <p:cNvPr id="36" name="Shape 34"/>
-          <p:cNvSpPr/>
-          <p:nvPr/>
-        </p:nvSpPr>
-        <p:spPr>
-          <a:xfrm>
-            <a:off x="694944" y="3200400"/>
-            <a:ext cx="3108960" cy="457200"/>
+            <a:pPr marL="0" indent="0" algn="r" rtl="1">
+              <a:buNone/>
+            </a:pPr>
+            <a:r>
+              <a:rPr lang="en-US" sz="1100" b="1" kern="0" spc="300" dirty="0">
+                <a:solidFill>
+                  <a:srgbClr val="C084FC"/>
+                </a:solidFill>
+                <a:latin typeface="Arial" pitchFamily="34" charset="0"/>
+                <a:ea typeface="Arial" pitchFamily="34" charset="-122"/>
+                <a:cs typeface="Arial" pitchFamily="34" charset="-120"/>
+              </a:rPr>
+              <a:t>חלוקה לפי ציר הזמן  ·  Train / Test Split</a:t>
+            </a:r>
+            <a:endParaRPr lang="en-US" sz="1100" dirty="0"/>
+          </a:p>
+        </p:txBody>
+      </p:sp>
+      <p:sp>
+        <p:nvSpPr>
+          <p:cNvPr id="24" name="Shape 22"/>
+          <p:cNvSpPr/>
+          <p:nvPr/>
+        </p:nvSpPr>
+        <p:spPr>
+          <a:xfrm>
+            <a:off x="3429000" y="5715000"/>
+            <a:ext cx="7955280" cy="320040"/>
           </a:xfrm>
           <a:prstGeom prst="roundRect">
             <a:avLst>
-              <a:gd name="adj" fmla="val 12000"/>
+              <a:gd name="adj" fmla="val 14286"/>
             </a:avLst>
           </a:prstGeom>
           <a:solidFill>
-            <a:srgbClr val="EC4899">
-              <a:alpha val="20000"/>
+            <a:srgbClr val="A855F7">
+              <a:alpha val="70000"/>
             </a:srgbClr>
           </a:solidFill>
-          <a:ln w="12700">
-            <a:solidFill>
-              <a:srgbClr val="EC4899">
-                <a:alpha val="50000"/>
-              </a:srgbClr>
-            </a:solidFill>
-            <a:prstDash val="solid"/>
-          </a:ln>
-        </p:spPr>
-      </p:sp>
-      <p:sp>
-        <p:nvSpPr>
-          <p:cNvPr id="37" name="Text 35"/>
-          <p:cNvSpPr/>
-          <p:nvPr/>
-        </p:nvSpPr>
-        <p:spPr>
-          <a:xfrm>
-            <a:off x="694944" y="3200400"/>
-            <a:ext cx="3108960" cy="457200"/>
-          </a:xfrm>
-          <a:prstGeom prst="rect">
-            <a:avLst/>
-          </a:prstGeom>
-          <a:noFill/>
-          <a:ln/>
-        </p:spPr>
-        <p:txBody>
-          <a:bodyPr wrap="square" lIns="0" tIns="0" rIns="0" bIns="0" rtlCol="0" anchor="ctr"/>
-          <a:lstStyle/>
-          <a:p>
-            <a:pPr algn="ctr" indent="0" marL="0">
-              <a:buNone/>
-            </a:pPr>
-            <a:r>
-              <a:rPr lang="en-US" sz="1400" b="1" dirty="0">
-                <a:solidFill>
-                  <a:srgbClr val="FFFFFF"/>
-                </a:solidFill>
-                <a:latin typeface="Consolas" pitchFamily="34" charset="0"/>
-                <a:ea typeface="Consolas" pitchFamily="34" charset="-122"/>
-                <a:cs typeface="Consolas" pitchFamily="34" charset="-120"/>
-              </a:rPr>
-              <a:t>Structural Balance</a:t>
-            </a:r>
-            <a:endParaRPr lang="en-US" sz="1400" dirty="0"/>
-          </a:p>
-        </p:txBody>
-      </p:sp>
-      <p:sp>
-        <p:nvSpPr>
-          <p:cNvPr id="38" name="Text 36"/>
-          <p:cNvSpPr/>
-          <p:nvPr/>
-        </p:nvSpPr>
-        <p:spPr>
-          <a:xfrm>
-            <a:off x="694944" y="3703320"/>
-            <a:ext cx="3108960" cy="594360"/>
-          </a:xfrm>
-          <a:prstGeom prst="rect">
-            <a:avLst/>
-          </a:prstGeom>
-          <a:noFill/>
-          <a:ln/>
-        </p:spPr>
-        <p:txBody>
-          <a:bodyPr wrap="square" lIns="0" tIns="0" rIns="0" bIns="0" rtlCol="0" anchor="t"/>
-          <a:lstStyle/>
-          <a:p>
-            <a:pPr rtl="1" algn="r" indent="0" marL="0">
-              <a:buNone/>
-            </a:pPr>
-            <a:r>
-              <a:rPr lang="en-US" sz="1200" dirty="0">
-                <a:solidFill>
-                  <a:srgbClr val="CBD5E1"/>
-                </a:solidFill>
-                <a:latin typeface="Arial" pitchFamily="34" charset="0"/>
-                <a:ea typeface="Arial" pitchFamily="34" charset="-122"/>
-                <a:cs typeface="Arial" pitchFamily="34" charset="-120"/>
-              </a:rPr>
-              <a:t>בהתבסס על משולשים ברשת</a:t>
-            </a:r>
-            <a:endParaRPr lang="en-US" sz="1200" dirty="0"/>
-          </a:p>
-        </p:txBody>
-      </p:sp>
-      <p:sp>
-        <p:nvSpPr>
-          <p:cNvPr id="39" name="Shape 37"/>
-          <p:cNvSpPr/>
-          <p:nvPr/>
-        </p:nvSpPr>
-        <p:spPr>
-          <a:xfrm>
-            <a:off x="694944" y="4434840"/>
-            <a:ext cx="3108960" cy="457200"/>
+          <a:ln/>
+        </p:spPr>
+        <p:txBody>
+          <a:bodyPr/>
+          <a:lstStyle/>
+          <a:p>
+            <a:endParaRPr lang="en-IL"/>
+          </a:p>
+        </p:txBody>
+      </p:sp>
+      <p:sp>
+        <p:nvSpPr>
+          <p:cNvPr id="25" name="Shape 23"/>
+          <p:cNvSpPr/>
+          <p:nvPr/>
+        </p:nvSpPr>
+        <p:spPr>
+          <a:xfrm>
+            <a:off x="777240" y="5715000"/>
+            <a:ext cx="2651760" cy="320040"/>
           </a:xfrm>
           <a:prstGeom prst="roundRect">
             <a:avLst>
-              <a:gd name="adj" fmla="val 12000"/>
+              <a:gd name="adj" fmla="val 14286"/>
             </a:avLst>
           </a:prstGeom>
           <a:solidFill>
-            <a:srgbClr val="EC4899">
-              <a:alpha val="20000"/>
+            <a:srgbClr val="FBBF24">
+              <a:alpha val="70000"/>
             </a:srgbClr>
           </a:solidFill>
-          <a:ln w="12700">
-            <a:solidFill>
-              <a:srgbClr val="EC4899">
-                <a:alpha val="50000"/>
-              </a:srgbClr>
-            </a:solidFill>
-            <a:prstDash val="solid"/>
-          </a:ln>
-        </p:spPr>
-      </p:sp>
-      <p:sp>
-        <p:nvSpPr>
-          <p:cNvPr id="40" name="Text 38"/>
-          <p:cNvSpPr/>
-          <p:nvPr/>
-        </p:nvSpPr>
-        <p:spPr>
-          <a:xfrm>
-            <a:off x="694944" y="4434840"/>
-            <a:ext cx="3108960" cy="457200"/>
+          <a:ln/>
+        </p:spPr>
+        <p:txBody>
+          <a:bodyPr/>
+          <a:lstStyle/>
+          <a:p>
+            <a:endParaRPr lang="en-IL"/>
+          </a:p>
+        </p:txBody>
+      </p:sp>
+      <p:sp>
+        <p:nvSpPr>
+          <p:cNvPr id="26" name="Text 24"/>
+          <p:cNvSpPr/>
+          <p:nvPr/>
+        </p:nvSpPr>
+        <p:spPr>
+          <a:xfrm>
+            <a:off x="3429000" y="5715000"/>
+            <a:ext cx="7955280" cy="320040"/>
           </a:xfrm>
           <a:prstGeom prst="rect">
             <a:avLst/>
@@ -8273,60 +8829,60 @@
           <a:bodyPr wrap="square" lIns="0" tIns="0" rIns="0" bIns="0" rtlCol="0" anchor="ctr"/>
           <a:lstStyle/>
           <a:p>
-            <a:pPr algn="ctr" indent="0" marL="0">
-              <a:buNone/>
-            </a:pPr>
-            <a:r>
-              <a:rPr lang="en-US" sz="1400" b="1" dirty="0">
+            <a:pPr marL="0" indent="0" algn="ctr">
+              <a:buNone/>
+            </a:pPr>
+            <a:r>
+              <a:rPr lang="en-US" sz="1100" b="1" dirty="0">
                 <a:solidFill>
                   <a:srgbClr val="FFFFFF"/>
                 </a:solidFill>
-                <a:latin typeface="Consolas" pitchFamily="34" charset="0"/>
-                <a:ea typeface="Consolas" pitchFamily="34" charset="-122"/>
-                <a:cs typeface="Consolas" pitchFamily="34" charset="-120"/>
-              </a:rPr>
-              <a:t>Time Split</a:t>
-            </a:r>
-            <a:endParaRPr lang="en-US" sz="1400" dirty="0"/>
-          </a:p>
-        </p:txBody>
-      </p:sp>
-      <p:sp>
-        <p:nvSpPr>
-          <p:cNvPr id="41" name="Text 39"/>
-          <p:cNvSpPr/>
-          <p:nvPr/>
-        </p:nvSpPr>
-        <p:spPr>
-          <a:xfrm>
-            <a:off x="694944" y="4937760"/>
-            <a:ext cx="3108960" cy="594360"/>
-          </a:xfrm>
-          <a:prstGeom prst="rect">
-            <a:avLst/>
-          </a:prstGeom>
-          <a:noFill/>
-          <a:ln/>
-        </p:spPr>
-        <p:txBody>
-          <a:bodyPr wrap="square" lIns="0" tIns="0" rIns="0" bIns="0" rtlCol="0" anchor="t"/>
-          <a:lstStyle/>
-          <a:p>
-            <a:pPr rtl="1" algn="r" indent="0" marL="0">
-              <a:buNone/>
-            </a:pPr>
-            <a:r>
-              <a:rPr lang="en-US" sz="1200" dirty="0">
-                <a:solidFill>
-                  <a:srgbClr val="CBD5E1"/>
-                </a:solidFill>
-                <a:latin typeface="Arial" pitchFamily="34" charset="0"/>
-                <a:ea typeface="Arial" pitchFamily="34" charset="-122"/>
-                <a:cs typeface="Arial" pitchFamily="34" charset="-120"/>
-              </a:rPr>
-              <a:t>אימון על העבר, חיזוי על העתיד</a:t>
-            </a:r>
-            <a:endParaRPr lang="en-US" sz="1200" dirty="0"/>
+                <a:latin typeface="Arial" pitchFamily="34" charset="0"/>
+                <a:ea typeface="Arial" pitchFamily="34" charset="-122"/>
+                <a:cs typeface="Arial" pitchFamily="34" charset="-120"/>
+              </a:rPr>
+              <a:t>Train  ·  2011–2014</a:t>
+            </a:r>
+            <a:endParaRPr lang="en-US" sz="1100" dirty="0"/>
+          </a:p>
+        </p:txBody>
+      </p:sp>
+      <p:sp>
+        <p:nvSpPr>
+          <p:cNvPr id="27" name="Text 25"/>
+          <p:cNvSpPr/>
+          <p:nvPr/>
+        </p:nvSpPr>
+        <p:spPr>
+          <a:xfrm>
+            <a:off x="777240" y="5715000"/>
+            <a:ext cx="2651760" cy="320040"/>
+          </a:xfrm>
+          <a:prstGeom prst="rect">
+            <a:avLst/>
+          </a:prstGeom>
+          <a:noFill/>
+          <a:ln/>
+        </p:spPr>
+        <p:txBody>
+          <a:bodyPr wrap="square" lIns="0" tIns="0" rIns="0" bIns="0" rtlCol="0" anchor="ctr"/>
+          <a:lstStyle/>
+          <a:p>
+            <a:pPr marL="0" indent="0" algn="ctr">
+              <a:buNone/>
+            </a:pPr>
+            <a:r>
+              <a:rPr lang="en-US" sz="1100" b="1" dirty="0">
+                <a:solidFill>
+                  <a:srgbClr val="FFFFFF"/>
+                </a:solidFill>
+                <a:latin typeface="Arial" pitchFamily="34" charset="0"/>
+                <a:ea typeface="Arial" pitchFamily="34" charset="-122"/>
+                <a:cs typeface="Arial" pitchFamily="34" charset="-120"/>
+              </a:rPr>
+              <a:t>Test  ·  2015</a:t>
+            </a:r>
+            <a:endParaRPr lang="en-US" sz="1100" dirty="0"/>
           </a:p>
         </p:txBody>
       </p:sp>
@@ -8335,13 +8891,13 @@
   <p:clrMapOvr>
     <a:masterClrMapping/>
   </p:clrMapOvr>
-  <mc:AlternateContent xmlns:mc="http://schemas.openxmlformats.org/markup-compatibility/2006">
-    <mc:Choice xmlns:p159="http://schemas.microsoft.com/office/powerpoint/2015/09/main" Requires="p159">
-      <p:transition spd="med" p159:dur="1500">
+  <mc:AlternateContent xmlns:mc="http://schemas.openxmlformats.org/markup-compatibility/2006" xmlns:p159="http://schemas.microsoft.com/office/powerpoint/2015/09/main">
+    <mc:Choice Requires="p159">
+      <p:transition spd="med">
         <p159:morph option="byObject"/>
       </p:transition>
     </mc:Choice>
-    <mc:Fallback>
+    <mc:Fallback xmlns="">
       <p:transition spd="med">
         <p:fade/>
       </p:transition>
@@ -8351,12 +8907,12 @@
 </file>
 
 <file path=ppt/slides/slide7.xml><?xml version="1.0" encoding="utf-8"?>
-<p:sld xmlns:mc="http://schemas.openxmlformats.org/markup-compatibility/2006" xmlns:a="http://schemas.openxmlformats.org/drawingml/2006/main" xmlns:r="http://schemas.openxmlformats.org/officeDocument/2006/relationships" xmlns:p="http://schemas.openxmlformats.org/presentationml/2006/main">
-  <p:cSld name="Slide 7">
+<p:sld xmlns:a="http://schemas.openxmlformats.org/drawingml/2006/main" xmlns:r="http://schemas.openxmlformats.org/officeDocument/2006/relationships" xmlns:p="http://schemas.openxmlformats.org/presentationml/2006/main">
+  <p:cSld>
     <p:bg>
       <p:bgPr>
         <a:blipFill dpi="0" rotWithShape="1">
-          <a:blip r:embed="rId1">
+          <a:blip r:embed="rId2">
             <a:lum/>
           </a:blip>
           <a:srcRect/>
@@ -8389,26 +8945,33 @@
         </p:nvSpPr>
         <p:spPr>
           <a:xfrm>
-            <a:off x="-914400" y="4114800"/>
-            <a:ext cx="4572000" cy="4572000"/>
+            <a:off x="7772400" y="-1371600"/>
+            <a:ext cx="5486400" cy="5486400"/>
           </a:xfrm>
           <a:prstGeom prst="ellipse">
             <a:avLst/>
           </a:prstGeom>
           <a:solidFill>
             <a:srgbClr val="A855F7">
-              <a:alpha val="24000"/>
+              <a:alpha val="22000"/>
             </a:srgbClr>
           </a:solidFill>
           <a:ln/>
           <a:effectLst>
-            <a:outerShdw sx="100000" sy="100000" kx="0" ky="0" algn="bl" rotWithShape="0" blurRad="1270000" dist="50800" dir="16200000">
+            <a:outerShdw blurRad="1270000" dist="50800" dir="16200000" algn="bl" rotWithShape="0">
               <a:srgbClr val="A855F7">
                 <a:alpha val="65000"/>
               </a:srgbClr>
             </a:outerShdw>
           </a:effectLst>
         </p:spPr>
+        <p:txBody>
+          <a:bodyPr/>
+          <a:lstStyle/>
+          <a:p>
+            <a:endParaRPr lang="en-IL"/>
+          </a:p>
+        </p:txBody>
       </p:sp>
       <p:sp>
         <p:nvSpPr>
@@ -8418,8 +8981,8 @@
         </p:nvSpPr>
         <p:spPr>
           <a:xfrm>
-            <a:off x="8686800" y="-457200"/>
-            <a:ext cx="4114800" cy="4114800"/>
+            <a:off x="-914400" y="3200400"/>
+            <a:ext cx="5029200" cy="5029200"/>
           </a:xfrm>
           <a:prstGeom prst="ellipse">
             <a:avLst/>
@@ -8431,13 +8994,20 @@
           </a:solidFill>
           <a:ln/>
           <a:effectLst>
-            <a:outerShdw sx="100000" sy="100000" kx="0" ky="0" algn="bl" rotWithShape="0" blurRad="1270000" dist="50800" dir="16200000">
+            <a:outerShdw blurRad="1270000" dist="50800" dir="16200000" algn="bl" rotWithShape="0">
               <a:srgbClr val="EC4899">
                 <a:alpha val="55000"/>
               </a:srgbClr>
             </a:outerShdw>
           </a:effectLst>
         </p:spPr>
+        <p:txBody>
+          <a:bodyPr/>
+          <a:lstStyle/>
+          <a:p>
+            <a:endParaRPr lang="en-IL"/>
+          </a:p>
+        </p:txBody>
       </p:sp>
       <p:sp>
         <p:nvSpPr>
@@ -8460,11 +9030,11 @@
           <a:bodyPr wrap="square" lIns="0" tIns="0" rIns="0" bIns="0" rtlCol="0" anchor="ctr"/>
           <a:lstStyle/>
           <a:p>
-            <a:pPr rtl="1" algn="r" indent="0" marL="0">
-              <a:buNone/>
-            </a:pPr>
-            <a:r>
-              <a:rPr lang="en-US" sz="900" b="1" spc="500" kern="0" dirty="0">
+            <a:pPr marL="0" indent="0" algn="r" rtl="1">
+              <a:buNone/>
+            </a:pPr>
+            <a:r>
+              <a:rPr lang="en-US" sz="900" b="1" kern="0" spc="500" dirty="0">
                 <a:solidFill>
                   <a:srgbClr val="C084FC"/>
                 </a:solidFill>
@@ -8472,7 +9042,29 @@
                 <a:ea typeface="Arial" pitchFamily="34" charset="-122"/>
                 <a:cs typeface="Arial" pitchFamily="34" charset="-120"/>
               </a:rPr>
-              <a:t>BITCOIN OTC  ·  ניתוח רשתות אמון</a:t>
+              <a:t>BITCOIN OTC  ·  </a:t>
+            </a:r>
+            <a:r>
+              <a:rPr lang="he-IL" sz="900" b="1" kern="0" spc="500" dirty="0">
+                <a:solidFill>
+                  <a:srgbClr val="C084FC"/>
+                </a:solidFill>
+                <a:latin typeface="Arial" pitchFamily="34" charset="0"/>
+                <a:ea typeface="Arial" pitchFamily="34" charset="-122"/>
+                <a:cs typeface="Arial" pitchFamily="34" charset="-120"/>
+              </a:rPr>
+              <a:t> </a:t>
+            </a:r>
+            <a:r>
+              <a:rPr lang="en-US" sz="900" b="1" kern="0" spc="500" dirty="0">
+                <a:solidFill>
+                  <a:srgbClr val="C084FC"/>
+                </a:solidFill>
+                <a:latin typeface="Arial" pitchFamily="34" charset="0"/>
+                <a:ea typeface="Arial" pitchFamily="34" charset="-122"/>
+                <a:cs typeface="Arial" pitchFamily="34" charset="-120"/>
+              </a:rPr>
+              <a:t>ניתוח רשתות אמון</a:t>
             </a:r>
             <a:endParaRPr lang="en-US" sz="900" dirty="0"/>
           </a:p>
@@ -8499,7 +9091,7 @@
           <a:bodyPr wrap="square" lIns="0" tIns="0" rIns="0" bIns="0" rtlCol="0" anchor="t"/>
           <a:lstStyle/>
           <a:p>
-            <a:pPr rtl="1" algn="r" indent="0" marL="0">
+            <a:pPr marL="0" indent="0" algn="r" rtl="1">
               <a:buNone/>
             </a:pPr>
             <a:r>
@@ -8511,7 +9103,7 @@
                 <a:ea typeface="Arial" pitchFamily="34" charset="-122"/>
                 <a:cs typeface="Arial" pitchFamily="34" charset="-120"/>
               </a:rPr>
-              <a:t>סטטוס נוכחי</a:t>
+              <a:t>מדדי הצלחה · איך מודדים הצלחה?</a:t>
             </a:r>
             <a:endParaRPr lang="en-US" sz="3800" dirty="0"/>
           </a:p>
@@ -8536,6 +9128,13 @@
           </a:solidFill>
           <a:ln/>
         </p:spPr>
+        <p:txBody>
+          <a:bodyPr/>
+          <a:lstStyle/>
+          <a:p>
+            <a:endParaRPr lang="en-IL"/>
+          </a:p>
+        </p:txBody>
       </p:sp>
       <p:sp>
         <p:nvSpPr>
@@ -8558,11 +9157,11 @@
           <a:bodyPr wrap="square" lIns="0" tIns="0" rIns="0" bIns="0" rtlCol="0" anchor="ctr"/>
           <a:lstStyle/>
           <a:p>
-            <a:pPr algn="l" indent="0" marL="0">
-              <a:buNone/>
-            </a:pPr>
-            <a:r>
-              <a:rPr lang="en-US" sz="900" spc="200" kern="0" dirty="0">
+            <a:pPr marL="0" indent="0" algn="l">
+              <a:buNone/>
+            </a:pPr>
+            <a:r>
+              <a:rPr lang="en-US" sz="900" kern="0" spc="200" dirty="0">
                 <a:solidFill>
                   <a:srgbClr val="94A3B8"/>
                 </a:solidFill>
@@ -8597,11 +9196,11 @@
           <a:bodyPr wrap="square" lIns="0" tIns="0" rIns="0" bIns="0" rtlCol="0" anchor="ctr"/>
           <a:lstStyle/>
           <a:p>
-            <a:pPr algn="r" indent="0" marL="0">
-              <a:buNone/>
-            </a:pPr>
-            <a:r>
-              <a:rPr lang="en-US" sz="900" spc="200" kern="0" dirty="0">
+            <a:pPr marL="0" indent="0" algn="r">
+              <a:buNone/>
+            </a:pPr>
+            <a:r>
+              <a:rPr lang="en-US" sz="900" kern="0" spc="200" dirty="0">
                 <a:solidFill>
                   <a:srgbClr val="94A3B8"/>
                 </a:solidFill>
@@ -8617,74 +9216,14 @@
       </p:sp>
       <p:sp>
         <p:nvSpPr>
-          <p:cNvPr id="9" name="Shape 7"/>
-          <p:cNvSpPr/>
-          <p:nvPr/>
-        </p:nvSpPr>
-        <p:spPr>
-          <a:xfrm>
-            <a:off x="6126480" y="1691640"/>
-            <a:ext cx="5486400" cy="4572000"/>
-          </a:xfrm>
-          <a:prstGeom prst="roundRect">
-            <a:avLst>
-              <a:gd name="adj" fmla="val 3600"/>
-            </a:avLst>
-          </a:prstGeom>
-          <a:solidFill>
-            <a:srgbClr val="FFFFFF">
-              <a:alpha val="12000"/>
-            </a:srgbClr>
-          </a:solidFill>
-          <a:ln w="9525">
-            <a:solidFill>
-              <a:srgbClr val="FFFFFF">
-                <a:alpha val="30000"/>
-              </a:srgbClr>
-            </a:solidFill>
-            <a:prstDash val="solid"/>
-          </a:ln>
-          <a:effectLst>
-            <a:outerShdw sx="100000" sy="100000" kx="0" ky="0" algn="bl" rotWithShape="0" blurRad="279400" dist="76200" dir="5400000">
-              <a:srgbClr val="000000">
-                <a:alpha val="40000"/>
-              </a:srgbClr>
-            </a:outerShdw>
-          </a:effectLst>
-        </p:spPr>
-      </p:sp>
-      <p:sp>
-        <p:nvSpPr>
-          <p:cNvPr id="10" name="Shape 8"/>
-          <p:cNvSpPr/>
-          <p:nvPr/>
-        </p:nvSpPr>
-        <p:spPr>
-          <a:xfrm>
-            <a:off x="6217920" y="1728216"/>
-            <a:ext cx="5303520" cy="18288"/>
-          </a:xfrm>
-          <a:prstGeom prst="rect">
-            <a:avLst/>
-          </a:prstGeom>
-          <a:solidFill>
-            <a:srgbClr val="FFFFFF">
-              <a:alpha val="35000"/>
-            </a:srgbClr>
-          </a:solidFill>
-          <a:ln/>
-        </p:spPr>
-      </p:sp>
-      <p:sp>
-        <p:nvSpPr>
-          <p:cNvPr id="11" name="Text 9"/>
-          <p:cNvSpPr/>
-          <p:nvPr/>
-        </p:nvSpPr>
-        <p:spPr>
-          <a:xfrm>
-            <a:off x="6400800" y="1874520"/>
-            <a:ext cx="4937760" cy="365760"/>
+          <p:cNvPr id="10" name="Text 2"/>
+          <p:cNvSpPr/>
+          <p:nvPr/>
+        </p:nvSpPr>
+        <p:spPr>
+          <a:xfrm>
+            <a:off x="365760" y="1335024"/>
+            <a:ext cx="11430000" cy="365760"/>
           </a:xfrm>
           <a:prstGeom prst="rect">
             <a:avLst/>
@@ -8696,608 +9235,11 @@
           <a:bodyPr wrap="square" lIns="0" tIns="0" rIns="0" bIns="0" rtlCol="0" anchor="ctr"/>
           <a:lstStyle/>
           <a:p>
-            <a:pPr rtl="1" algn="r" indent="0" marL="0">
-              <a:buNone/>
-            </a:pPr>
-            <a:r>
-              <a:rPr lang="en-US" sz="1100" b="1" spc="300" kern="0" dirty="0">
-                <a:solidFill>
-                  <a:srgbClr val="C084FC"/>
-                </a:solidFill>
-                <a:latin typeface="Arial" pitchFamily="34" charset="0"/>
-                <a:ea typeface="Arial" pitchFamily="34" charset="-122"/>
-                <a:cs typeface="Arial" pitchFamily="34" charset="-120"/>
-              </a:rPr>
-              <a:t>מה כבר השלמנו</a:t>
-            </a:r>
-            <a:endParaRPr lang="en-US" sz="1100" dirty="0"/>
-          </a:p>
-        </p:txBody>
-      </p:sp>
-      <p:sp>
-        <p:nvSpPr>
-          <p:cNvPr id="12" name="Shape 10"/>
-          <p:cNvSpPr/>
-          <p:nvPr/>
-        </p:nvSpPr>
-        <p:spPr>
-          <a:xfrm>
-            <a:off x="11018520" y="2377440"/>
-            <a:ext cx="384048" cy="384048"/>
-          </a:xfrm>
-          <a:prstGeom prst="ellipse">
-            <a:avLst/>
-          </a:prstGeom>
-          <a:solidFill>
-            <a:srgbClr val="A855F7">
-              <a:alpha val="50000"/>
-            </a:srgbClr>
-          </a:solidFill>
-          <a:ln w="12700">
-            <a:solidFill>
-              <a:srgbClr val="C084FC"/>
-            </a:solidFill>
-            <a:prstDash val="solid"/>
-          </a:ln>
-        </p:spPr>
-      </p:sp>
-      <p:sp>
-        <p:nvSpPr>
-          <p:cNvPr id="13" name="Text 11"/>
-          <p:cNvSpPr/>
-          <p:nvPr/>
-        </p:nvSpPr>
-        <p:spPr>
-          <a:xfrm>
-            <a:off x="11018520" y="2377440"/>
-            <a:ext cx="384048" cy="384048"/>
-          </a:xfrm>
-          <a:prstGeom prst="rect">
-            <a:avLst/>
-          </a:prstGeom>
-          <a:noFill/>
-          <a:ln/>
-        </p:spPr>
-        <p:txBody>
-          <a:bodyPr wrap="square" lIns="0" tIns="0" rIns="0" bIns="0" rtlCol="0" anchor="ctr"/>
-          <a:lstStyle/>
-          <a:p>
-            <a:pPr algn="ctr" indent="0" marL="0">
-              <a:buNone/>
-            </a:pPr>
-            <a:r>
-              <a:rPr lang="en-US" sz="1600" b="1" dirty="0">
-                <a:solidFill>
-                  <a:srgbClr val="FFFFFF"/>
-                </a:solidFill>
-                <a:latin typeface="Arial" pitchFamily="34" charset="0"/>
-                <a:ea typeface="Arial" pitchFamily="34" charset="-122"/>
-                <a:cs typeface="Arial" pitchFamily="34" charset="-120"/>
-              </a:rPr>
-              <a:t>✓</a:t>
-            </a:r>
-            <a:endParaRPr lang="en-US" sz="1600" dirty="0"/>
-          </a:p>
-        </p:txBody>
-      </p:sp>
-      <p:sp>
-        <p:nvSpPr>
-          <p:cNvPr id="14" name="Text 12"/>
-          <p:cNvSpPr/>
-          <p:nvPr/>
-        </p:nvSpPr>
-        <p:spPr>
-          <a:xfrm>
-            <a:off x="6400800" y="2331720"/>
-            <a:ext cx="4526280" cy="502920"/>
-          </a:xfrm>
-          <a:prstGeom prst="rect">
-            <a:avLst/>
-          </a:prstGeom>
-          <a:noFill/>
-          <a:ln/>
-        </p:spPr>
-        <p:txBody>
-          <a:bodyPr wrap="square" lIns="0" tIns="0" rIns="0" bIns="0" rtlCol="0" anchor="ctr"/>
-          <a:lstStyle/>
-          <a:p>
-            <a:pPr rtl="1" algn="r" indent="0" marL="0">
-              <a:buNone/>
-            </a:pPr>
-            <a:r>
-              <a:rPr lang="en-US" sz="1400" dirty="0">
-                <a:solidFill>
-                  <a:srgbClr val="F8FAFC"/>
-                </a:solidFill>
-                <a:latin typeface="Arial" pitchFamily="34" charset="0"/>
-                <a:ea typeface="Arial" pitchFamily="34" charset="-122"/>
-                <a:cs typeface="Arial" pitchFamily="34" charset="-120"/>
-              </a:rPr>
-              <a:t>טעינת הדאטה וניקוי הצליחו</a:t>
-            </a:r>
-            <a:endParaRPr lang="en-US" sz="1400" dirty="0"/>
-          </a:p>
-        </p:txBody>
-      </p:sp>
-      <p:sp>
-        <p:nvSpPr>
-          <p:cNvPr id="15" name="Shape 13"/>
-          <p:cNvSpPr/>
-          <p:nvPr/>
-        </p:nvSpPr>
-        <p:spPr>
-          <a:xfrm>
-            <a:off x="11018520" y="3154680"/>
-            <a:ext cx="384048" cy="384048"/>
-          </a:xfrm>
-          <a:prstGeom prst="ellipse">
-            <a:avLst/>
-          </a:prstGeom>
-          <a:solidFill>
-            <a:srgbClr val="A855F7">
-              <a:alpha val="50000"/>
-            </a:srgbClr>
-          </a:solidFill>
-          <a:ln w="12700">
-            <a:solidFill>
-              <a:srgbClr val="C084FC"/>
-            </a:solidFill>
-            <a:prstDash val="solid"/>
-          </a:ln>
-        </p:spPr>
-      </p:sp>
-      <p:sp>
-        <p:nvSpPr>
-          <p:cNvPr id="16" name="Text 14"/>
-          <p:cNvSpPr/>
-          <p:nvPr/>
-        </p:nvSpPr>
-        <p:spPr>
-          <a:xfrm>
-            <a:off x="11018520" y="3154680"/>
-            <a:ext cx="384048" cy="384048"/>
-          </a:xfrm>
-          <a:prstGeom prst="rect">
-            <a:avLst/>
-          </a:prstGeom>
-          <a:noFill/>
-          <a:ln/>
-        </p:spPr>
-        <p:txBody>
-          <a:bodyPr wrap="square" lIns="0" tIns="0" rIns="0" bIns="0" rtlCol="0" anchor="ctr"/>
-          <a:lstStyle/>
-          <a:p>
-            <a:pPr algn="ctr" indent="0" marL="0">
-              <a:buNone/>
-            </a:pPr>
-            <a:r>
-              <a:rPr lang="en-US" sz="1600" b="1" dirty="0">
-                <a:solidFill>
-                  <a:srgbClr val="FFFFFF"/>
-                </a:solidFill>
-                <a:latin typeface="Arial" pitchFamily="34" charset="0"/>
-                <a:ea typeface="Arial" pitchFamily="34" charset="-122"/>
-                <a:cs typeface="Arial" pitchFamily="34" charset="-120"/>
-              </a:rPr>
-              <a:t>✓</a:t>
-            </a:r>
-            <a:endParaRPr lang="en-US" sz="1600" dirty="0"/>
-          </a:p>
-        </p:txBody>
-      </p:sp>
-      <p:sp>
-        <p:nvSpPr>
-          <p:cNvPr id="17" name="Text 15"/>
-          <p:cNvSpPr/>
-          <p:nvPr/>
-        </p:nvSpPr>
-        <p:spPr>
-          <a:xfrm>
-            <a:off x="6400800" y="3108960"/>
-            <a:ext cx="4526280" cy="502920"/>
-          </a:xfrm>
-          <a:prstGeom prst="rect">
-            <a:avLst/>
-          </a:prstGeom>
-          <a:noFill/>
-          <a:ln/>
-        </p:spPr>
-        <p:txBody>
-          <a:bodyPr wrap="square" lIns="0" tIns="0" rIns="0" bIns="0" rtlCol="0" anchor="ctr"/>
-          <a:lstStyle/>
-          <a:p>
-            <a:pPr rtl="1" algn="r" indent="0" marL="0">
-              <a:buNone/>
-            </a:pPr>
-            <a:r>
-              <a:rPr lang="en-US" sz="1400" dirty="0">
-                <a:solidFill>
-                  <a:srgbClr val="F8FAFC"/>
-                </a:solidFill>
-                <a:latin typeface="Arial" pitchFamily="34" charset="0"/>
-                <a:ea typeface="Arial" pitchFamily="34" charset="-122"/>
-                <a:cs typeface="Arial" pitchFamily="34" charset="-120"/>
-              </a:rPr>
-              <a:t>בניית גרפי אמון וחוסר־אמון בעזרת NetworkX</a:t>
-            </a:r>
-            <a:endParaRPr lang="en-US" sz="1400" dirty="0"/>
-          </a:p>
-        </p:txBody>
-      </p:sp>
-      <p:sp>
-        <p:nvSpPr>
-          <p:cNvPr id="18" name="Shape 16"/>
-          <p:cNvSpPr/>
-          <p:nvPr/>
-        </p:nvSpPr>
-        <p:spPr>
-          <a:xfrm>
-            <a:off x="11018520" y="3931920"/>
-            <a:ext cx="384048" cy="384048"/>
-          </a:xfrm>
-          <a:prstGeom prst="ellipse">
-            <a:avLst/>
-          </a:prstGeom>
-          <a:solidFill>
-            <a:srgbClr val="A855F7">
-              <a:alpha val="50000"/>
-            </a:srgbClr>
-          </a:solidFill>
-          <a:ln w="12700">
-            <a:solidFill>
-              <a:srgbClr val="C084FC"/>
-            </a:solidFill>
-            <a:prstDash val="solid"/>
-          </a:ln>
-        </p:spPr>
-      </p:sp>
-      <p:sp>
-        <p:nvSpPr>
-          <p:cNvPr id="19" name="Text 17"/>
-          <p:cNvSpPr/>
-          <p:nvPr/>
-        </p:nvSpPr>
-        <p:spPr>
-          <a:xfrm>
-            <a:off x="11018520" y="3931920"/>
-            <a:ext cx="384048" cy="384048"/>
-          </a:xfrm>
-          <a:prstGeom prst="rect">
-            <a:avLst/>
-          </a:prstGeom>
-          <a:noFill/>
-          <a:ln/>
-        </p:spPr>
-        <p:txBody>
-          <a:bodyPr wrap="square" lIns="0" tIns="0" rIns="0" bIns="0" rtlCol="0" anchor="ctr"/>
-          <a:lstStyle/>
-          <a:p>
-            <a:pPr algn="ctr" indent="0" marL="0">
-              <a:buNone/>
-            </a:pPr>
-            <a:r>
-              <a:rPr lang="en-US" sz="1600" b="1" dirty="0">
-                <a:solidFill>
-                  <a:srgbClr val="FFFFFF"/>
-                </a:solidFill>
-                <a:latin typeface="Arial" pitchFamily="34" charset="0"/>
-                <a:ea typeface="Arial" pitchFamily="34" charset="-122"/>
-                <a:cs typeface="Arial" pitchFamily="34" charset="-120"/>
-              </a:rPr>
-              <a:t>✓</a:t>
-            </a:r>
-            <a:endParaRPr lang="en-US" sz="1600" dirty="0"/>
-          </a:p>
-        </p:txBody>
-      </p:sp>
-      <p:sp>
-        <p:nvSpPr>
-          <p:cNvPr id="20" name="Text 18"/>
-          <p:cNvSpPr/>
-          <p:nvPr/>
-        </p:nvSpPr>
-        <p:spPr>
-          <a:xfrm>
-            <a:off x="6400800" y="3886200"/>
-            <a:ext cx="4526280" cy="502920"/>
-          </a:xfrm>
-          <a:prstGeom prst="rect">
-            <a:avLst/>
-          </a:prstGeom>
-          <a:noFill/>
-          <a:ln/>
-        </p:spPr>
-        <p:txBody>
-          <a:bodyPr wrap="square" lIns="0" tIns="0" rIns="0" bIns="0" rtlCol="0" anchor="ctr"/>
-          <a:lstStyle/>
-          <a:p>
-            <a:pPr rtl="1" algn="r" indent="0" marL="0">
-              <a:buNone/>
-            </a:pPr>
-            <a:r>
-              <a:rPr lang="en-US" sz="1400" dirty="0">
-                <a:solidFill>
-                  <a:srgbClr val="F8FAFC"/>
-                </a:solidFill>
-                <a:latin typeface="Arial" pitchFamily="34" charset="0"/>
-                <a:ea typeface="Arial" pitchFamily="34" charset="-122"/>
-                <a:cs typeface="Arial" pitchFamily="34" charset="-120"/>
-              </a:rPr>
-              <a:t>חישוב התפלגות דרגות (Degree Distribution)</a:t>
-            </a:r>
-            <a:endParaRPr lang="en-US" sz="1400" dirty="0"/>
-          </a:p>
-        </p:txBody>
-      </p:sp>
-      <p:sp>
-        <p:nvSpPr>
-          <p:cNvPr id="21" name="Shape 19"/>
-          <p:cNvSpPr/>
-          <p:nvPr/>
-        </p:nvSpPr>
-        <p:spPr>
-          <a:xfrm>
-            <a:off x="11018520" y="4709160"/>
-            <a:ext cx="384048" cy="384048"/>
-          </a:xfrm>
-          <a:prstGeom prst="ellipse">
-            <a:avLst/>
-          </a:prstGeom>
-          <a:solidFill>
-            <a:srgbClr val="A855F7">
-              <a:alpha val="50000"/>
-            </a:srgbClr>
-          </a:solidFill>
-          <a:ln w="12700">
-            <a:solidFill>
-              <a:srgbClr val="C084FC"/>
-            </a:solidFill>
-            <a:prstDash val="solid"/>
-          </a:ln>
-        </p:spPr>
-      </p:sp>
-      <p:sp>
-        <p:nvSpPr>
-          <p:cNvPr id="22" name="Text 20"/>
-          <p:cNvSpPr/>
-          <p:nvPr/>
-        </p:nvSpPr>
-        <p:spPr>
-          <a:xfrm>
-            <a:off x="11018520" y="4709160"/>
-            <a:ext cx="384048" cy="384048"/>
-          </a:xfrm>
-          <a:prstGeom prst="rect">
-            <a:avLst/>
-          </a:prstGeom>
-          <a:noFill/>
-          <a:ln/>
-        </p:spPr>
-        <p:txBody>
-          <a:bodyPr wrap="square" lIns="0" tIns="0" rIns="0" bIns="0" rtlCol="0" anchor="ctr"/>
-          <a:lstStyle/>
-          <a:p>
-            <a:pPr algn="ctr" indent="0" marL="0">
-              <a:buNone/>
-            </a:pPr>
-            <a:r>
-              <a:rPr lang="en-US" sz="1600" b="1" dirty="0">
-                <a:solidFill>
-                  <a:srgbClr val="FFFFFF"/>
-                </a:solidFill>
-                <a:latin typeface="Arial" pitchFamily="34" charset="0"/>
-                <a:ea typeface="Arial" pitchFamily="34" charset="-122"/>
-                <a:cs typeface="Arial" pitchFamily="34" charset="-120"/>
-              </a:rPr>
-              <a:t>✓</a:t>
-            </a:r>
-            <a:endParaRPr lang="en-US" sz="1600" dirty="0"/>
-          </a:p>
-        </p:txBody>
-      </p:sp>
-      <p:sp>
-        <p:nvSpPr>
-          <p:cNvPr id="23" name="Text 21"/>
-          <p:cNvSpPr/>
-          <p:nvPr/>
-        </p:nvSpPr>
-        <p:spPr>
-          <a:xfrm>
-            <a:off x="6400800" y="4663440"/>
-            <a:ext cx="4526280" cy="502920"/>
-          </a:xfrm>
-          <a:prstGeom prst="rect">
-            <a:avLst/>
-          </a:prstGeom>
-          <a:noFill/>
-          <a:ln/>
-        </p:spPr>
-        <p:txBody>
-          <a:bodyPr wrap="square" lIns="0" tIns="0" rIns="0" bIns="0" rtlCol="0" anchor="ctr"/>
-          <a:lstStyle/>
-          <a:p>
-            <a:pPr rtl="1" algn="r" indent="0" marL="0">
-              <a:buNone/>
-            </a:pPr>
-            <a:r>
-              <a:rPr lang="en-US" sz="1400" dirty="0">
-                <a:solidFill>
-                  <a:srgbClr val="F8FAFC"/>
-                </a:solidFill>
-                <a:latin typeface="Arial" pitchFamily="34" charset="0"/>
-                <a:ea typeface="Arial" pitchFamily="34" charset="-122"/>
-                <a:cs typeface="Arial" pitchFamily="34" charset="-120"/>
-              </a:rPr>
-              <a:t>ניתוח EDA ראשוני של הקשתות</a:t>
-            </a:r>
-            <a:endParaRPr lang="en-US" sz="1400" dirty="0"/>
-          </a:p>
-        </p:txBody>
-      </p:sp>
-      <p:sp>
-        <p:nvSpPr>
-          <p:cNvPr id="24" name="Shape 22"/>
-          <p:cNvSpPr/>
-          <p:nvPr/>
-        </p:nvSpPr>
-        <p:spPr>
-          <a:xfrm>
-            <a:off x="548640" y="1691640"/>
-            <a:ext cx="5440680" cy="4572000"/>
-          </a:xfrm>
-          <a:prstGeom prst="roundRect">
-            <a:avLst>
-              <a:gd name="adj" fmla="val 3600"/>
-            </a:avLst>
-          </a:prstGeom>
-          <a:solidFill>
-            <a:srgbClr val="FFFFFF">
-              <a:alpha val="12000"/>
-            </a:srgbClr>
-          </a:solidFill>
-          <a:ln w="9525">
-            <a:solidFill>
-              <a:srgbClr val="FFFFFF">
-                <a:alpha val="30000"/>
-              </a:srgbClr>
-            </a:solidFill>
-            <a:prstDash val="solid"/>
-          </a:ln>
-          <a:effectLst>
-            <a:outerShdw sx="100000" sy="100000" kx="0" ky="0" algn="bl" rotWithShape="0" blurRad="279400" dist="76200" dir="5400000">
-              <a:srgbClr val="000000">
-                <a:alpha val="40000"/>
-              </a:srgbClr>
-            </a:outerShdw>
-          </a:effectLst>
-        </p:spPr>
-      </p:sp>
-      <p:sp>
-        <p:nvSpPr>
-          <p:cNvPr id="25" name="Shape 23"/>
-          <p:cNvSpPr/>
-          <p:nvPr/>
-        </p:nvSpPr>
-        <p:spPr>
-          <a:xfrm>
-            <a:off x="640080" y="1728216"/>
-            <a:ext cx="5257800" cy="18288"/>
-          </a:xfrm>
-          <a:prstGeom prst="rect">
-            <a:avLst/>
-          </a:prstGeom>
-          <a:solidFill>
-            <a:srgbClr val="FFFFFF">
-              <a:alpha val="35000"/>
-            </a:srgbClr>
-          </a:solidFill>
-          <a:ln/>
-        </p:spPr>
-      </p:sp>
-      <p:sp>
-        <p:nvSpPr>
-          <p:cNvPr id="26" name="Text 24"/>
-          <p:cNvSpPr/>
-          <p:nvPr/>
-        </p:nvSpPr>
-        <p:spPr>
-          <a:xfrm>
-            <a:off x="777240" y="1874520"/>
-            <a:ext cx="5029200" cy="365760"/>
-          </a:xfrm>
-          <a:prstGeom prst="rect">
-            <a:avLst/>
-          </a:prstGeom>
-          <a:noFill/>
-          <a:ln/>
-        </p:spPr>
-        <p:txBody>
-          <a:bodyPr wrap="square" lIns="0" tIns="0" rIns="0" bIns="0" rtlCol="0" anchor="ctr"/>
-          <a:lstStyle/>
-          <a:p>
-            <a:pPr rtl="1" algn="r" indent="0" marL="0">
-              <a:buNone/>
-            </a:pPr>
-            <a:r>
-              <a:rPr lang="en-US" sz="1100" b="1" spc="300" kern="0" dirty="0">
-                <a:solidFill>
-                  <a:srgbClr val="FBBF24"/>
-                </a:solidFill>
-                <a:latin typeface="Arial" pitchFamily="34" charset="0"/>
-                <a:ea typeface="Arial" pitchFamily="34" charset="-122"/>
-                <a:cs typeface="Arial" pitchFamily="34" charset="-120"/>
-              </a:rPr>
-              <a:t>תובנה מרכזית מה־EDA</a:t>
-            </a:r>
-            <a:endParaRPr lang="en-US" sz="1100" dirty="0"/>
-          </a:p>
-        </p:txBody>
-      </p:sp>
-      <p:sp>
-        <p:nvSpPr>
-          <p:cNvPr id="27" name="Text 25"/>
-          <p:cNvSpPr/>
-          <p:nvPr/>
-        </p:nvSpPr>
-        <p:spPr>
-          <a:xfrm>
-            <a:off x="777240" y="2331720"/>
-            <a:ext cx="5029200" cy="1280160"/>
-          </a:xfrm>
-          <a:prstGeom prst="rect">
-            <a:avLst/>
-          </a:prstGeom>
-          <a:noFill/>
-          <a:ln/>
-        </p:spPr>
-        <p:txBody>
-          <a:bodyPr wrap="square" lIns="0" tIns="0" rIns="0" bIns="0" rtlCol="0" anchor="ctr"/>
-          <a:lstStyle/>
-          <a:p>
-            <a:pPr algn="ctr" indent="0" marL="0">
-              <a:buNone/>
-            </a:pPr>
-            <a:r>
-              <a:rPr lang="en-US" sz="8800" b="1" dirty="0">
-                <a:solidFill>
-                  <a:srgbClr val="C084FC"/>
-                </a:solidFill>
-                <a:latin typeface="Arial" pitchFamily="34" charset="0"/>
-                <a:ea typeface="Arial" pitchFamily="34" charset="-122"/>
-                <a:cs typeface="Arial" pitchFamily="34" charset="-120"/>
-              </a:rPr>
-              <a:t>90%+</a:t>
-            </a:r>
-            <a:endParaRPr lang="en-US" sz="8800" dirty="0"/>
-          </a:p>
-        </p:txBody>
-      </p:sp>
-      <p:sp>
-        <p:nvSpPr>
-          <p:cNvPr id="28" name="Text 26"/>
-          <p:cNvSpPr/>
-          <p:nvPr/>
-        </p:nvSpPr>
-        <p:spPr>
-          <a:xfrm>
-            <a:off x="777240" y="3611880"/>
-            <a:ext cx="5029200" cy="457200"/>
-          </a:xfrm>
-          <a:prstGeom prst="rect">
-            <a:avLst/>
-          </a:prstGeom>
-          <a:noFill/>
-          <a:ln/>
-        </p:spPr>
-        <p:txBody>
-          <a:bodyPr wrap="square" lIns="0" tIns="0" rIns="0" bIns="0" rtlCol="0" anchor="ctr"/>
-          <a:lstStyle/>
-          <a:p>
-            <a:pPr rtl="1" algn="ctr" indent="0" marL="0">
-              <a:buNone/>
-            </a:pPr>
-            <a:r>
-              <a:rPr lang="en-US" sz="1600" dirty="0">
+            <a:pPr marL="0" indent="0" algn="r" rtl="1">
+              <a:buNone/>
+            </a:pPr>
+            <a:r>
+              <a:rPr lang="en-US" sz="1300" b="0" kern="0" spc="500" dirty="0">
                 <a:solidFill>
                   <a:srgbClr val="CBD5E1"/>
                 </a:solidFill>
@@ -9305,81 +9247,44 @@
                 <a:ea typeface="Arial" pitchFamily="34" charset="-122"/>
                 <a:cs typeface="Arial" pitchFamily="34" charset="-120"/>
               </a:rPr>
-              <a:t>מהקשתות ברשת חיוביות</a:t>
-            </a:r>
-            <a:endParaRPr lang="en-US" sz="1600" dirty="0"/>
-          </a:p>
-        </p:txBody>
-      </p:sp>
-      <p:sp>
-        <p:nvSpPr>
-          <p:cNvPr id="29" name="Shape 27"/>
-          <p:cNvSpPr/>
-          <p:nvPr/>
-        </p:nvSpPr>
-        <p:spPr>
-          <a:xfrm>
-            <a:off x="1371600" y="4160520"/>
-            <a:ext cx="3794760" cy="36576"/>
-          </a:xfrm>
-          <a:prstGeom prst="rect">
-            <a:avLst/>
-          </a:prstGeom>
-          <a:solidFill>
-            <a:srgbClr val="A855F7">
-              <a:alpha val="50000"/>
-            </a:srgbClr>
-          </a:solidFill>
-          <a:ln/>
-        </p:spPr>
-      </p:sp>
-      <p:sp>
-        <p:nvSpPr>
-          <p:cNvPr id="30" name="Text 28"/>
-          <p:cNvSpPr/>
-          <p:nvPr/>
-        </p:nvSpPr>
-        <p:spPr>
-          <a:xfrm>
-            <a:off x="868680" y="4389120"/>
-            <a:ext cx="4800600" cy="1691640"/>
-          </a:xfrm>
-          <a:prstGeom prst="rect">
-            <a:avLst/>
-          </a:prstGeom>
-          <a:noFill/>
-          <a:ln/>
-        </p:spPr>
-        <p:txBody>
-          <a:bodyPr wrap="square" lIns="0" tIns="0" rIns="0" bIns="0" rtlCol="0" anchor="t"/>
-          <a:lstStyle/>
-          <a:p>
-            <a:pPr rtl="1" algn="r" indent="0" marL="0">
-              <a:buNone/>
-            </a:pPr>
-            <a:r>
-              <a:rPr lang="en-US" sz="1300" dirty="0">
-                <a:solidFill>
-                  <a:srgbClr val="CBD5E1"/>
-                </a:solidFill>
-                <a:latin typeface="Arial" pitchFamily="34" charset="0"/>
-                <a:ea typeface="Arial" pitchFamily="34" charset="-122"/>
-                <a:cs typeface="Arial" pitchFamily="34" charset="-120"/>
-              </a:rPr>
-              <a:t>הקשתות השליליות מתרכזות סביב קבוצה ספציפית של משתמשים בעלי In-Degree שלילי גבוה — בדיוק האזור שבו אנחנו מצפים למצוא נוכלים.</a:t>
-            </a:r>
-            <a:endParaRPr lang="en-US" sz="1300" dirty="0"/>
-          </a:p>
-        </p:txBody>
-      </p:sp>
+              <a:t>הנוסחאות שמאחורי כל שלב — ממדדי מרכזיות ועד חיזוי קשרים</a:t>
+            </a:r>
+            <a:endParaRPr lang="en-US" sz="900" dirty="0"/>
+          </a:p>
+        </p:txBody>
+      </p:sp>
+      <p:pic>
+        <p:nvPicPr>
+          <p:cNvPr id="9" name="Picture 8" descr="assets_formulas.png"/>
+          <p:cNvPicPr>
+            <a:picLocks noChangeAspect="1"/>
+          </p:cNvPicPr>
+          <p:nvPr/>
+        </p:nvPicPr>
+        <p:blipFill>
+          <a:blip r:embed="rId3"/>
+          <a:stretch>
+            <a:fillRect/>
+          </a:stretch>
+        </p:blipFill>
+        <p:spPr>
+          <a:xfrm>
+            <a:off x="970964" y="1810512"/>
+            <a:ext cx="10247023" cy="4462272"/>
+          </a:xfrm>
+          <a:prstGeom prst="rect">
+            <a:avLst/>
+          </a:prstGeom>
+        </p:spPr>
+      </p:pic>
     </p:spTree>
   </p:cSld>
   <p:clrMapOvr>
     <a:masterClrMapping/>
   </p:clrMapOvr>
-  <mc:AlternateContent xmlns:mc="http://schemas.openxmlformats.org/markup-compatibility/2006">
-    <mc:Choice xmlns:p159="http://schemas.microsoft.com/office/powerpoint/2015/09/main" Requires="p159">
-      <p:transition spd="med" p159:dur="1500">
+  <mc:AlternateContent xmlns:mc="http://schemas.openxmlformats.org/markup-compatibility/2006" xmlns:p159="http://schemas.microsoft.com/office/powerpoint/2015/09/main">
+    <mc:Choice Requires="p159">
+      <p:transition spd="med">
         <p159:morph option="byObject"/>
       </p:transition>
     </mc:Choice>
@@ -9393,12 +9298,12 @@
 </file>
 
 <file path=ppt/slides/slide8.xml><?xml version="1.0" encoding="utf-8"?>
-<p:sld xmlns:mc="http://schemas.openxmlformats.org/markup-compatibility/2006" xmlns:a="http://schemas.openxmlformats.org/drawingml/2006/main" xmlns:r="http://schemas.openxmlformats.org/officeDocument/2006/relationships" xmlns:p="http://schemas.openxmlformats.org/presentationml/2006/main">
-  <p:cSld name="Slide 8">
+<p:sld xmlns:a="http://schemas.openxmlformats.org/drawingml/2006/main" xmlns:r="http://schemas.openxmlformats.org/officeDocument/2006/relationships" xmlns:p="http://schemas.openxmlformats.org/presentationml/2006/main">
+  <p:cSld>
     <p:bg>
       <p:bgPr>
         <a:blipFill dpi="0" rotWithShape="1">
-          <a:blip r:embed="rId1">
+          <a:blip r:embed="rId2">
             <a:lum/>
           </a:blip>
           <a:srcRect/>
@@ -9431,7 +9336,7 @@
         </p:nvSpPr>
         <p:spPr>
           <a:xfrm>
-            <a:off x="1371600" y="-914400"/>
+            <a:off x="-1371600" y="2743200"/>
             <a:ext cx="5486400" cy="5486400"/>
           </a:xfrm>
           <a:prstGeom prst="ellipse">
@@ -9444,13 +9349,20 @@
           </a:solidFill>
           <a:ln/>
           <a:effectLst>
-            <a:outerShdw sx="100000" sy="100000" kx="0" ky="0" algn="bl" rotWithShape="0" blurRad="1270000" dist="50800" dir="16200000">
+            <a:outerShdw blurRad="1270000" dist="50800" dir="16200000" algn="bl" rotWithShape="0">
               <a:srgbClr val="A855F7">
                 <a:alpha val="65000"/>
               </a:srgbClr>
             </a:outerShdw>
           </a:effectLst>
         </p:spPr>
+        <p:txBody>
+          <a:bodyPr/>
+          <a:lstStyle/>
+          <a:p>
+            <a:endParaRPr lang="en-IL"/>
+          </a:p>
+        </p:txBody>
       </p:sp>
       <p:sp>
         <p:nvSpPr>
@@ -9460,7 +9372,7 @@
         </p:nvSpPr>
         <p:spPr>
           <a:xfrm>
-            <a:off x="6858000" y="4114800"/>
+            <a:off x="7315200" y="-914400"/>
             <a:ext cx="5029200" cy="5029200"/>
           </a:xfrm>
           <a:prstGeom prst="ellipse">
@@ -9473,13 +9385,20 @@
           </a:solidFill>
           <a:ln/>
           <a:effectLst>
-            <a:outerShdw sx="100000" sy="100000" kx="0" ky="0" algn="bl" rotWithShape="0" blurRad="1270000" dist="50800" dir="16200000">
+            <a:outerShdw blurRad="1270000" dist="50800" dir="16200000" algn="bl" rotWithShape="0">
               <a:srgbClr val="EC4899">
                 <a:alpha val="55000"/>
               </a:srgbClr>
             </a:outerShdw>
           </a:effectLst>
         </p:spPr>
+        <p:txBody>
+          <a:bodyPr/>
+          <a:lstStyle/>
+          <a:p>
+            <a:endParaRPr lang="en-IL"/>
+          </a:p>
+        </p:txBody>
       </p:sp>
       <p:sp>
         <p:nvSpPr>
@@ -9502,11 +9421,11 @@
           <a:bodyPr wrap="square" lIns="0" tIns="0" rIns="0" bIns="0" rtlCol="0" anchor="ctr"/>
           <a:lstStyle/>
           <a:p>
-            <a:pPr rtl="1" algn="r" indent="0" marL="0">
-              <a:buNone/>
-            </a:pPr>
-            <a:r>
-              <a:rPr lang="en-US" sz="900" b="1" spc="500" kern="0" dirty="0">
+            <a:pPr marL="0" indent="0" algn="r" rtl="1">
+              <a:buNone/>
+            </a:pPr>
+            <a:r>
+              <a:rPr lang="en-US" sz="900" b="1" kern="0" spc="500" dirty="0">
                 <a:solidFill>
                   <a:srgbClr val="C084FC"/>
                 </a:solidFill>
@@ -9514,7 +9433,29 @@
                 <a:ea typeface="Arial" pitchFamily="34" charset="-122"/>
                 <a:cs typeface="Arial" pitchFamily="34" charset="-120"/>
               </a:rPr>
-              <a:t>BITCOIN OTC  ·  ניתוח רשתות אמון</a:t>
+              <a:t>BITCOIN OTC  ·  </a:t>
+            </a:r>
+            <a:r>
+              <a:rPr lang="he-IL" sz="900" b="1" kern="0" spc="500" dirty="0">
+                <a:solidFill>
+                  <a:srgbClr val="C084FC"/>
+                </a:solidFill>
+                <a:latin typeface="Arial" pitchFamily="34" charset="0"/>
+                <a:ea typeface="Arial" pitchFamily="34" charset="-122"/>
+                <a:cs typeface="Arial" pitchFamily="34" charset="-120"/>
+              </a:rPr>
+              <a:t> </a:t>
+            </a:r>
+            <a:r>
+              <a:rPr lang="en-US" sz="900" b="1" kern="0" spc="500" dirty="0">
+                <a:solidFill>
+                  <a:srgbClr val="C084FC"/>
+                </a:solidFill>
+                <a:latin typeface="Arial" pitchFamily="34" charset="0"/>
+                <a:ea typeface="Arial" pitchFamily="34" charset="-122"/>
+                <a:cs typeface="Arial" pitchFamily="34" charset="-120"/>
+              </a:rPr>
+              <a:t>ניתוח רשתות אמון</a:t>
             </a:r>
             <a:endParaRPr lang="en-US" sz="900" dirty="0"/>
           </a:p>
@@ -9541,7 +9482,7 @@
           <a:bodyPr wrap="square" lIns="0" tIns="0" rIns="0" bIns="0" rtlCol="0" anchor="t"/>
           <a:lstStyle/>
           <a:p>
-            <a:pPr rtl="1" algn="r" indent="0" marL="0">
+            <a:pPr marL="0" indent="0" algn="r" rtl="1">
               <a:buNone/>
             </a:pPr>
             <a:r>
@@ -9553,7 +9494,62 @@
                 <a:ea typeface="Arial" pitchFamily="34" charset="-122"/>
                 <a:cs typeface="Arial" pitchFamily="34" charset="-120"/>
               </a:rPr>
-              <a:t>גישת הפתרון ואופן ההערכה</a:t>
+              <a:t>גרף לדוגמא · </a:t>
+            </a:r>
+            <a:r>
+              <a:rPr lang="en-US" sz="3800" b="1" dirty="0" err="1">
+                <a:solidFill>
+                  <a:srgbClr val="F8FAFC"/>
+                </a:solidFill>
+                <a:latin typeface="Arial" pitchFamily="34" charset="0"/>
+                <a:ea typeface="Arial" pitchFamily="34" charset="-122"/>
+                <a:cs typeface="Arial" pitchFamily="34" charset="-120"/>
+              </a:rPr>
+              <a:t>דפוס</a:t>
+            </a:r>
+            <a:r>
+              <a:rPr lang="en-US" sz="3800" b="1" dirty="0">
+                <a:solidFill>
+                  <a:srgbClr val="F8FAFC"/>
+                </a:solidFill>
+                <a:latin typeface="Arial" pitchFamily="34" charset="0"/>
+                <a:ea typeface="Arial" pitchFamily="34" charset="-122"/>
+                <a:cs typeface="Arial" pitchFamily="34" charset="-120"/>
+              </a:rPr>
+              <a:t> </a:t>
+            </a:r>
+            <a:r>
+              <a:rPr lang="en-US" sz="3800" b="1" dirty="0" err="1">
+                <a:solidFill>
+                  <a:srgbClr val="F8FAFC"/>
+                </a:solidFill>
+                <a:latin typeface="Arial" pitchFamily="34" charset="0"/>
+                <a:ea typeface="Arial" pitchFamily="34" charset="-122"/>
+                <a:cs typeface="Arial" pitchFamily="34" charset="-120"/>
+              </a:rPr>
+              <a:t>התקפת</a:t>
+            </a:r>
+            <a:r>
+              <a:rPr lang="he-IL" sz="3800" b="1" dirty="0">
+                <a:solidFill>
+                  <a:srgbClr val="F8FAFC"/>
+                </a:solidFill>
+                <a:latin typeface="Arial" pitchFamily="34" charset="0"/>
+                <a:ea typeface="Arial" pitchFamily="34" charset="-122"/>
+                <a:cs typeface="Arial" pitchFamily="34" charset="-120"/>
+              </a:rPr>
+              <a:t> </a:t>
+            </a:r>
+            <a:r>
+              <a:rPr lang="en-US" sz="3800" b="1" dirty="0">
+                <a:solidFill>
+                  <a:srgbClr val="F8FAFC"/>
+                </a:solidFill>
+                <a:latin typeface="Arial" pitchFamily="34" charset="0"/>
+                <a:ea typeface="Arial" pitchFamily="34" charset="-122"/>
+                <a:cs typeface="Arial" pitchFamily="34" charset="-120"/>
+              </a:rPr>
+              <a:t> Sybil</a:t>
             </a:r>
             <a:endParaRPr lang="en-US" sz="3800" dirty="0"/>
           </a:p>
@@ -9578,6 +9574,13 @@
           </a:solidFill>
           <a:ln/>
         </p:spPr>
+        <p:txBody>
+          <a:bodyPr/>
+          <a:lstStyle/>
+          <a:p>
+            <a:endParaRPr lang="en-IL"/>
+          </a:p>
+        </p:txBody>
       </p:sp>
       <p:sp>
         <p:nvSpPr>
@@ -9600,11 +9603,11 @@
           <a:bodyPr wrap="square" lIns="0" tIns="0" rIns="0" bIns="0" rtlCol="0" anchor="ctr"/>
           <a:lstStyle/>
           <a:p>
-            <a:pPr algn="l" indent="0" marL="0">
-              <a:buNone/>
-            </a:pPr>
-            <a:r>
-              <a:rPr lang="en-US" sz="900" spc="200" kern="0" dirty="0">
+            <a:pPr marL="0" indent="0" algn="l">
+              <a:buNone/>
+            </a:pPr>
+            <a:r>
+              <a:rPr lang="en-US" sz="900" kern="0" spc="200" dirty="0">
                 <a:solidFill>
                   <a:srgbClr val="94A3B8"/>
                 </a:solidFill>
@@ -9639,11 +9642,11 @@
           <a:bodyPr wrap="square" lIns="0" tIns="0" rIns="0" bIns="0" rtlCol="0" anchor="ctr"/>
           <a:lstStyle/>
           <a:p>
-            <a:pPr algn="r" indent="0" marL="0">
-              <a:buNone/>
-            </a:pPr>
-            <a:r>
-              <a:rPr lang="en-US" sz="900" spc="200" kern="0" dirty="0">
+            <a:pPr marL="0" indent="0" algn="r">
+              <a:buNone/>
+            </a:pPr>
+            <a:r>
+              <a:rPr lang="en-US" sz="900" kern="0" spc="200" dirty="0">
                 <a:solidFill>
                   <a:srgbClr val="94A3B8"/>
                 </a:solidFill>
@@ -9659,94 +9662,14 @@
       </p:sp>
       <p:sp>
         <p:nvSpPr>
-          <p:cNvPr id="9" name="Shape 7"/>
-          <p:cNvSpPr/>
-          <p:nvPr/>
-        </p:nvSpPr>
-        <p:spPr>
-          <a:xfrm>
-            <a:off x="6263640" y="1691640"/>
-            <a:ext cx="5349240" cy="3291840"/>
-          </a:xfrm>
-          <a:prstGeom prst="roundRect">
-            <a:avLst>
-              <a:gd name="adj" fmla="val 5000"/>
-            </a:avLst>
-          </a:prstGeom>
-          <a:solidFill>
-            <a:srgbClr val="FFFFFF">
-              <a:alpha val="12000"/>
-            </a:srgbClr>
-          </a:solidFill>
-          <a:ln w="9525">
-            <a:solidFill>
-              <a:srgbClr val="FFFFFF">
-                <a:alpha val="30000"/>
-              </a:srgbClr>
-            </a:solidFill>
-            <a:prstDash val="solid"/>
-          </a:ln>
-          <a:effectLst>
-            <a:outerShdw sx="100000" sy="100000" kx="0" ky="0" algn="bl" rotWithShape="0" blurRad="279400" dist="76200" dir="5400000">
-              <a:srgbClr val="000000">
-                <a:alpha val="40000"/>
-              </a:srgbClr>
-            </a:outerShdw>
-          </a:effectLst>
-        </p:spPr>
-      </p:sp>
-      <p:sp>
-        <p:nvSpPr>
-          <p:cNvPr id="10" name="Shape 8"/>
-          <p:cNvSpPr/>
-          <p:nvPr/>
-        </p:nvSpPr>
-        <p:spPr>
-          <a:xfrm>
-            <a:off x="6355080" y="1728216"/>
-            <a:ext cx="5166360" cy="18288"/>
-          </a:xfrm>
-          <a:prstGeom prst="rect">
-            <a:avLst/>
-          </a:prstGeom>
-          <a:solidFill>
-            <a:srgbClr val="FFFFFF">
-              <a:alpha val="35000"/>
-            </a:srgbClr>
-          </a:solidFill>
-          <a:ln/>
-        </p:spPr>
-      </p:sp>
-      <p:sp>
-        <p:nvSpPr>
-          <p:cNvPr id="11" name="Shape 9"/>
-          <p:cNvSpPr/>
-          <p:nvPr/>
-        </p:nvSpPr>
-        <p:spPr>
-          <a:xfrm>
-            <a:off x="11475720" y="1783080"/>
-            <a:ext cx="64008" cy="3108960"/>
-          </a:xfrm>
-          <a:prstGeom prst="rect">
-            <a:avLst/>
-          </a:prstGeom>
-          <a:solidFill>
-            <a:srgbClr val="EC4899"/>
-          </a:solidFill>
-          <a:ln/>
-        </p:spPr>
-      </p:sp>
-      <p:sp>
-        <p:nvSpPr>
-          <p:cNvPr id="12" name="Text 10"/>
-          <p:cNvSpPr/>
-          <p:nvPr/>
-        </p:nvSpPr>
-        <p:spPr>
-          <a:xfrm>
-            <a:off x="6446520" y="1828800"/>
-            <a:ext cx="4937760" cy="365760"/>
+          <p:cNvPr id="10" name="Text 2"/>
+          <p:cNvSpPr/>
+          <p:nvPr/>
+        </p:nvSpPr>
+        <p:spPr>
+          <a:xfrm>
+            <a:off x="365760" y="1335024"/>
+            <a:ext cx="11430000" cy="365760"/>
           </a:xfrm>
           <a:prstGeom prst="rect">
             <a:avLst/>
@@ -9758,89 +9681,11 @@
           <a:bodyPr wrap="square" lIns="0" tIns="0" rIns="0" bIns="0" rtlCol="0" anchor="ctr"/>
           <a:lstStyle/>
           <a:p>
-            <a:pPr rtl="1" algn="r" indent="0" marL="0">
-              <a:buNone/>
-            </a:pPr>
-            <a:r>
-              <a:rPr lang="en-US" sz="1100" b="1" spc="300" kern="0" dirty="0">
-                <a:solidFill>
-                  <a:srgbClr val="EC4899"/>
-                </a:solidFill>
-                <a:latin typeface="Arial" pitchFamily="34" charset="0"/>
-                <a:ea typeface="Arial" pitchFamily="34" charset="-122"/>
-                <a:cs typeface="Arial" pitchFamily="34" charset="-120"/>
-              </a:rPr>
-              <a:t>האתגר</a:t>
-            </a:r>
-            <a:endParaRPr lang="en-US" sz="1100" dirty="0"/>
-          </a:p>
-        </p:txBody>
-      </p:sp>
-      <p:sp>
-        <p:nvSpPr>
-          <p:cNvPr id="13" name="Text 11"/>
-          <p:cNvSpPr/>
-          <p:nvPr/>
-        </p:nvSpPr>
-        <p:spPr>
-          <a:xfrm>
-            <a:off x="6446520" y="2194560"/>
-            <a:ext cx="4937760" cy="640080"/>
-          </a:xfrm>
-          <a:prstGeom prst="rect">
-            <a:avLst/>
-          </a:prstGeom>
-          <a:noFill/>
-          <a:ln/>
-        </p:spPr>
-        <p:txBody>
-          <a:bodyPr wrap="square" lIns="0" tIns="0" rIns="0" bIns="0" rtlCol="0" anchor="ctr"/>
-          <a:lstStyle/>
-          <a:p>
-            <a:pPr rtl="1" algn="r" indent="0" marL="0">
-              <a:buNone/>
-            </a:pPr>
-            <a:r>
-              <a:rPr lang="en-US" sz="2600" b="1" dirty="0">
-                <a:solidFill>
-                  <a:srgbClr val="F8FAFC"/>
-                </a:solidFill>
-                <a:latin typeface="Arial" pitchFamily="34" charset="0"/>
-                <a:ea typeface="Arial" pitchFamily="34" charset="-122"/>
-                <a:cs typeface="Arial" pitchFamily="34" charset="-120"/>
-              </a:rPr>
-              <a:t>אין Ground Truth</a:t>
-            </a:r>
-            <a:endParaRPr lang="en-US" sz="2600" dirty="0"/>
-          </a:p>
-        </p:txBody>
-      </p:sp>
-      <p:sp>
-        <p:nvSpPr>
-          <p:cNvPr id="14" name="Text 12"/>
-          <p:cNvSpPr/>
-          <p:nvPr/>
-        </p:nvSpPr>
-        <p:spPr>
-          <a:xfrm>
-            <a:off x="6446520" y="2926080"/>
-            <a:ext cx="4937760" cy="1783080"/>
-          </a:xfrm>
-          <a:prstGeom prst="rect">
-            <a:avLst/>
-          </a:prstGeom>
-          <a:noFill/>
-          <a:ln/>
-        </p:spPr>
-        <p:txBody>
-          <a:bodyPr wrap="square" lIns="0" tIns="0" rIns="0" bIns="0" rtlCol="0" anchor="t"/>
-          <a:lstStyle/>
-          <a:p>
-            <a:pPr rtl="1" algn="r" indent="0" marL="0">
-              <a:buNone/>
-            </a:pPr>
-            <a:r>
-              <a:rPr lang="en-US" sz="1400" dirty="0">
+            <a:pPr marL="0" indent="0" algn="r" rtl="1">
+              <a:buNone/>
+            </a:pPr>
+            <a:r>
+              <a:rPr lang="en-US" sz="1300" b="0" kern="0" spc="500" dirty="0">
                 <a:solidFill>
                   <a:srgbClr val="CBD5E1"/>
                 </a:solidFill>
@@ -9848,442 +9693,44 @@
                 <a:ea typeface="Arial" pitchFamily="34" charset="-122"/>
                 <a:cs typeface="Arial" pitchFamily="34" charset="-120"/>
               </a:rPr>
-              <a:t>אין רשימה של 100% מהנוכלים — ולכן אי אפשר לחשב Accuracy רגילה לאחוזי הצלחה.</a:t>
-            </a:r>
-            <a:endParaRPr lang="en-US" sz="1400" dirty="0"/>
-          </a:p>
-        </p:txBody>
-      </p:sp>
-      <p:sp>
-        <p:nvSpPr>
-          <p:cNvPr id="15" name="Shape 13"/>
-          <p:cNvSpPr/>
-          <p:nvPr/>
-        </p:nvSpPr>
-        <p:spPr>
-          <a:xfrm>
-            <a:off x="548640" y="1691640"/>
-            <a:ext cx="5486400" cy="3291840"/>
-          </a:xfrm>
-          <a:prstGeom prst="roundRect">
-            <a:avLst>
-              <a:gd name="adj" fmla="val 5000"/>
-            </a:avLst>
-          </a:prstGeom>
-          <a:solidFill>
-            <a:srgbClr val="FFFFFF">
-              <a:alpha val="12000"/>
-            </a:srgbClr>
-          </a:solidFill>
-          <a:ln w="9525">
-            <a:solidFill>
-              <a:srgbClr val="FFFFFF">
-                <a:alpha val="30000"/>
-              </a:srgbClr>
-            </a:solidFill>
-            <a:prstDash val="solid"/>
-          </a:ln>
-          <a:effectLst>
-            <a:outerShdw sx="100000" sy="100000" kx="0" ky="0" algn="bl" rotWithShape="0" blurRad="279400" dist="76200" dir="5400000">
-              <a:srgbClr val="000000">
-                <a:alpha val="40000"/>
-              </a:srgbClr>
-            </a:outerShdw>
-          </a:effectLst>
-        </p:spPr>
-      </p:sp>
-      <p:sp>
-        <p:nvSpPr>
-          <p:cNvPr id="16" name="Shape 14"/>
-          <p:cNvSpPr/>
-          <p:nvPr/>
-        </p:nvSpPr>
-        <p:spPr>
-          <a:xfrm>
-            <a:off x="640080" y="1728216"/>
-            <a:ext cx="5303520" cy="18288"/>
-          </a:xfrm>
-          <a:prstGeom prst="rect">
-            <a:avLst/>
-          </a:prstGeom>
-          <a:solidFill>
-            <a:srgbClr val="FFFFFF">
-              <a:alpha val="35000"/>
-            </a:srgbClr>
-          </a:solidFill>
-          <a:ln/>
-        </p:spPr>
-      </p:sp>
-      <p:sp>
-        <p:nvSpPr>
-          <p:cNvPr id="17" name="Shape 15"/>
-          <p:cNvSpPr/>
-          <p:nvPr/>
-        </p:nvSpPr>
-        <p:spPr>
-          <a:xfrm>
-            <a:off x="548640" y="1783080"/>
-            <a:ext cx="64008" cy="3108960"/>
-          </a:xfrm>
-          <a:prstGeom prst="rect">
-            <a:avLst/>
-          </a:prstGeom>
-          <a:solidFill>
-            <a:srgbClr val="22D3EE"/>
-          </a:solidFill>
-          <a:ln/>
-        </p:spPr>
-      </p:sp>
-      <p:sp>
-        <p:nvSpPr>
-          <p:cNvPr id="18" name="Text 16"/>
-          <p:cNvSpPr/>
-          <p:nvPr/>
-        </p:nvSpPr>
-        <p:spPr>
-          <a:xfrm>
-            <a:off x="731520" y="1828800"/>
-            <a:ext cx="5120640" cy="365760"/>
-          </a:xfrm>
-          <a:prstGeom prst="rect">
-            <a:avLst/>
-          </a:prstGeom>
-          <a:noFill/>
-          <a:ln/>
-        </p:spPr>
-        <p:txBody>
-          <a:bodyPr wrap="square" lIns="0" tIns="0" rIns="0" bIns="0" rtlCol="0" anchor="ctr"/>
-          <a:lstStyle/>
-          <a:p>
-            <a:pPr rtl="1" algn="r" indent="0" marL="0">
-              <a:buNone/>
-            </a:pPr>
-            <a:r>
-              <a:rPr lang="en-US" sz="1100" b="1" spc="300" kern="0" dirty="0">
-                <a:solidFill>
-                  <a:srgbClr val="22D3EE"/>
-                </a:solidFill>
-                <a:latin typeface="Arial" pitchFamily="34" charset="0"/>
-                <a:ea typeface="Arial" pitchFamily="34" charset="-122"/>
-                <a:cs typeface="Arial" pitchFamily="34" charset="-120"/>
-              </a:rPr>
-              <a:t>הפתרון</a:t>
-            </a:r>
-            <a:endParaRPr lang="en-US" sz="1100" dirty="0"/>
-          </a:p>
-        </p:txBody>
-      </p:sp>
-      <p:sp>
-        <p:nvSpPr>
-          <p:cNvPr id="19" name="Text 17"/>
-          <p:cNvSpPr/>
-          <p:nvPr/>
-        </p:nvSpPr>
-        <p:spPr>
-          <a:xfrm>
-            <a:off x="731520" y="2194560"/>
-            <a:ext cx="5120640" cy="640080"/>
-          </a:xfrm>
-          <a:prstGeom prst="rect">
-            <a:avLst/>
-          </a:prstGeom>
-          <a:noFill/>
-          <a:ln/>
-        </p:spPr>
-        <p:txBody>
-          <a:bodyPr wrap="square" lIns="0" tIns="0" rIns="0" bIns="0" rtlCol="0" anchor="ctr"/>
-          <a:lstStyle/>
-          <a:p>
-            <a:pPr rtl="1" algn="r" indent="0" marL="0">
-              <a:buNone/>
-            </a:pPr>
-            <a:r>
-              <a:rPr lang="en-US" sz="2600" b="1" dirty="0">
-                <a:solidFill>
-                  <a:srgbClr val="F8FAFC"/>
-                </a:solidFill>
-                <a:latin typeface="Arial" pitchFamily="34" charset="0"/>
-                <a:ea typeface="Arial" pitchFamily="34" charset="-122"/>
-                <a:cs typeface="Arial" pitchFamily="34" charset="-120"/>
-              </a:rPr>
-              <a:t>הצלבה (Cross-Validation)</a:t>
-            </a:r>
-            <a:endParaRPr lang="en-US" sz="2600" dirty="0"/>
-          </a:p>
-        </p:txBody>
-      </p:sp>
-      <p:sp>
-        <p:nvSpPr>
-          <p:cNvPr id="20" name="Text 18"/>
-          <p:cNvSpPr/>
-          <p:nvPr/>
-        </p:nvSpPr>
-        <p:spPr>
-          <a:xfrm>
-            <a:off x="731520" y="2926080"/>
-            <a:ext cx="5120640" cy="1783080"/>
-          </a:xfrm>
-          <a:prstGeom prst="rect">
-            <a:avLst/>
-          </a:prstGeom>
-          <a:noFill/>
-          <a:ln/>
-        </p:spPr>
-        <p:txBody>
-          <a:bodyPr wrap="square" lIns="0" tIns="0" rIns="0" bIns="0" rtlCol="0" anchor="t"/>
-          <a:lstStyle/>
-          <a:p>
-            <a:pPr rtl="1" algn="r" indent="0" marL="0">
-              <a:buNone/>
-            </a:pPr>
-            <a:r>
-              <a:rPr lang="en-US" sz="1400" dirty="0">
-                <a:solidFill>
-                  <a:srgbClr val="CBD5E1"/>
-                </a:solidFill>
-                <a:latin typeface="Arial" pitchFamily="34" charset="0"/>
-                <a:ea typeface="Arial" pitchFamily="34" charset="-122"/>
-                <a:cs typeface="Arial" pitchFamily="34" charset="-120"/>
-              </a:rPr>
-              <a:t>בדיקה האם קהילות חשודות שזיהינו אכן קיבלו דירוגים שליליים מצמתים בעלי PageRank גבוה לאורך הזמן.</a:t>
-            </a:r>
-            <a:endParaRPr lang="en-US" sz="1400" dirty="0"/>
-          </a:p>
-        </p:txBody>
-      </p:sp>
-      <p:sp>
-        <p:nvSpPr>
-          <p:cNvPr id="21" name="Shape 19"/>
-          <p:cNvSpPr/>
-          <p:nvPr/>
-        </p:nvSpPr>
-        <p:spPr>
-          <a:xfrm>
-            <a:off x="548640" y="5166360"/>
-            <a:ext cx="11064240" cy="1143000"/>
-          </a:xfrm>
-          <a:prstGeom prst="roundRect">
-            <a:avLst>
-              <a:gd name="adj" fmla="val 14400"/>
-            </a:avLst>
-          </a:prstGeom>
-          <a:solidFill>
-            <a:srgbClr val="FFFFFF">
-              <a:alpha val="12000"/>
-            </a:srgbClr>
-          </a:solidFill>
-          <a:ln w="9525">
-            <a:solidFill>
-              <a:srgbClr val="FFFFFF">
-                <a:alpha val="30000"/>
-              </a:srgbClr>
-            </a:solidFill>
-            <a:prstDash val="solid"/>
-          </a:ln>
-          <a:effectLst>
-            <a:outerShdw sx="100000" sy="100000" kx="0" ky="0" algn="bl" rotWithShape="0" blurRad="279400" dist="76200" dir="5400000">
-              <a:srgbClr val="000000">
-                <a:alpha val="40000"/>
-              </a:srgbClr>
-            </a:outerShdw>
-          </a:effectLst>
-        </p:spPr>
-      </p:sp>
-      <p:sp>
-        <p:nvSpPr>
-          <p:cNvPr id="22" name="Shape 20"/>
-          <p:cNvSpPr/>
-          <p:nvPr/>
-        </p:nvSpPr>
-        <p:spPr>
-          <a:xfrm>
-            <a:off x="640080" y="5202936"/>
-            <a:ext cx="10881360" cy="18288"/>
-          </a:xfrm>
-          <a:prstGeom prst="rect">
-            <a:avLst/>
-          </a:prstGeom>
-          <a:solidFill>
-            <a:srgbClr val="FFFFFF">
-              <a:alpha val="35000"/>
-            </a:srgbClr>
-          </a:solidFill>
-          <a:ln/>
-        </p:spPr>
-      </p:sp>
-      <p:sp>
-        <p:nvSpPr>
-          <p:cNvPr id="23" name="Text 21"/>
-          <p:cNvSpPr/>
-          <p:nvPr/>
-        </p:nvSpPr>
-        <p:spPr>
-          <a:xfrm>
-            <a:off x="777240" y="5285232"/>
-            <a:ext cx="10607040" cy="320040"/>
-          </a:xfrm>
-          <a:prstGeom prst="rect">
-            <a:avLst/>
-          </a:prstGeom>
-          <a:noFill/>
-          <a:ln/>
-        </p:spPr>
-        <p:txBody>
-          <a:bodyPr wrap="square" lIns="0" tIns="0" rIns="0" bIns="0" rtlCol="0" anchor="ctr"/>
-          <a:lstStyle/>
-          <a:p>
-            <a:pPr rtl="1" algn="r" indent="0" marL="0">
-              <a:buNone/>
-            </a:pPr>
-            <a:r>
-              <a:rPr lang="en-US" sz="1100" b="1" spc="300" kern="0" dirty="0">
-                <a:solidFill>
-                  <a:srgbClr val="C084FC"/>
-                </a:solidFill>
-                <a:latin typeface="Arial" pitchFamily="34" charset="0"/>
-                <a:ea typeface="Arial" pitchFamily="34" charset="-122"/>
-                <a:cs typeface="Arial" pitchFamily="34" charset="-120"/>
-              </a:rPr>
-              <a:t>חלוקה לפי ציר הזמן  ·  Train / Test Split</a:t>
-            </a:r>
-            <a:endParaRPr lang="en-US" sz="1100" dirty="0"/>
-          </a:p>
-        </p:txBody>
-      </p:sp>
-      <p:sp>
-        <p:nvSpPr>
-          <p:cNvPr id="24" name="Shape 22"/>
-          <p:cNvSpPr/>
-          <p:nvPr/>
-        </p:nvSpPr>
-        <p:spPr>
-          <a:xfrm>
-            <a:off x="3429000" y="5715000"/>
-            <a:ext cx="7955280" cy="320040"/>
-          </a:xfrm>
-          <a:prstGeom prst="roundRect">
-            <a:avLst>
-              <a:gd name="adj" fmla="val 14286"/>
-            </a:avLst>
-          </a:prstGeom>
-          <a:solidFill>
-            <a:srgbClr val="A855F7">
-              <a:alpha val="70000"/>
-            </a:srgbClr>
-          </a:solidFill>
-          <a:ln/>
-        </p:spPr>
-      </p:sp>
-      <p:sp>
-        <p:nvSpPr>
-          <p:cNvPr id="25" name="Shape 23"/>
-          <p:cNvSpPr/>
-          <p:nvPr/>
-        </p:nvSpPr>
-        <p:spPr>
-          <a:xfrm>
-            <a:off x="777240" y="5715000"/>
-            <a:ext cx="2651760" cy="320040"/>
-          </a:xfrm>
-          <a:prstGeom prst="roundRect">
-            <a:avLst>
-              <a:gd name="adj" fmla="val 14286"/>
-            </a:avLst>
-          </a:prstGeom>
-          <a:solidFill>
-            <a:srgbClr val="FBBF24">
-              <a:alpha val="70000"/>
-            </a:srgbClr>
-          </a:solidFill>
-          <a:ln/>
-        </p:spPr>
-      </p:sp>
-      <p:sp>
-        <p:nvSpPr>
-          <p:cNvPr id="26" name="Text 24"/>
-          <p:cNvSpPr/>
-          <p:nvPr/>
-        </p:nvSpPr>
-        <p:spPr>
-          <a:xfrm>
-            <a:off x="3429000" y="5715000"/>
-            <a:ext cx="7955280" cy="320040"/>
-          </a:xfrm>
-          <a:prstGeom prst="rect">
-            <a:avLst/>
-          </a:prstGeom>
-          <a:noFill/>
-          <a:ln/>
-        </p:spPr>
-        <p:txBody>
-          <a:bodyPr wrap="square" lIns="0" tIns="0" rIns="0" bIns="0" rtlCol="0" anchor="ctr"/>
-          <a:lstStyle/>
-          <a:p>
-            <a:pPr algn="ctr" indent="0" marL="0">
-              <a:buNone/>
-            </a:pPr>
-            <a:r>
-              <a:rPr lang="en-US" sz="1100" b="1" dirty="0">
-                <a:solidFill>
-                  <a:srgbClr val="FFFFFF"/>
-                </a:solidFill>
-                <a:latin typeface="Arial" pitchFamily="34" charset="0"/>
-                <a:ea typeface="Arial" pitchFamily="34" charset="-122"/>
-                <a:cs typeface="Arial" pitchFamily="34" charset="-120"/>
-              </a:rPr>
-              <a:t>Train  ·  2011–2014</a:t>
-            </a:r>
-            <a:endParaRPr lang="en-US" sz="1100" dirty="0"/>
-          </a:p>
-        </p:txBody>
-      </p:sp>
-      <p:sp>
-        <p:nvSpPr>
-          <p:cNvPr id="27" name="Text 25"/>
-          <p:cNvSpPr/>
-          <p:nvPr/>
-        </p:nvSpPr>
-        <p:spPr>
-          <a:xfrm>
-            <a:off x="777240" y="5715000"/>
-            <a:ext cx="2651760" cy="320040"/>
-          </a:xfrm>
-          <a:prstGeom prst="rect">
-            <a:avLst/>
-          </a:prstGeom>
-          <a:noFill/>
-          <a:ln/>
-        </p:spPr>
-        <p:txBody>
-          <a:bodyPr wrap="square" lIns="0" tIns="0" rIns="0" bIns="0" rtlCol="0" anchor="ctr"/>
-          <a:lstStyle/>
-          <a:p>
-            <a:pPr algn="ctr" indent="0" marL="0">
-              <a:buNone/>
-            </a:pPr>
-            <a:r>
-              <a:rPr lang="en-US" sz="1100" b="1" dirty="0">
-                <a:solidFill>
-                  <a:srgbClr val="FFFFFF"/>
-                </a:solidFill>
-                <a:latin typeface="Arial" pitchFamily="34" charset="0"/>
-                <a:ea typeface="Arial" pitchFamily="34" charset="-122"/>
-                <a:cs typeface="Arial" pitchFamily="34" charset="-120"/>
-              </a:rPr>
-              <a:t>Test  ·  2015</a:t>
-            </a:r>
-            <a:endParaRPr lang="en-US" sz="1100" dirty="0"/>
-          </a:p>
-        </p:txBody>
-      </p:sp>
+              <a:t>קהילה קטנה שמדרגת את עצמה חיובית — בעוד שכל הרשת מדרגת אותה שלילית</a:t>
+            </a:r>
+            <a:endParaRPr lang="en-US" sz="900" dirty="0"/>
+          </a:p>
+        </p:txBody>
+      </p:sp>
+      <p:pic>
+        <p:nvPicPr>
+          <p:cNvPr id="9" name="Picture 8" descr="assets_example_graph.png"/>
+          <p:cNvPicPr>
+            <a:picLocks noChangeAspect="1"/>
+          </p:cNvPicPr>
+          <p:nvPr/>
+        </p:nvPicPr>
+        <p:blipFill>
+          <a:blip r:embed="rId3"/>
+          <a:stretch>
+            <a:fillRect/>
+          </a:stretch>
+        </p:blipFill>
+        <p:spPr>
+          <a:xfrm>
+            <a:off x="1045290" y="1810512"/>
+            <a:ext cx="10098371" cy="4462272"/>
+          </a:xfrm>
+          <a:prstGeom prst="rect">
+            <a:avLst/>
+          </a:prstGeom>
+        </p:spPr>
+      </p:pic>
     </p:spTree>
   </p:cSld>
   <p:clrMapOvr>
     <a:masterClrMapping/>
   </p:clrMapOvr>
-  <mc:AlternateContent xmlns:mc="http://schemas.openxmlformats.org/markup-compatibility/2006">
-    <mc:Choice xmlns:p159="http://schemas.microsoft.com/office/powerpoint/2015/09/main" Requires="p159">
-      <p:transition spd="med" p159:dur="1500">
+  <mc:AlternateContent xmlns:mc="http://schemas.openxmlformats.org/markup-compatibility/2006" xmlns:p159="http://schemas.microsoft.com/office/powerpoint/2015/09/main">
+    <mc:Choice Requires="p159">
+      <p:transition spd="med">
         <p159:morph option="byObject"/>
       </p:transition>
     </mc:Choice>
@@ -10297,12 +9744,12 @@
 </file>
 
 <file path=ppt/slides/slide9.xml><?xml version="1.0" encoding="utf-8"?>
-<p:sld xmlns:mc="http://schemas.openxmlformats.org/markup-compatibility/2006" xmlns:a="http://schemas.openxmlformats.org/drawingml/2006/main" xmlns:r="http://schemas.openxmlformats.org/officeDocument/2006/relationships" xmlns:p="http://schemas.openxmlformats.org/presentationml/2006/main">
+<p:sld xmlns:a="http://schemas.openxmlformats.org/drawingml/2006/main" xmlns:r="http://schemas.openxmlformats.org/officeDocument/2006/relationships" xmlns:p="http://schemas.openxmlformats.org/presentationml/2006/main">
   <p:cSld name="Slide 9">
     <p:bg>
       <p:bgPr>
         <a:blipFill dpi="0" rotWithShape="1">
-          <a:blip r:embed="rId1">
+          <a:blip r:embed="rId3">
             <a:lum/>
           </a:blip>
           <a:srcRect/>
@@ -10348,13 +9795,20 @@
           </a:solidFill>
           <a:ln/>
           <a:effectLst>
-            <a:outerShdw sx="100000" sy="100000" kx="0" ky="0" algn="bl" rotWithShape="0" blurRad="1270000" dist="50800" dir="16200000">
+            <a:outerShdw blurRad="1270000" dist="50800" dir="16200000" algn="bl" rotWithShape="0">
               <a:srgbClr val="A855F7">
                 <a:alpha val="65000"/>
               </a:srgbClr>
             </a:outerShdw>
           </a:effectLst>
         </p:spPr>
+        <p:txBody>
+          <a:bodyPr/>
+          <a:lstStyle/>
+          <a:p>
+            <a:endParaRPr lang="en-IL"/>
+          </a:p>
+        </p:txBody>
       </p:sp>
       <p:sp>
         <p:nvSpPr>
@@ -10377,13 +9831,20 @@
           </a:solidFill>
           <a:ln/>
           <a:effectLst>
-            <a:outerShdw sx="100000" sy="100000" kx="0" ky="0" algn="bl" rotWithShape="0" blurRad="1270000" dist="50800" dir="16200000">
+            <a:outerShdw blurRad="1270000" dist="50800" dir="16200000" algn="bl" rotWithShape="0">
               <a:srgbClr val="22D3EE">
                 <a:alpha val="55000"/>
               </a:srgbClr>
             </a:outerShdw>
           </a:effectLst>
         </p:spPr>
+        <p:txBody>
+          <a:bodyPr/>
+          <a:lstStyle/>
+          <a:p>
+            <a:endParaRPr lang="en-IL"/>
+          </a:p>
+        </p:txBody>
       </p:sp>
       <p:sp>
         <p:nvSpPr>
@@ -10406,11 +9867,11 @@
           <a:bodyPr wrap="square" lIns="0" tIns="0" rIns="0" bIns="0" rtlCol="0" anchor="ctr"/>
           <a:lstStyle/>
           <a:p>
-            <a:pPr rtl="1" algn="r" indent="0" marL="0">
-              <a:buNone/>
-            </a:pPr>
-            <a:r>
-              <a:rPr lang="en-US" sz="900" b="1" spc="500" kern="0" dirty="0">
+            <a:pPr marL="0" indent="0" algn="r" rtl="1">
+              <a:buNone/>
+            </a:pPr>
+            <a:r>
+              <a:rPr lang="en-US" sz="900" b="1" kern="0" spc="500" dirty="0">
                 <a:solidFill>
                   <a:srgbClr val="C084FC"/>
                 </a:solidFill>
@@ -10418,7 +9879,29 @@
                 <a:ea typeface="Arial" pitchFamily="34" charset="-122"/>
                 <a:cs typeface="Arial" pitchFamily="34" charset="-120"/>
               </a:rPr>
-              <a:t>BITCOIN OTC  ·  ניתוח רשתות אמון</a:t>
+              <a:t>BITCOIN OTC  ·  </a:t>
+            </a:r>
+            <a:r>
+              <a:rPr lang="he-IL" sz="900" b="1" kern="0" spc="500" dirty="0">
+                <a:solidFill>
+                  <a:srgbClr val="C084FC"/>
+                </a:solidFill>
+                <a:latin typeface="Arial" pitchFamily="34" charset="0"/>
+                <a:ea typeface="Arial" pitchFamily="34" charset="-122"/>
+                <a:cs typeface="Arial" pitchFamily="34" charset="-120"/>
+              </a:rPr>
+              <a:t> ניתוח</a:t>
+            </a:r>
+            <a:r>
+              <a:rPr lang="en-US" sz="900" b="1" kern="0" spc="500" dirty="0">
+                <a:solidFill>
+                  <a:srgbClr val="C084FC"/>
+                </a:solidFill>
+                <a:latin typeface="Arial" pitchFamily="34" charset="0"/>
+                <a:ea typeface="Arial" pitchFamily="34" charset="-122"/>
+                <a:cs typeface="Arial" pitchFamily="34" charset="-120"/>
+              </a:rPr>
+              <a:t> רשתות אמון</a:t>
             </a:r>
             <a:endParaRPr lang="en-US" sz="900" dirty="0"/>
           </a:p>
@@ -10445,7 +9928,7 @@
           <a:bodyPr wrap="square" lIns="0" tIns="0" rIns="0" bIns="0" rtlCol="0" anchor="t"/>
           <a:lstStyle/>
           <a:p>
-            <a:pPr rtl="1" algn="r" indent="0" marL="0">
+            <a:pPr marL="0" indent="0" algn="r" rtl="1">
               <a:buNone/>
             </a:pPr>
             <a:r>
@@ -10482,6 +9965,13 @@
           </a:solidFill>
           <a:ln/>
         </p:spPr>
+        <p:txBody>
+          <a:bodyPr/>
+          <a:lstStyle/>
+          <a:p>
+            <a:endParaRPr lang="en-IL"/>
+          </a:p>
+        </p:txBody>
       </p:sp>
       <p:sp>
         <p:nvSpPr>
@@ -10504,11 +9994,11 @@
           <a:bodyPr wrap="square" lIns="0" tIns="0" rIns="0" bIns="0" rtlCol="0" anchor="ctr"/>
           <a:lstStyle/>
           <a:p>
-            <a:pPr algn="l" indent="0" marL="0">
-              <a:buNone/>
-            </a:pPr>
-            <a:r>
-              <a:rPr lang="en-US" sz="900" spc="200" kern="0" dirty="0">
+            <a:pPr marL="0" indent="0" algn="l">
+              <a:buNone/>
+            </a:pPr>
+            <a:r>
+              <a:rPr lang="en-US" sz="900" kern="0" spc="200" dirty="0">
                 <a:solidFill>
                   <a:srgbClr val="94A3B8"/>
                 </a:solidFill>
@@ -10543,11 +10033,11 @@
           <a:bodyPr wrap="square" lIns="0" tIns="0" rIns="0" bIns="0" rtlCol="0" anchor="ctr"/>
           <a:lstStyle/>
           <a:p>
-            <a:pPr algn="r" indent="0" marL="0">
-              <a:buNone/>
-            </a:pPr>
-            <a:r>
-              <a:rPr lang="en-US" sz="900" spc="200" kern="0" dirty="0">
+            <a:pPr marL="0" indent="0" algn="r">
+              <a:buNone/>
+            </a:pPr>
+            <a:r>
+              <a:rPr lang="en-US" sz="900" kern="0" spc="200" dirty="0">
                 <a:solidFill>
                   <a:srgbClr val="94A3B8"/>
                 </a:solidFill>
@@ -10591,13 +10081,20 @@
             <a:prstDash val="solid"/>
           </a:ln>
           <a:effectLst>
-            <a:outerShdw sx="100000" sy="100000" kx="0" ky="0" algn="bl" rotWithShape="0" blurRad="279400" dist="76200" dir="5400000">
+            <a:outerShdw blurRad="279400" dist="76200" dir="5400000" algn="bl" rotWithShape="0">
               <a:srgbClr val="000000">
                 <a:alpha val="40000"/>
               </a:srgbClr>
             </a:outerShdw>
           </a:effectLst>
         </p:spPr>
+        <p:txBody>
+          <a:bodyPr/>
+          <a:lstStyle/>
+          <a:p>
+            <a:endParaRPr lang="en-IL"/>
+          </a:p>
+        </p:txBody>
       </p:sp>
       <p:sp>
         <p:nvSpPr>
@@ -10620,6 +10117,13 @@
           </a:solidFill>
           <a:ln/>
         </p:spPr>
+        <p:txBody>
+          <a:bodyPr/>
+          <a:lstStyle/>
+          <a:p>
+            <a:endParaRPr lang="en-IL"/>
+          </a:p>
+        </p:txBody>
       </p:sp>
       <p:sp>
         <p:nvSpPr>
@@ -10645,13 +10149,20 @@
             <a:prstDash val="solid"/>
           </a:ln>
           <a:effectLst>
-            <a:outerShdw sx="100000" sy="100000" kx="0" ky="0" algn="bl" rotWithShape="0" blurRad="152400" dist="50800" dir="16200000">
+            <a:outerShdw blurRad="152400" dist="50800" dir="16200000" algn="bl" rotWithShape="0">
               <a:srgbClr val="A855F7">
                 <a:alpha val="80000"/>
               </a:srgbClr>
             </a:outerShdw>
           </a:effectLst>
         </p:spPr>
+        <p:txBody>
+          <a:bodyPr/>
+          <a:lstStyle/>
+          <a:p>
+            <a:endParaRPr lang="en-IL"/>
+          </a:p>
+        </p:txBody>
       </p:sp>
       <p:sp>
         <p:nvSpPr>
@@ -10674,7 +10185,7 @@
           <a:bodyPr wrap="square" lIns="0" tIns="0" rIns="0" bIns="0" rtlCol="0" anchor="ctr"/>
           <a:lstStyle/>
           <a:p>
-            <a:pPr algn="ctr" indent="0" marL="0">
+            <a:pPr marL="0" indent="0" algn="ctr">
               <a:buNone/>
             </a:pPr>
             <a:r>
@@ -10713,7 +10224,7 @@
           <a:bodyPr wrap="square" lIns="0" tIns="0" rIns="0" bIns="0" rtlCol="0" anchor="ctr"/>
           <a:lstStyle/>
           <a:p>
-            <a:pPr rtl="1" algn="r" indent="0" marL="0">
+            <a:pPr marL="0" indent="0" algn="r" rtl="1">
               <a:buNone/>
             </a:pPr>
             <a:r>
@@ -10752,7 +10263,7 @@
           <a:bodyPr wrap="square" lIns="0" tIns="0" rIns="0" bIns="0" rtlCol="0" anchor="t"/>
           <a:lstStyle/>
           <a:p>
-            <a:pPr rtl="1" algn="r" indent="0" marL="0">
+            <a:pPr marL="0" indent="0" algn="r" rtl="1">
               <a:buNone/>
             </a:pPr>
             <a:r>
@@ -10800,13 +10311,20 @@
             <a:prstDash val="solid"/>
           </a:ln>
           <a:effectLst>
-            <a:outerShdw sx="100000" sy="100000" kx="0" ky="0" algn="bl" rotWithShape="0" blurRad="279400" dist="76200" dir="5400000">
+            <a:outerShdw blurRad="279400" dist="76200" dir="5400000" algn="bl" rotWithShape="0">
               <a:srgbClr val="000000">
                 <a:alpha val="40000"/>
               </a:srgbClr>
             </a:outerShdw>
           </a:effectLst>
         </p:spPr>
+        <p:txBody>
+          <a:bodyPr/>
+          <a:lstStyle/>
+          <a:p>
+            <a:endParaRPr lang="en-IL"/>
+          </a:p>
+        </p:txBody>
       </p:sp>
       <p:sp>
         <p:nvSpPr>
@@ -10829,6 +10347,13 @@
           </a:solidFill>
           <a:ln/>
         </p:spPr>
+        <p:txBody>
+          <a:bodyPr/>
+          <a:lstStyle/>
+          <a:p>
+            <a:endParaRPr lang="en-IL"/>
+          </a:p>
+        </p:txBody>
       </p:sp>
       <p:sp>
         <p:nvSpPr>
@@ -10854,13 +10379,20 @@
             <a:prstDash val="solid"/>
           </a:ln>
           <a:effectLst>
-            <a:outerShdw sx="100000" sy="100000" kx="0" ky="0" algn="bl" rotWithShape="0" blurRad="152400" dist="50800" dir="16200000">
+            <a:outerShdw blurRad="152400" dist="50800" dir="16200000" algn="bl" rotWithShape="0">
               <a:srgbClr val="A855F7">
                 <a:alpha val="80000"/>
               </a:srgbClr>
             </a:outerShdw>
           </a:effectLst>
         </p:spPr>
+        <p:txBody>
+          <a:bodyPr/>
+          <a:lstStyle/>
+          <a:p>
+            <a:endParaRPr lang="en-IL"/>
+          </a:p>
+        </p:txBody>
       </p:sp>
       <p:sp>
         <p:nvSpPr>
@@ -10883,7 +10415,7 @@
           <a:bodyPr wrap="square" lIns="0" tIns="0" rIns="0" bIns="0" rtlCol="0" anchor="ctr"/>
           <a:lstStyle/>
           <a:p>
-            <a:pPr algn="ctr" indent="0" marL="0">
+            <a:pPr marL="0" indent="0" algn="ctr">
               <a:buNone/>
             </a:pPr>
             <a:r>
@@ -10922,7 +10454,7 @@
           <a:bodyPr wrap="square" lIns="0" tIns="0" rIns="0" bIns="0" rtlCol="0" anchor="ctr"/>
           <a:lstStyle/>
           <a:p>
-            <a:pPr rtl="1" algn="r" indent="0" marL="0">
+            <a:pPr marL="0" indent="0" algn="r" rtl="1">
               <a:buNone/>
             </a:pPr>
             <a:r>
@@ -10961,7 +10493,7 @@
           <a:bodyPr wrap="square" lIns="0" tIns="0" rIns="0" bIns="0" rtlCol="0" anchor="t"/>
           <a:lstStyle/>
           <a:p>
-            <a:pPr rtl="1" algn="r" indent="0" marL="0">
+            <a:pPr marL="0" indent="0" algn="r" rtl="1">
               <a:buNone/>
             </a:pPr>
             <a:r>
@@ -10973,7 +10505,7 @@
                 <a:ea typeface="Arial" pitchFamily="34" charset="-122"/>
                 <a:cs typeface="Arial" pitchFamily="34" charset="-120"/>
               </a:rPr>
-              <a:t>אלגוריתם החיזוי + מדדי שגיאה (Precision / Recall / F1).</a:t>
+              <a:t>trust-F1 גבוה (0.93) אך fraud-recall נמוך (0.06) — שיפורו (SMOTE / cost-sensitive) הוא היעד המרכזי.</a:t>
             </a:r>
             <a:endParaRPr lang="en-US" sz="1300" dirty="0"/>
           </a:p>
@@ -11009,13 +10541,20 @@
             <a:prstDash val="solid"/>
           </a:ln>
           <a:effectLst>
-            <a:outerShdw sx="100000" sy="100000" kx="0" ky="0" algn="bl" rotWithShape="0" blurRad="279400" dist="76200" dir="5400000">
+            <a:outerShdw blurRad="279400" dist="76200" dir="5400000" algn="bl" rotWithShape="0">
               <a:srgbClr val="000000">
                 <a:alpha val="40000"/>
               </a:srgbClr>
             </a:outerShdw>
           </a:effectLst>
         </p:spPr>
+        <p:txBody>
+          <a:bodyPr/>
+          <a:lstStyle/>
+          <a:p>
+            <a:endParaRPr lang="en-IL"/>
+          </a:p>
+        </p:txBody>
       </p:sp>
       <p:sp>
         <p:nvSpPr>
@@ -11038,6 +10577,13 @@
           </a:solidFill>
           <a:ln/>
         </p:spPr>
+        <p:txBody>
+          <a:bodyPr/>
+          <a:lstStyle/>
+          <a:p>
+            <a:endParaRPr lang="en-IL"/>
+          </a:p>
+        </p:txBody>
       </p:sp>
       <p:sp>
         <p:nvSpPr>
@@ -11063,13 +10609,20 @@
             <a:prstDash val="solid"/>
           </a:ln>
           <a:effectLst>
-            <a:outerShdw sx="100000" sy="100000" kx="0" ky="0" algn="bl" rotWithShape="0" blurRad="152400" dist="50800" dir="16200000">
+            <a:outerShdw blurRad="152400" dist="50800" dir="16200000" algn="bl" rotWithShape="0">
               <a:srgbClr val="A855F7">
                 <a:alpha val="80000"/>
               </a:srgbClr>
             </a:outerShdw>
           </a:effectLst>
         </p:spPr>
+        <p:txBody>
+          <a:bodyPr/>
+          <a:lstStyle/>
+          <a:p>
+            <a:endParaRPr lang="en-IL"/>
+          </a:p>
+        </p:txBody>
       </p:sp>
       <p:sp>
         <p:nvSpPr>
@@ -11092,7 +10645,7 @@
           <a:bodyPr wrap="square" lIns="0" tIns="0" rIns="0" bIns="0" rtlCol="0" anchor="ctr"/>
           <a:lstStyle/>
           <a:p>
-            <a:pPr algn="ctr" indent="0" marL="0">
+            <a:pPr marL="0" indent="0" algn="ctr">
               <a:buNone/>
             </a:pPr>
             <a:r>
@@ -11131,7 +10684,7 @@
           <a:bodyPr wrap="square" lIns="0" tIns="0" rIns="0" bIns="0" rtlCol="0" anchor="ctr"/>
           <a:lstStyle/>
           <a:p>
-            <a:pPr rtl="1" algn="r" indent="0" marL="0">
+            <a:pPr marL="0" indent="0" algn="r" rtl="1">
               <a:buNone/>
             </a:pPr>
             <a:r>
@@ -11170,7 +10723,7 @@
           <a:bodyPr wrap="square" lIns="0" tIns="0" rIns="0" bIns="0" rtlCol="0" anchor="t"/>
           <a:lstStyle/>
           <a:p>
-            <a:pPr rtl="1" algn="r" indent="0" marL="0">
+            <a:pPr marL="0" indent="0" algn="r" rtl="1">
               <a:buNone/>
             </a:pPr>
             <a:r>
@@ -11218,13 +10771,20 @@
             <a:prstDash val="solid"/>
           </a:ln>
           <a:effectLst>
-            <a:outerShdw sx="100000" sy="100000" kx="0" ky="0" algn="bl" rotWithShape="0" blurRad="279400" dist="76200" dir="5400000">
+            <a:outerShdw blurRad="279400" dist="76200" dir="5400000" algn="bl" rotWithShape="0">
               <a:srgbClr val="000000">
                 <a:alpha val="40000"/>
               </a:srgbClr>
             </a:outerShdw>
           </a:effectLst>
         </p:spPr>
+        <p:txBody>
+          <a:bodyPr/>
+          <a:lstStyle/>
+          <a:p>
+            <a:endParaRPr lang="en-IL"/>
+          </a:p>
+        </p:txBody>
       </p:sp>
       <p:sp>
         <p:nvSpPr>
@@ -11247,6 +10807,13 @@
           </a:solidFill>
           <a:ln/>
         </p:spPr>
+        <p:txBody>
+          <a:bodyPr/>
+          <a:lstStyle/>
+          <a:p>
+            <a:endParaRPr lang="en-IL"/>
+          </a:p>
+        </p:txBody>
       </p:sp>
       <p:sp>
         <p:nvSpPr>
@@ -11272,13 +10839,20 @@
             <a:prstDash val="solid"/>
           </a:ln>
           <a:effectLst>
-            <a:outerShdw sx="100000" sy="100000" kx="0" ky="0" algn="bl" rotWithShape="0" blurRad="152400" dist="50800" dir="16200000">
+            <a:outerShdw blurRad="152400" dist="50800" dir="16200000" algn="bl" rotWithShape="0">
               <a:srgbClr val="A855F7">
                 <a:alpha val="80000"/>
               </a:srgbClr>
             </a:outerShdw>
           </a:effectLst>
         </p:spPr>
+        <p:txBody>
+          <a:bodyPr/>
+          <a:lstStyle/>
+          <a:p>
+            <a:endParaRPr lang="en-IL"/>
+          </a:p>
+        </p:txBody>
       </p:sp>
       <p:sp>
         <p:nvSpPr>
@@ -11301,7 +10875,7 @@
           <a:bodyPr wrap="square" lIns="0" tIns="0" rIns="0" bIns="0" rtlCol="0" anchor="ctr"/>
           <a:lstStyle/>
           <a:p>
-            <a:pPr algn="ctr" indent="0" marL="0">
+            <a:pPr marL="0" indent="0" algn="ctr">
               <a:buNone/>
             </a:pPr>
             <a:r>
@@ -11340,7 +10914,7 @@
           <a:bodyPr wrap="square" lIns="0" tIns="0" rIns="0" bIns="0" rtlCol="0" anchor="ctr"/>
           <a:lstStyle/>
           <a:p>
-            <a:pPr rtl="1" algn="r" indent="0" marL="0">
+            <a:pPr marL="0" indent="0" algn="r" rtl="1">
               <a:buNone/>
             </a:pPr>
             <a:r>
@@ -11360,7 +10934,7 @@
       </p:sp>
       <p:sp>
         <p:nvSpPr>
-          <p:cNvPr id="32" name="Text 30"/>
+          <p:cNvPr id="32" name="Text 24"/>
           <p:cNvSpPr/>
           <p:nvPr/>
         </p:nvSpPr>
@@ -11379,7 +10953,7 @@
           <a:bodyPr wrap="square" lIns="0" tIns="0" rIns="0" bIns="0" rtlCol="0" anchor="t"/>
           <a:lstStyle/>
           <a:p>
-            <a:pPr rtl="1" algn="r" indent="0" marL="0">
+            <a:pPr marL="0" indent="0" algn="r" rtl="1">
               <a:buNone/>
             </a:pPr>
             <a:r>
@@ -11391,7 +10965,7 @@
                 <a:ea typeface="Arial" pitchFamily="34" charset="-122"/>
                 <a:cs typeface="Arial" pitchFamily="34" charset="-120"/>
               </a:rPr>
-              <a:t>6–8 עמודים, כולל פירוט תרומת כל חבר צוות.</a:t>
+              <a:t>כתיבת הדוח המסכם (6–8 עמ'): מבוא, עבודה קשורה, שיטה, תוצאות ומסקנות עם פירוש הממצאים.</a:t>
             </a:r>
             <a:endParaRPr lang="en-US" sz="1300" dirty="0"/>
           </a:p>
@@ -11402,13 +10976,13 @@
   <p:clrMapOvr>
     <a:masterClrMapping/>
   </p:clrMapOvr>
-  <mc:AlternateContent xmlns:mc="http://schemas.openxmlformats.org/markup-compatibility/2006">
-    <mc:Choice xmlns:p159="http://schemas.microsoft.com/office/powerpoint/2015/09/main" Requires="p159">
-      <p:transition spd="med" p159:dur="1500">
+  <mc:AlternateContent xmlns:mc="http://schemas.openxmlformats.org/markup-compatibility/2006" xmlns:p159="http://schemas.microsoft.com/office/powerpoint/2015/09/main">
+    <mc:Choice Requires="p159">
+      <p:transition spd="med">
         <p159:morph option="byObject"/>
       </p:transition>
     </mc:Choice>
-    <mc:Fallback>
+    <mc:Fallback xmlns="">
       <p:transition spd="med">
         <p:fade/>
       </p:transition>
@@ -11710,4 +11284,319 @@
     </a:ext>
   </a:extLst>
 </a:theme>
+</file>
+
+<file path=ppt/theme/theme2.xml><?xml version="1.0" encoding="utf-8"?>
+<a:theme xmlns:a="http://schemas.openxmlformats.org/drawingml/2006/main" name="Office Theme">
+  <a:themeElements>
+    <a:clrScheme name="Office">
+      <a:dk1>
+        <a:sysClr val="windowText" lastClr="000000"/>
+      </a:dk1>
+      <a:lt1>
+        <a:sysClr val="window" lastClr="FFFFFF"/>
+      </a:lt1>
+      <a:dk2>
+        <a:srgbClr val="0E2841"/>
+      </a:dk2>
+      <a:lt2>
+        <a:srgbClr val="E8E8E8"/>
+      </a:lt2>
+      <a:accent1>
+        <a:srgbClr val="156082"/>
+      </a:accent1>
+      <a:accent2>
+        <a:srgbClr val="E97132"/>
+      </a:accent2>
+      <a:accent3>
+        <a:srgbClr val="196B24"/>
+      </a:accent3>
+      <a:accent4>
+        <a:srgbClr val="0F9ED5"/>
+      </a:accent4>
+      <a:accent5>
+        <a:srgbClr val="A02B93"/>
+      </a:accent5>
+      <a:accent6>
+        <a:srgbClr val="4EA72E"/>
+      </a:accent6>
+      <a:hlink>
+        <a:srgbClr val="467886"/>
+      </a:hlink>
+      <a:folHlink>
+        <a:srgbClr val="96607D"/>
+      </a:folHlink>
+    </a:clrScheme>
+    <a:fontScheme name="Office">
+      <a:majorFont>
+        <a:latin typeface="Aptos Display" panose="02110004020202020204"/>
+        <a:ea typeface=""/>
+        <a:cs typeface=""/>
+        <a:font script="Jpan" typeface="游ゴシック Light"/>
+        <a:font script="Hang" typeface="맑은 고딕"/>
+        <a:font script="Hans" typeface="等线 Light"/>
+        <a:font script="Hant" typeface="新細明體"/>
+        <a:font script="Arab" typeface="Times New Roman"/>
+        <a:font script="Hebr" typeface="Times New Roman"/>
+        <a:font script="Thai" typeface="Angsana New"/>
+        <a:font script="Ethi" typeface="Nyala"/>
+        <a:font script="Beng" typeface="Vrinda"/>
+        <a:font script="Gujr" typeface="Shruti"/>
+        <a:font script="Khmr" typeface="MoolBoran"/>
+        <a:font script="Knda" typeface="Tunga"/>
+        <a:font script="Guru" typeface="Raavi"/>
+        <a:font script="Cans" typeface="Euphemia"/>
+        <a:font script="Cher" typeface="Plantagenet Cherokee"/>
+        <a:font script="Yiii" typeface="Microsoft Yi Baiti"/>
+        <a:font script="Tibt" typeface="Microsoft Himalaya"/>
+        <a:font script="Thaa" typeface="MV Boli"/>
+        <a:font script="Deva" typeface="Mangal"/>
+        <a:font script="Telu" typeface="Gautami"/>
+        <a:font script="Taml" typeface="Latha"/>
+        <a:font script="Syrc" typeface="Estrangelo Edessa"/>
+        <a:font script="Orya" typeface="Kalinga"/>
+        <a:font script="Mlym" typeface="Kartika"/>
+        <a:font script="Laoo" typeface="DokChampa"/>
+        <a:font script="Sinh" typeface="Iskoola Pota"/>
+        <a:font script="Mong" typeface="Mongolian Baiti"/>
+        <a:font script="Viet" typeface="Times New Roman"/>
+        <a:font script="Uigh" typeface="Microsoft Uighur"/>
+        <a:font script="Geor" typeface="Sylfaen"/>
+        <a:font script="Armn" typeface="Arial"/>
+        <a:font script="Bugi" typeface="Leelawadee UI"/>
+        <a:font script="Bopo" typeface="Microsoft JhengHei"/>
+        <a:font script="Java" typeface="Javanese Text"/>
+        <a:font script="Lisu" typeface="Segoe UI"/>
+        <a:font script="Mymr" typeface="Myanmar Text"/>
+        <a:font script="Nkoo" typeface="Ebrima"/>
+        <a:font script="Olck" typeface="Nirmala UI"/>
+        <a:font script="Osma" typeface="Ebrima"/>
+        <a:font script="Phag" typeface="Phagspa"/>
+        <a:font script="Syrn" typeface="Estrangelo Edessa"/>
+        <a:font script="Syrj" typeface="Estrangelo Edessa"/>
+        <a:font script="Syre" typeface="Estrangelo Edessa"/>
+        <a:font script="Sora" typeface="Nirmala UI"/>
+        <a:font script="Tale" typeface="Microsoft Tai Le"/>
+        <a:font script="Talu" typeface="Microsoft New Tai Lue"/>
+        <a:font script="Tfng" typeface="Ebrima"/>
+      </a:majorFont>
+      <a:minorFont>
+        <a:latin typeface="Aptos" panose="02110004020202020204"/>
+        <a:ea typeface=""/>
+        <a:cs typeface=""/>
+        <a:font script="Jpan" typeface="游ゴシック"/>
+        <a:font script="Hang" typeface="맑은 고딕"/>
+        <a:font script="Hans" typeface="等线"/>
+        <a:font script="Hant" typeface="新細明體"/>
+        <a:font script="Arab" typeface="Arial"/>
+        <a:font script="Hebr" typeface="Arial"/>
+        <a:font script="Thai" typeface="Cordia New"/>
+        <a:font script="Ethi" typeface="Nyala"/>
+        <a:font script="Beng" typeface="Vrinda"/>
+        <a:font script="Gujr" typeface="Shruti"/>
+        <a:font script="Khmr" typeface="DaunPenh"/>
+        <a:font script="Knda" typeface="Tunga"/>
+        <a:font script="Guru" typeface="Raavi"/>
+        <a:font script="Cans" typeface="Euphemia"/>
+        <a:font script="Cher" typeface="Plantagenet Cherokee"/>
+        <a:font script="Yiii" typeface="Microsoft Yi Baiti"/>
+        <a:font script="Tibt" typeface="Microsoft Himalaya"/>
+        <a:font script="Thaa" typeface="MV Boli"/>
+        <a:font script="Deva" typeface="Mangal"/>
+        <a:font script="Telu" typeface="Gautami"/>
+        <a:font script="Taml" typeface="Latha"/>
+        <a:font script="Syrc" typeface="Estrangelo Edessa"/>
+        <a:font script="Orya" typeface="Kalinga"/>
+        <a:font script="Mlym" typeface="Kartika"/>
+        <a:font script="Laoo" typeface="DokChampa"/>
+        <a:font script="Sinh" typeface="Iskoola Pota"/>
+        <a:font script="Mong" typeface="Mongolian Baiti"/>
+        <a:font script="Viet" typeface="Arial"/>
+        <a:font script="Uigh" typeface="Microsoft Uighur"/>
+        <a:font script="Geor" typeface="Sylfaen"/>
+        <a:font script="Armn" typeface="Arial"/>
+        <a:font script="Bugi" typeface="Leelawadee UI"/>
+        <a:font script="Bopo" typeface="Microsoft JhengHei"/>
+        <a:font script="Java" typeface="Javanese Text"/>
+        <a:font script="Lisu" typeface="Segoe UI"/>
+        <a:font script="Mymr" typeface="Myanmar Text"/>
+        <a:font script="Nkoo" typeface="Ebrima"/>
+        <a:font script="Olck" typeface="Nirmala UI"/>
+        <a:font script="Osma" typeface="Ebrima"/>
+        <a:font script="Phag" typeface="Phagspa"/>
+        <a:font script="Syrn" typeface="Estrangelo Edessa"/>
+        <a:font script="Syrj" typeface="Estrangelo Edessa"/>
+        <a:font script="Syre" typeface="Estrangelo Edessa"/>
+        <a:font script="Sora" typeface="Nirmala UI"/>
+        <a:font script="Tale" typeface="Microsoft Tai Le"/>
+        <a:font script="Talu" typeface="Microsoft New Tai Lue"/>
+        <a:font script="Tfng" typeface="Ebrima"/>
+      </a:minorFont>
+    </a:fontScheme>
+    <a:fmtScheme name="Office">
+      <a:fillStyleLst>
+        <a:solidFill>
+          <a:schemeClr val="phClr"/>
+        </a:solidFill>
+        <a:gradFill rotWithShape="1">
+          <a:gsLst>
+            <a:gs pos="0">
+              <a:schemeClr val="phClr">
+                <a:lumMod val="110000"/>
+                <a:satMod val="105000"/>
+                <a:tint val="67000"/>
+              </a:schemeClr>
+            </a:gs>
+            <a:gs pos="50000">
+              <a:schemeClr val="phClr">
+                <a:lumMod val="105000"/>
+                <a:satMod val="103000"/>
+                <a:tint val="73000"/>
+              </a:schemeClr>
+            </a:gs>
+            <a:gs pos="100000">
+              <a:schemeClr val="phClr">
+                <a:lumMod val="105000"/>
+                <a:satMod val="109000"/>
+                <a:tint val="81000"/>
+              </a:schemeClr>
+            </a:gs>
+          </a:gsLst>
+          <a:lin ang="5400000" scaled="0"/>
+        </a:gradFill>
+        <a:gradFill rotWithShape="1">
+          <a:gsLst>
+            <a:gs pos="0">
+              <a:schemeClr val="phClr">
+                <a:satMod val="103000"/>
+                <a:lumMod val="102000"/>
+                <a:tint val="94000"/>
+              </a:schemeClr>
+            </a:gs>
+            <a:gs pos="50000">
+              <a:schemeClr val="phClr">
+                <a:satMod val="110000"/>
+                <a:lumMod val="100000"/>
+                <a:shade val="100000"/>
+              </a:schemeClr>
+            </a:gs>
+            <a:gs pos="100000">
+              <a:schemeClr val="phClr">
+                <a:lumMod val="99000"/>
+                <a:satMod val="120000"/>
+                <a:shade val="78000"/>
+              </a:schemeClr>
+            </a:gs>
+          </a:gsLst>
+          <a:lin ang="5400000" scaled="0"/>
+        </a:gradFill>
+      </a:fillStyleLst>
+      <a:lnStyleLst>
+        <a:ln w="12700" cap="flat" cmpd="sng" algn="ctr">
+          <a:solidFill>
+            <a:schemeClr val="phClr"/>
+          </a:solidFill>
+          <a:prstDash val="solid"/>
+          <a:miter lim="800000"/>
+        </a:ln>
+        <a:ln w="19050" cap="flat" cmpd="sng" algn="ctr">
+          <a:solidFill>
+            <a:schemeClr val="phClr"/>
+          </a:solidFill>
+          <a:prstDash val="solid"/>
+          <a:miter lim="800000"/>
+        </a:ln>
+        <a:ln w="25400" cap="flat" cmpd="sng" algn="ctr">
+          <a:solidFill>
+            <a:schemeClr val="phClr"/>
+          </a:solidFill>
+          <a:prstDash val="solid"/>
+          <a:miter lim="800000"/>
+        </a:ln>
+      </a:lnStyleLst>
+      <a:effectStyleLst>
+        <a:effectStyle>
+          <a:effectLst/>
+        </a:effectStyle>
+        <a:effectStyle>
+          <a:effectLst/>
+        </a:effectStyle>
+        <a:effectStyle>
+          <a:effectLst>
+            <a:outerShdw blurRad="57150" dist="19050" dir="5400000" algn="ctr" rotWithShape="0">
+              <a:srgbClr val="000000">
+                <a:alpha val="63000"/>
+              </a:srgbClr>
+            </a:outerShdw>
+          </a:effectLst>
+        </a:effectStyle>
+      </a:effectStyleLst>
+      <a:bgFillStyleLst>
+        <a:solidFill>
+          <a:schemeClr val="phClr"/>
+        </a:solidFill>
+        <a:solidFill>
+          <a:schemeClr val="phClr">
+            <a:tint val="95000"/>
+            <a:satMod val="170000"/>
+          </a:schemeClr>
+        </a:solidFill>
+        <a:gradFill rotWithShape="1">
+          <a:gsLst>
+            <a:gs pos="0">
+              <a:schemeClr val="phClr">
+                <a:tint val="93000"/>
+                <a:satMod val="150000"/>
+                <a:shade val="98000"/>
+                <a:lumMod val="102000"/>
+              </a:schemeClr>
+            </a:gs>
+            <a:gs pos="50000">
+              <a:schemeClr val="phClr">
+                <a:tint val="98000"/>
+                <a:satMod val="130000"/>
+                <a:shade val="90000"/>
+                <a:lumMod val="103000"/>
+              </a:schemeClr>
+            </a:gs>
+            <a:gs pos="100000">
+              <a:schemeClr val="phClr">
+                <a:shade val="63000"/>
+                <a:satMod val="120000"/>
+              </a:schemeClr>
+            </a:gs>
+          </a:gsLst>
+          <a:lin ang="5400000" scaled="0"/>
+        </a:gradFill>
+      </a:bgFillStyleLst>
+    </a:fmtScheme>
+  </a:themeElements>
+  <a:objectDefaults>
+    <a:lnDef>
+      <a:spPr/>
+      <a:bodyPr/>
+      <a:lstStyle/>
+      <a:style>
+        <a:lnRef idx="2">
+          <a:schemeClr val="accent1"/>
+        </a:lnRef>
+        <a:fillRef idx="0">
+          <a:schemeClr val="accent1"/>
+        </a:fillRef>
+        <a:effectRef idx="1">
+          <a:schemeClr val="accent1"/>
+        </a:effectRef>
+        <a:fontRef idx="minor">
+          <a:schemeClr val="tx1"/>
+        </a:fontRef>
+      </a:style>
+    </a:lnDef>
+  </a:objectDefaults>
+  <a:extraClrSchemeLst/>
+  <a:extLst>
+    <a:ext uri="{05A4C25C-085E-4340-85A3-A5531E510DB2}">
+      <thm15:themeFamily xmlns:thm15="http://schemas.microsoft.com/office/thememl/2012/main" name="Office Theme" id="{2E142A2C-CD16-42D6-873A-C26D2A0506FA}" vid="{1BDDFF52-6CD6-40A5-AB3C-68EB2F1E4D0A}"/>
+    </a:ext>
+  </a:extLst>
+</a:theme>
 </file>